--- a/docs/msr/memmachine_qdrant_requests.pptx
+++ b/docs/msr/memmachine_qdrant_requests.pptx
@@ -12,6 +12,8 @@
     <p:sldId id="260" r:id="rId11"/>
     <p:sldId id="261" r:id="rId12"/>
     <p:sldId id="262" r:id="rId13"/>
+    <p:sldId id="263" r:id="rId14"/>
+    <p:sldId id="264" r:id="rId15"/>
   </p:sldIdLst>
   <p:sldSz cx="12188952" cy="6858000" type="screen4x3"/>
   <p:notesSz cx="6858000" cy="9144000"/>
@@ -20130,6 +20132,5927 @@
                 <a:latin typeface="Apple SD Gothic Neo"/>
               </a:rPr>
               <a:t>근거: 보고서 9부(임베딩) · 측정 기록 3부(E1~E11) — OpenAI 호환 스텁 서버로 실제 HTTP 요청의 입력 개수와 총 길이를 셌고, 임베더 구현은 운영과 같은 OpenAIEmbedder다.</a:t>
+            </a:r>
+          </a:p>
+        </p:txBody>
+      </p:sp>
+    </p:spTree>
+  </p:cSld>
+  <p:clrMapOvr>
+    <a:masterClrMapping/>
+  </p:clrMapOvr>
+</p:sld>
+</file>
+
+<file path=ppt/slides/slide8.xml><?xml version="1.0" encoding="utf-8"?>
+<p:sld xmlns:a="http://schemas.openxmlformats.org/drawingml/2006/main" xmlns:p="http://schemas.openxmlformats.org/presentationml/2006/main" xmlns:r="http://schemas.openxmlformats.org/officeDocument/2006/relationships">
+  <p:cSld>
+    <p:spTree>
+      <p:nvGrpSpPr>
+        <p:cNvPr id="1" name=""/>
+        <p:cNvGrpSpPr/>
+        <p:nvPr/>
+      </p:nvGrpSpPr>
+      <p:grpSpPr/>
+      <p:sp>
+        <p:nvSpPr>
+          <p:cNvPr id="2" name="Rectangle 1"/>
+          <p:cNvSpPr/>
+          <p:nvPr/>
+        </p:nvSpPr>
+        <p:spPr>
+          <a:xfrm>
+            <a:off x="0" y="0"/>
+            <a:ext cx="12188952" cy="749808"/>
+          </a:xfrm>
+          <a:prstGeom prst="rect">
+            <a:avLst/>
+          </a:prstGeom>
+          <a:solidFill>
+            <a:srgbClr val="1F355E"/>
+          </a:solidFill>
+          <a:ln>
+            <a:noFill/>
+          </a:ln>
+          <a:effectLst/>
+        </p:spPr>
+        <p:style>
+          <a:lnRef idx="1">
+            <a:schemeClr val="accent1"/>
+          </a:lnRef>
+          <a:fillRef idx="3">
+            <a:schemeClr val="accent1"/>
+          </a:fillRef>
+          <a:effectRef idx="2">
+            <a:schemeClr val="accent1"/>
+          </a:effectRef>
+          <a:fontRef idx="minor">
+            <a:schemeClr val="lt1"/>
+          </a:fontRef>
+        </p:style>
+        <p:txBody>
+          <a:bodyPr rtlCol="0" anchor="ctr"/>
+          <a:lstStyle/>
+          <a:p>
+            <a:pPr algn="ctr"/>
+          </a:p>
+        </p:txBody>
+      </p:sp>
+      <p:sp>
+        <p:nvSpPr>
+          <p:cNvPr id="3" name="TextBox 2"/>
+          <p:cNvSpPr txBox="1"/>
+          <p:nvPr/>
+        </p:nvSpPr>
+        <p:spPr>
+          <a:xfrm>
+            <a:off x="384048" y="118872"/>
+            <a:ext cx="11155680" cy="310896"/>
+          </a:xfrm>
+          <a:prstGeom prst="rect">
+            <a:avLst/>
+          </a:prstGeom>
+          <a:noFill/>
+        </p:spPr>
+        <p:txBody>
+          <a:bodyPr wrap="square" lIns="0" rIns="0" tIns="0" bIns="0">
+            <a:spAutoFit/>
+          </a:bodyPr>
+          <a:lstStyle/>
+          <a:p>
+            <a:pPr algn="l"/>
+            <a:r>
+              <a:rPr sz="2100" b="1">
+                <a:solidFill>
+                  <a:srgbClr val="FFFFFF"/>
+                </a:solidFill>
+                <a:latin typeface="Apple SD Gothic Neo"/>
+              </a:rPr>
+              <a:t>Qdrant는 언제 불리고 얼마나 걸리는가 — 파이프라인 위의 세 접점</a:t>
+            </a:r>
+          </a:p>
+        </p:txBody>
+      </p:sp>
+      <p:sp>
+        <p:nvSpPr>
+          <p:cNvPr id="4" name="TextBox 3"/>
+          <p:cNvSpPr txBox="1"/>
+          <p:nvPr/>
+        </p:nvSpPr>
+        <p:spPr>
+          <a:xfrm>
+            <a:off x="384048" y="448056"/>
+            <a:ext cx="11338560" cy="219456"/>
+          </a:xfrm>
+          <a:prstGeom prst="rect">
+            <a:avLst/>
+          </a:prstGeom>
+          <a:noFill/>
+        </p:spPr>
+        <p:txBody>
+          <a:bodyPr wrap="none" lIns="0" rIns="0" tIns="0" bIns="0">
+            <a:spAutoFit/>
+          </a:bodyPr>
+          <a:lstStyle/>
+          <a:p>
+            <a:pPr algn="l"/>
+            <a:r>
+              <a:rPr sz="1000" b="0">
+                <a:solidFill>
+                  <a:srgbClr val="C8D4E6"/>
+                </a:solidFill>
+                <a:latin typeface="Menlo"/>
+              </a:rPr>
+              <a:t>1장의 두 흐름 그대로 · 초록 굵은 테두리만 Qdrant 요청 · 시간은 같은 장비 Docker 실측</a:t>
+            </a:r>
+          </a:p>
+        </p:txBody>
+      </p:sp>
+      <p:sp>
+        <p:nvSpPr>
+          <p:cNvPr id="5" name="Rounded Rectangle 4"/>
+          <p:cNvSpPr/>
+          <p:nvPr/>
+        </p:nvSpPr>
+        <p:spPr>
+          <a:xfrm>
+            <a:off x="411480" y="932688"/>
+            <a:ext cx="237744" cy="155448"/>
+          </a:xfrm>
+          <a:prstGeom prst="roundRect">
+            <a:avLst>
+              <a:gd name="adj" fmla="val 25000"/>
+            </a:avLst>
+          </a:prstGeom>
+          <a:solidFill>
+            <a:srgbClr val="CDEAE4"/>
+          </a:solidFill>
+          <a:ln w="12700">
+            <a:solidFill>
+              <a:srgbClr val="1F7A6A"/>
+            </a:solidFill>
+          </a:ln>
+          <a:effectLst/>
+        </p:spPr>
+        <p:style>
+          <a:lnRef idx="1">
+            <a:schemeClr val="accent1"/>
+          </a:lnRef>
+          <a:fillRef idx="3">
+            <a:schemeClr val="accent1"/>
+          </a:fillRef>
+          <a:effectRef idx="2">
+            <a:schemeClr val="accent1"/>
+          </a:effectRef>
+          <a:fontRef idx="minor">
+            <a:schemeClr val="lt1"/>
+          </a:fontRef>
+        </p:style>
+        <p:txBody>
+          <a:bodyPr rtlCol="0" anchor="ctr"/>
+          <a:lstStyle/>
+          <a:p>
+            <a:pPr algn="ctr"/>
+          </a:p>
+        </p:txBody>
+      </p:sp>
+      <p:sp>
+        <p:nvSpPr>
+          <p:cNvPr id="6" name="TextBox 5"/>
+          <p:cNvSpPr txBox="1"/>
+          <p:nvPr/>
+        </p:nvSpPr>
+        <p:spPr>
+          <a:xfrm>
+            <a:off x="713232" y="932688"/>
+            <a:ext cx="2194560" cy="182880"/>
+          </a:xfrm>
+          <a:prstGeom prst="rect">
+            <a:avLst/>
+          </a:prstGeom>
+          <a:noFill/>
+        </p:spPr>
+        <p:txBody>
+          <a:bodyPr wrap="none" lIns="0" rIns="0" tIns="0" bIns="0">
+            <a:spAutoFit/>
+          </a:bodyPr>
+          <a:lstStyle/>
+          <a:p>
+            <a:pPr algn="l"/>
+            <a:r>
+              <a:rPr sz="1100" b="0">
+                <a:solidFill>
+                  <a:srgbClr val="1A1A1A"/>
+                </a:solidFill>
+                <a:latin typeface="Apple SD Gothic Neo"/>
+              </a:rPr>
+              <a:t>Qdrant 요청 발생</a:t>
+            </a:r>
+          </a:p>
+        </p:txBody>
+      </p:sp>
+      <p:sp>
+        <p:nvSpPr>
+          <p:cNvPr id="7" name="Rounded Rectangle 6"/>
+          <p:cNvSpPr/>
+          <p:nvPr/>
+        </p:nvSpPr>
+        <p:spPr>
+          <a:xfrm>
+            <a:off x="3017520" y="932688"/>
+            <a:ext cx="237744" cy="155448"/>
+          </a:xfrm>
+          <a:prstGeom prst="roundRect">
+            <a:avLst>
+              <a:gd name="adj" fmla="val 25000"/>
+            </a:avLst>
+          </a:prstGeom>
+          <a:solidFill>
+            <a:srgbClr val="F4F4F4"/>
+          </a:solidFill>
+          <a:ln w="12700">
+            <a:solidFill>
+              <a:srgbClr val="C4C4C4"/>
+            </a:solidFill>
+          </a:ln>
+          <a:effectLst/>
+        </p:spPr>
+        <p:style>
+          <a:lnRef idx="1">
+            <a:schemeClr val="accent1"/>
+          </a:lnRef>
+          <a:fillRef idx="3">
+            <a:schemeClr val="accent1"/>
+          </a:fillRef>
+          <a:effectRef idx="2">
+            <a:schemeClr val="accent1"/>
+          </a:effectRef>
+          <a:fontRef idx="minor">
+            <a:schemeClr val="lt1"/>
+          </a:fontRef>
+        </p:style>
+        <p:txBody>
+          <a:bodyPr rtlCol="0" anchor="ctr"/>
+          <a:lstStyle/>
+          <a:p>
+            <a:pPr algn="ctr"/>
+          </a:p>
+        </p:txBody>
+      </p:sp>
+      <p:sp>
+        <p:nvSpPr>
+          <p:cNvPr id="8" name="TextBox 7"/>
+          <p:cNvSpPr txBox="1"/>
+          <p:nvPr/>
+        </p:nvSpPr>
+        <p:spPr>
+          <a:xfrm>
+            <a:off x="3319272" y="932688"/>
+            <a:ext cx="5486400" cy="182880"/>
+          </a:xfrm>
+          <a:prstGeom prst="rect">
+            <a:avLst/>
+          </a:prstGeom>
+          <a:noFill/>
+        </p:spPr>
+        <p:txBody>
+          <a:bodyPr wrap="none" lIns="0" rIns="0" tIns="0" bIns="0">
+            <a:spAutoFit/>
+          </a:bodyPr>
+          <a:lstStyle/>
+          <a:p>
+            <a:pPr algn="l"/>
+            <a:r>
+              <a:rPr sz="1100" b="0">
+                <a:solidFill>
+                  <a:srgbClr val="1A1A1A"/>
+                </a:solidFill>
+                <a:latin typeface="Apple SD Gothic Neo"/>
+              </a:rPr>
+              <a:t>Qdrant 요청 없음 — PostgreSQL 또는 프로세스 안</a:t>
+            </a:r>
+          </a:p>
+        </p:txBody>
+      </p:sp>
+      <p:sp>
+        <p:nvSpPr>
+          <p:cNvPr id="9" name="TextBox 8"/>
+          <p:cNvSpPr txBox="1"/>
+          <p:nvPr/>
+        </p:nvSpPr>
+        <p:spPr>
+          <a:xfrm>
+            <a:off x="411480" y="1225296"/>
+            <a:ext cx="5486400" cy="274320"/>
+          </a:xfrm>
+          <a:prstGeom prst="rect">
+            <a:avLst/>
+          </a:prstGeom>
+          <a:noFill/>
+        </p:spPr>
+        <p:txBody>
+          <a:bodyPr wrap="square" lIns="0" rIns="0" tIns="0" bIns="0">
+            <a:spAutoFit/>
+          </a:bodyPr>
+          <a:lstStyle/>
+          <a:p>
+            <a:pPr algn="l"/>
+            <a:r>
+              <a:rPr sz="1400" b="1">
+                <a:solidFill>
+                  <a:srgbClr val="1F355E"/>
+                </a:solidFill>
+                <a:latin typeface="Apple SD Gothic Neo"/>
+              </a:rPr>
+              <a:t>① 적재   POST /memories</a:t>
+            </a:r>
+          </a:p>
+        </p:txBody>
+      </p:sp>
+      <p:sp>
+        <p:nvSpPr>
+          <p:cNvPr id="10" name="Rounded Rectangle 9"/>
+          <p:cNvSpPr/>
+          <p:nvPr/>
+        </p:nvSpPr>
+        <p:spPr>
+          <a:xfrm>
+            <a:off x="411480" y="1536192"/>
+            <a:ext cx="1389888" cy="603504"/>
+          </a:xfrm>
+          <a:prstGeom prst="roundRect">
+            <a:avLst>
+              <a:gd name="adj" fmla="val 12000"/>
+            </a:avLst>
+          </a:prstGeom>
+          <a:solidFill>
+            <a:srgbClr val="CDEAE4"/>
+          </a:solidFill>
+          <a:ln w="28575">
+            <a:solidFill>
+              <a:srgbClr val="1F355E"/>
+            </a:solidFill>
+          </a:ln>
+          <a:effectLst/>
+        </p:spPr>
+        <p:style>
+          <a:lnRef idx="1">
+            <a:schemeClr val="accent1"/>
+          </a:lnRef>
+          <a:fillRef idx="3">
+            <a:schemeClr val="accent1"/>
+          </a:fillRef>
+          <a:effectRef idx="2">
+            <a:schemeClr val="accent1"/>
+          </a:effectRef>
+          <a:fontRef idx="minor">
+            <a:schemeClr val="lt1"/>
+          </a:fontRef>
+        </p:style>
+        <p:txBody>
+          <a:bodyPr rtlCol="0" anchor="ctr" wrap="square" lIns="36576" rIns="36576" tIns="0" bIns="0"/>
+          <a:lstStyle/>
+          <a:p>
+            <a:pPr algn="ctr"/>
+            <a:r>
+              <a:rPr sz="900" b="1">
+                <a:solidFill>
+                  <a:srgbClr val="1A1A1A"/>
+                </a:solidFill>
+                <a:latin typeface="Apple SD Gothic Neo"/>
+              </a:rPr>
+              <a:t>세션 확보</a:t>
+            </a:r>
+          </a:p>
+          <a:p>
+            <a:pPr algn="ctr"/>
+            <a:r>
+              <a:rPr sz="900" b="0">
+                <a:solidFill>
+                  <a:srgbClr val="1A1A1A"/>
+                </a:solidFill>
+                <a:latin typeface="Apple SD Gothic Neo"/>
+              </a:rPr>
+              <a:t>LRU · RW 락</a:t>
+            </a:r>
+          </a:p>
+        </p:txBody>
+      </p:sp>
+      <p:sp>
+        <p:nvSpPr>
+          <p:cNvPr id="11" name="Right Arrow 10"/>
+          <p:cNvSpPr/>
+          <p:nvPr/>
+        </p:nvSpPr>
+        <p:spPr>
+          <a:xfrm>
+            <a:off x="1810512" y="1787652"/>
+            <a:ext cx="155448" cy="100584"/>
+          </a:xfrm>
+          <a:prstGeom prst="rightArrow">
+            <a:avLst>
+              <a:gd name="adj1" fmla="val 50000"/>
+              <a:gd name="adj2" fmla="val 50000"/>
+            </a:avLst>
+          </a:prstGeom>
+          <a:solidFill>
+            <a:srgbClr val="555555"/>
+          </a:solidFill>
+          <a:ln>
+            <a:noFill/>
+          </a:ln>
+          <a:effectLst/>
+        </p:spPr>
+        <p:style>
+          <a:lnRef idx="1">
+            <a:schemeClr val="accent1"/>
+          </a:lnRef>
+          <a:fillRef idx="3">
+            <a:schemeClr val="accent1"/>
+          </a:fillRef>
+          <a:effectRef idx="2">
+            <a:schemeClr val="accent1"/>
+          </a:effectRef>
+          <a:fontRef idx="minor">
+            <a:schemeClr val="lt1"/>
+          </a:fontRef>
+        </p:style>
+        <p:txBody>
+          <a:bodyPr rtlCol="0" anchor="ctr"/>
+          <a:lstStyle/>
+          <a:p>
+            <a:pPr algn="ctr"/>
+          </a:p>
+        </p:txBody>
+      </p:sp>
+      <p:sp>
+        <p:nvSpPr>
+          <p:cNvPr id="12" name="Rounded Rectangle 11"/>
+          <p:cNvSpPr/>
+          <p:nvPr/>
+        </p:nvSpPr>
+        <p:spPr>
+          <a:xfrm>
+            <a:off x="1984248" y="1536192"/>
+            <a:ext cx="1389888" cy="603504"/>
+          </a:xfrm>
+          <a:prstGeom prst="roundRect">
+            <a:avLst>
+              <a:gd name="adj" fmla="val 12000"/>
+            </a:avLst>
+          </a:prstGeom>
+          <a:solidFill>
+            <a:srgbClr val="F4F4F4"/>
+          </a:solidFill>
+          <a:ln w="16510">
+            <a:solidFill>
+              <a:srgbClr val="C4C4C4"/>
+            </a:solidFill>
+          </a:ln>
+          <a:effectLst/>
+        </p:spPr>
+        <p:style>
+          <a:lnRef idx="1">
+            <a:schemeClr val="accent1"/>
+          </a:lnRef>
+          <a:fillRef idx="3">
+            <a:schemeClr val="accent1"/>
+          </a:fillRef>
+          <a:effectRef idx="2">
+            <a:schemeClr val="accent1"/>
+          </a:effectRef>
+          <a:fontRef idx="minor">
+            <a:schemeClr val="lt1"/>
+          </a:fontRef>
+        </p:style>
+        <p:txBody>
+          <a:bodyPr rtlCol="0" anchor="ctr" wrap="square" lIns="36576" rIns="36576" tIns="0" bIns="0"/>
+          <a:lstStyle/>
+          <a:p>
+            <a:pPr algn="ctr"/>
+            <a:r>
+              <a:rPr sz="900" b="0">
+                <a:solidFill>
+                  <a:srgbClr val="8A8A8A"/>
+                </a:solidFill>
+                <a:latin typeface="Apple SD Gothic Neo"/>
+              </a:rPr>
+              <a:t>원문 INSERT</a:t>
+            </a:r>
+          </a:p>
+          <a:p>
+            <a:pPr algn="ctr"/>
+            <a:r>
+              <a:rPr sz="900" b="0">
+                <a:solidFill>
+                  <a:srgbClr val="8A8A8A"/>
+                </a:solidFill>
+                <a:latin typeface="Apple SD Gothic Neo"/>
+              </a:rPr>
+              <a:t>… RETURNING</a:t>
+            </a:r>
+          </a:p>
+        </p:txBody>
+      </p:sp>
+      <p:sp>
+        <p:nvSpPr>
+          <p:cNvPr id="13" name="Right Arrow 12"/>
+          <p:cNvSpPr/>
+          <p:nvPr/>
+        </p:nvSpPr>
+        <p:spPr>
+          <a:xfrm>
+            <a:off x="3383279" y="1787652"/>
+            <a:ext cx="155448" cy="100584"/>
+          </a:xfrm>
+          <a:prstGeom prst="rightArrow">
+            <a:avLst>
+              <a:gd name="adj1" fmla="val 50000"/>
+              <a:gd name="adj2" fmla="val 50000"/>
+            </a:avLst>
+          </a:prstGeom>
+          <a:solidFill>
+            <a:srgbClr val="555555"/>
+          </a:solidFill>
+          <a:ln>
+            <a:noFill/>
+          </a:ln>
+          <a:effectLst/>
+        </p:spPr>
+        <p:style>
+          <a:lnRef idx="1">
+            <a:schemeClr val="accent1"/>
+          </a:lnRef>
+          <a:fillRef idx="3">
+            <a:schemeClr val="accent1"/>
+          </a:fillRef>
+          <a:effectRef idx="2">
+            <a:schemeClr val="accent1"/>
+          </a:effectRef>
+          <a:fontRef idx="minor">
+            <a:schemeClr val="lt1"/>
+          </a:fontRef>
+        </p:style>
+        <p:txBody>
+          <a:bodyPr rtlCol="0" anchor="ctr"/>
+          <a:lstStyle/>
+          <a:p>
+            <a:pPr algn="ctr"/>
+          </a:p>
+        </p:txBody>
+      </p:sp>
+      <p:sp>
+        <p:nvSpPr>
+          <p:cNvPr id="14" name="Rounded Rectangle 13"/>
+          <p:cNvSpPr/>
+          <p:nvPr/>
+        </p:nvSpPr>
+        <p:spPr>
+          <a:xfrm>
+            <a:off x="3557016" y="1536192"/>
+            <a:ext cx="1389888" cy="603504"/>
+          </a:xfrm>
+          <a:prstGeom prst="roundRect">
+            <a:avLst>
+              <a:gd name="adj" fmla="val 12000"/>
+            </a:avLst>
+          </a:prstGeom>
+          <a:solidFill>
+            <a:srgbClr val="F4F4F4"/>
+          </a:solidFill>
+          <a:ln w="16510">
+            <a:solidFill>
+              <a:srgbClr val="C4C4C4"/>
+            </a:solidFill>
+          </a:ln>
+          <a:effectLst/>
+        </p:spPr>
+        <p:style>
+          <a:lnRef idx="1">
+            <a:schemeClr val="accent1"/>
+          </a:lnRef>
+          <a:fillRef idx="3">
+            <a:schemeClr val="accent1"/>
+          </a:fillRef>
+          <a:effectRef idx="2">
+            <a:schemeClr val="accent1"/>
+          </a:effectRef>
+          <a:fontRef idx="minor">
+            <a:schemeClr val="lt1"/>
+          </a:fontRef>
+        </p:style>
+        <p:txBody>
+          <a:bodyPr rtlCol="0" anchor="ctr" wrap="square" lIns="36576" rIns="36576" tIns="0" bIns="0"/>
+          <a:lstStyle/>
+          <a:p>
+            <a:pPr algn="ctr"/>
+            <a:r>
+              <a:rPr sz="900" b="0">
+                <a:solidFill>
+                  <a:srgbClr val="8A8A8A"/>
+                </a:solidFill>
+                <a:latin typeface="Apple SD Gothic Neo"/>
+              </a:rPr>
+              <a:t>세그먼트화</a:t>
+            </a:r>
+          </a:p>
+          <a:p>
+            <a:pPr algn="ctr"/>
+            <a:r>
+              <a:rPr sz="900" b="0">
+                <a:solidFill>
+                  <a:srgbClr val="8A8A8A"/>
+                </a:solidFill>
+                <a:latin typeface="Apple SD Gothic Neo"/>
+              </a:rPr>
+              <a:t>기본 passthrough</a:t>
+            </a:r>
+          </a:p>
+        </p:txBody>
+      </p:sp>
+      <p:sp>
+        <p:nvSpPr>
+          <p:cNvPr id="15" name="Right Arrow 14"/>
+          <p:cNvSpPr/>
+          <p:nvPr/>
+        </p:nvSpPr>
+        <p:spPr>
+          <a:xfrm>
+            <a:off x="4956048" y="1787652"/>
+            <a:ext cx="155448" cy="100584"/>
+          </a:xfrm>
+          <a:prstGeom prst="rightArrow">
+            <a:avLst>
+              <a:gd name="adj1" fmla="val 50000"/>
+              <a:gd name="adj2" fmla="val 50000"/>
+            </a:avLst>
+          </a:prstGeom>
+          <a:solidFill>
+            <a:srgbClr val="555555"/>
+          </a:solidFill>
+          <a:ln>
+            <a:noFill/>
+          </a:ln>
+          <a:effectLst/>
+        </p:spPr>
+        <p:style>
+          <a:lnRef idx="1">
+            <a:schemeClr val="accent1"/>
+          </a:lnRef>
+          <a:fillRef idx="3">
+            <a:schemeClr val="accent1"/>
+          </a:fillRef>
+          <a:effectRef idx="2">
+            <a:schemeClr val="accent1"/>
+          </a:effectRef>
+          <a:fontRef idx="minor">
+            <a:schemeClr val="lt1"/>
+          </a:fontRef>
+        </p:style>
+        <p:txBody>
+          <a:bodyPr rtlCol="0" anchor="ctr"/>
+          <a:lstStyle/>
+          <a:p>
+            <a:pPr algn="ctr"/>
+          </a:p>
+        </p:txBody>
+      </p:sp>
+      <p:sp>
+        <p:nvSpPr>
+          <p:cNvPr id="16" name="Rounded Rectangle 15"/>
+          <p:cNvSpPr/>
+          <p:nvPr/>
+        </p:nvSpPr>
+        <p:spPr>
+          <a:xfrm>
+            <a:off x="5129784" y="1536192"/>
+            <a:ext cx="1389888" cy="603504"/>
+          </a:xfrm>
+          <a:prstGeom prst="roundRect">
+            <a:avLst>
+              <a:gd name="adj" fmla="val 12000"/>
+            </a:avLst>
+          </a:prstGeom>
+          <a:solidFill>
+            <a:srgbClr val="F4F4F4"/>
+          </a:solidFill>
+          <a:ln w="16510">
+            <a:solidFill>
+              <a:srgbClr val="C4C4C4"/>
+            </a:solidFill>
+          </a:ln>
+          <a:effectLst/>
+        </p:spPr>
+        <p:style>
+          <a:lnRef idx="1">
+            <a:schemeClr val="accent1"/>
+          </a:lnRef>
+          <a:fillRef idx="3">
+            <a:schemeClr val="accent1"/>
+          </a:fillRef>
+          <a:effectRef idx="2">
+            <a:schemeClr val="accent1"/>
+          </a:effectRef>
+          <a:fontRef idx="minor">
+            <a:schemeClr val="lt1"/>
+          </a:fontRef>
+        </p:style>
+        <p:txBody>
+          <a:bodyPr rtlCol="0" anchor="ctr" wrap="square" lIns="36576" rIns="36576" tIns="0" bIns="0"/>
+          <a:lstStyle/>
+          <a:p>
+            <a:pPr algn="ctr"/>
+            <a:r>
+              <a:rPr sz="900" b="0">
+                <a:solidFill>
+                  <a:srgbClr val="8A8A8A"/>
+                </a:solidFill>
+                <a:latin typeface="Apple SD Gothic Neo"/>
+              </a:rPr>
+              <a:t>derivative</a:t>
+            </a:r>
+          </a:p>
+          <a:p>
+            <a:pPr algn="ctr"/>
+            <a:r>
+              <a:rPr sz="900" b="0">
+                <a:solidFill>
+                  <a:srgbClr val="8A8A8A"/>
+                </a:solidFill>
+                <a:latin typeface="Apple SD Gothic Neo"/>
+              </a:rPr>
+              <a:t>생성</a:t>
+            </a:r>
+          </a:p>
+        </p:txBody>
+      </p:sp>
+      <p:sp>
+        <p:nvSpPr>
+          <p:cNvPr id="17" name="Right Arrow 16"/>
+          <p:cNvSpPr/>
+          <p:nvPr/>
+        </p:nvSpPr>
+        <p:spPr>
+          <a:xfrm>
+            <a:off x="6528816" y="1787652"/>
+            <a:ext cx="155448" cy="100584"/>
+          </a:xfrm>
+          <a:prstGeom prst="rightArrow">
+            <a:avLst>
+              <a:gd name="adj1" fmla="val 50000"/>
+              <a:gd name="adj2" fmla="val 50000"/>
+            </a:avLst>
+          </a:prstGeom>
+          <a:solidFill>
+            <a:srgbClr val="555555"/>
+          </a:solidFill>
+          <a:ln>
+            <a:noFill/>
+          </a:ln>
+          <a:effectLst/>
+        </p:spPr>
+        <p:style>
+          <a:lnRef idx="1">
+            <a:schemeClr val="accent1"/>
+          </a:lnRef>
+          <a:fillRef idx="3">
+            <a:schemeClr val="accent1"/>
+          </a:fillRef>
+          <a:effectRef idx="2">
+            <a:schemeClr val="accent1"/>
+          </a:effectRef>
+          <a:fontRef idx="minor">
+            <a:schemeClr val="lt1"/>
+          </a:fontRef>
+        </p:style>
+        <p:txBody>
+          <a:bodyPr rtlCol="0" anchor="ctr"/>
+          <a:lstStyle/>
+          <a:p>
+            <a:pPr algn="ctr"/>
+          </a:p>
+        </p:txBody>
+      </p:sp>
+      <p:sp>
+        <p:nvSpPr>
+          <p:cNvPr id="18" name="Rounded Rectangle 17"/>
+          <p:cNvSpPr/>
+          <p:nvPr/>
+        </p:nvSpPr>
+        <p:spPr>
+          <a:xfrm>
+            <a:off x="6702552" y="1536192"/>
+            <a:ext cx="1389888" cy="603504"/>
+          </a:xfrm>
+          <a:prstGeom prst="roundRect">
+            <a:avLst>
+              <a:gd name="adj" fmla="val 12000"/>
+            </a:avLst>
+          </a:prstGeom>
+          <a:solidFill>
+            <a:srgbClr val="F4F4F4"/>
+          </a:solidFill>
+          <a:ln w="16510">
+            <a:solidFill>
+              <a:srgbClr val="C4C4C4"/>
+            </a:solidFill>
+          </a:ln>
+          <a:effectLst/>
+        </p:spPr>
+        <p:style>
+          <a:lnRef idx="1">
+            <a:schemeClr val="accent1"/>
+          </a:lnRef>
+          <a:fillRef idx="3">
+            <a:schemeClr val="accent1"/>
+          </a:fillRef>
+          <a:effectRef idx="2">
+            <a:schemeClr val="accent1"/>
+          </a:effectRef>
+          <a:fontRef idx="minor">
+            <a:schemeClr val="lt1"/>
+          </a:fontRef>
+        </p:style>
+        <p:txBody>
+          <a:bodyPr rtlCol="0" anchor="ctr" wrap="square" lIns="36576" rIns="36576" tIns="0" bIns="0"/>
+          <a:lstStyle/>
+          <a:p>
+            <a:pPr algn="ctr"/>
+            <a:r>
+              <a:rPr sz="900" b="0">
+                <a:solidFill>
+                  <a:srgbClr val="8A8A8A"/>
+                </a:solidFill>
+                <a:latin typeface="Apple SD Gothic Neo"/>
+              </a:rPr>
+              <a:t>임베딩</a:t>
+            </a:r>
+          </a:p>
+          <a:p>
+            <a:pPr algn="ctr"/>
+            <a:r>
+              <a:rPr sz="900" b="0">
+                <a:solidFill>
+                  <a:srgbClr val="8A8A8A"/>
+                </a:solidFill>
+                <a:latin typeface="Apple SD Gothic Neo"/>
+              </a:rPr>
+              <a:t>외부 API</a:t>
+            </a:r>
+          </a:p>
+        </p:txBody>
+      </p:sp>
+      <p:sp>
+        <p:nvSpPr>
+          <p:cNvPr id="19" name="Right Arrow 18"/>
+          <p:cNvSpPr/>
+          <p:nvPr/>
+        </p:nvSpPr>
+        <p:spPr>
+          <a:xfrm>
+            <a:off x="8101583" y="1787652"/>
+            <a:ext cx="155448" cy="100584"/>
+          </a:xfrm>
+          <a:prstGeom prst="rightArrow">
+            <a:avLst>
+              <a:gd name="adj1" fmla="val 50000"/>
+              <a:gd name="adj2" fmla="val 50000"/>
+            </a:avLst>
+          </a:prstGeom>
+          <a:solidFill>
+            <a:srgbClr val="555555"/>
+          </a:solidFill>
+          <a:ln>
+            <a:noFill/>
+          </a:ln>
+          <a:effectLst/>
+        </p:spPr>
+        <p:style>
+          <a:lnRef idx="1">
+            <a:schemeClr val="accent1"/>
+          </a:lnRef>
+          <a:fillRef idx="3">
+            <a:schemeClr val="accent1"/>
+          </a:fillRef>
+          <a:effectRef idx="2">
+            <a:schemeClr val="accent1"/>
+          </a:effectRef>
+          <a:fontRef idx="minor">
+            <a:schemeClr val="lt1"/>
+          </a:fontRef>
+        </p:style>
+        <p:txBody>
+          <a:bodyPr rtlCol="0" anchor="ctr"/>
+          <a:lstStyle/>
+          <a:p>
+            <a:pPr algn="ctr"/>
+          </a:p>
+        </p:txBody>
+      </p:sp>
+      <p:sp>
+        <p:nvSpPr>
+          <p:cNvPr id="20" name="Rounded Rectangle 19"/>
+          <p:cNvSpPr/>
+          <p:nvPr/>
+        </p:nvSpPr>
+        <p:spPr>
+          <a:xfrm>
+            <a:off x="8275319" y="1536192"/>
+            <a:ext cx="1389888" cy="603504"/>
+          </a:xfrm>
+          <a:prstGeom prst="roundRect">
+            <a:avLst>
+              <a:gd name="adj" fmla="val 12000"/>
+            </a:avLst>
+          </a:prstGeom>
+          <a:solidFill>
+            <a:srgbClr val="F4F4F4"/>
+          </a:solidFill>
+          <a:ln w="16510">
+            <a:solidFill>
+              <a:srgbClr val="C4C4C4"/>
+            </a:solidFill>
+          </a:ln>
+          <a:effectLst/>
+        </p:spPr>
+        <p:style>
+          <a:lnRef idx="1">
+            <a:schemeClr val="accent1"/>
+          </a:lnRef>
+          <a:fillRef idx="3">
+            <a:schemeClr val="accent1"/>
+          </a:fillRef>
+          <a:effectRef idx="2">
+            <a:schemeClr val="accent1"/>
+          </a:effectRef>
+          <a:fontRef idx="minor">
+            <a:schemeClr val="lt1"/>
+          </a:fontRef>
+        </p:style>
+        <p:txBody>
+          <a:bodyPr rtlCol="0" anchor="ctr" wrap="square" lIns="36576" rIns="36576" tIns="0" bIns="0"/>
+          <a:lstStyle/>
+          <a:p>
+            <a:pPr algn="ctr"/>
+            <a:r>
+              <a:rPr sz="900" b="0">
+                <a:solidFill>
+                  <a:srgbClr val="8A8A8A"/>
+                </a:solidFill>
+                <a:latin typeface="Apple SD Gothic Neo"/>
+              </a:rPr>
+              <a:t>세그먼트 쓰기</a:t>
+            </a:r>
+          </a:p>
+          <a:p>
+            <a:pPr algn="ctr"/>
+            <a:r>
+              <a:rPr sz="900" b="0">
+                <a:solidFill>
+                  <a:srgbClr val="8A8A8A"/>
+                </a:solidFill>
+                <a:latin typeface="Apple SD Gothic Neo"/>
+              </a:rPr>
+              <a:t>segment_store</a:t>
+            </a:r>
+          </a:p>
+        </p:txBody>
+      </p:sp>
+      <p:sp>
+        <p:nvSpPr>
+          <p:cNvPr id="21" name="Right Arrow 20"/>
+          <p:cNvSpPr/>
+          <p:nvPr/>
+        </p:nvSpPr>
+        <p:spPr>
+          <a:xfrm>
+            <a:off x="9674351" y="1787652"/>
+            <a:ext cx="155448" cy="100584"/>
+          </a:xfrm>
+          <a:prstGeom prst="rightArrow">
+            <a:avLst>
+              <a:gd name="adj1" fmla="val 50000"/>
+              <a:gd name="adj2" fmla="val 50000"/>
+            </a:avLst>
+          </a:prstGeom>
+          <a:solidFill>
+            <a:srgbClr val="555555"/>
+          </a:solidFill>
+          <a:ln>
+            <a:noFill/>
+          </a:ln>
+          <a:effectLst/>
+        </p:spPr>
+        <p:style>
+          <a:lnRef idx="1">
+            <a:schemeClr val="accent1"/>
+          </a:lnRef>
+          <a:fillRef idx="3">
+            <a:schemeClr val="accent1"/>
+          </a:fillRef>
+          <a:effectRef idx="2">
+            <a:schemeClr val="accent1"/>
+          </a:effectRef>
+          <a:fontRef idx="minor">
+            <a:schemeClr val="lt1"/>
+          </a:fontRef>
+        </p:style>
+        <p:txBody>
+          <a:bodyPr rtlCol="0" anchor="ctr"/>
+          <a:lstStyle/>
+          <a:p>
+            <a:pPr algn="ctr"/>
+          </a:p>
+        </p:txBody>
+      </p:sp>
+      <p:sp>
+        <p:nvSpPr>
+          <p:cNvPr id="22" name="Rounded Rectangle 21"/>
+          <p:cNvSpPr/>
+          <p:nvPr/>
+        </p:nvSpPr>
+        <p:spPr>
+          <a:xfrm>
+            <a:off x="9848088" y="1536192"/>
+            <a:ext cx="1389888" cy="603504"/>
+          </a:xfrm>
+          <a:prstGeom prst="roundRect">
+            <a:avLst>
+              <a:gd name="adj" fmla="val 12000"/>
+            </a:avLst>
+          </a:prstGeom>
+          <a:solidFill>
+            <a:srgbClr val="CDEAE4"/>
+          </a:solidFill>
+          <a:ln w="28575">
+            <a:solidFill>
+              <a:srgbClr val="1F355E"/>
+            </a:solidFill>
+          </a:ln>
+          <a:effectLst/>
+        </p:spPr>
+        <p:style>
+          <a:lnRef idx="1">
+            <a:schemeClr val="accent1"/>
+          </a:lnRef>
+          <a:fillRef idx="3">
+            <a:schemeClr val="accent1"/>
+          </a:fillRef>
+          <a:effectRef idx="2">
+            <a:schemeClr val="accent1"/>
+          </a:effectRef>
+          <a:fontRef idx="minor">
+            <a:schemeClr val="lt1"/>
+          </a:fontRef>
+        </p:style>
+        <p:txBody>
+          <a:bodyPr rtlCol="0" anchor="ctr" wrap="square" lIns="36576" rIns="36576" tIns="0" bIns="0"/>
+          <a:lstStyle/>
+          <a:p>
+            <a:pPr algn="ctr"/>
+            <a:r>
+              <a:rPr sz="900" b="1">
+                <a:solidFill>
+                  <a:srgbClr val="1A1A1A"/>
+                </a:solidFill>
+                <a:latin typeface="Apple SD Gothic Neo"/>
+              </a:rPr>
+              <a:t>벡터 upsert</a:t>
+            </a:r>
+          </a:p>
+          <a:p>
+            <a:pPr algn="ctr"/>
+            <a:r>
+              <a:rPr sz="900" b="0">
+                <a:solidFill>
+                  <a:srgbClr val="1A1A1A"/>
+                </a:solidFill>
+                <a:latin typeface="Apple SD Gothic Neo"/>
+              </a:rPr>
+              <a:t>Qdrant</a:t>
+            </a:r>
+          </a:p>
+        </p:txBody>
+      </p:sp>
+      <p:sp>
+        <p:nvSpPr>
+          <p:cNvPr id="23" name="TextBox 22"/>
+          <p:cNvSpPr txBox="1"/>
+          <p:nvPr/>
+        </p:nvSpPr>
+        <p:spPr>
+          <a:xfrm>
+            <a:off x="411480" y="2176272"/>
+            <a:ext cx="1389888" cy="164592"/>
+          </a:xfrm>
+          <a:prstGeom prst="rect">
+            <a:avLst/>
+          </a:prstGeom>
+          <a:noFill/>
+        </p:spPr>
+        <p:txBody>
+          <a:bodyPr wrap="none" lIns="0" rIns="0" tIns="0" bIns="0">
+            <a:spAutoFit/>
+          </a:bodyPr>
+          <a:lstStyle/>
+          <a:p>
+            <a:pPr algn="ctr"/>
+            <a:r>
+              <a:rPr sz="900" b="1">
+                <a:solidFill>
+                  <a:srgbClr val="1F355E"/>
+                </a:solidFill>
+                <a:latin typeface="Apple SD Gothic Neo"/>
+              </a:rPr>
+              <a:t>0 · 2 · 17회</a:t>
+            </a:r>
+          </a:p>
+        </p:txBody>
+      </p:sp>
+      <p:sp>
+        <p:nvSpPr>
+          <p:cNvPr id="24" name="TextBox 23"/>
+          <p:cNvSpPr txBox="1"/>
+          <p:nvPr/>
+        </p:nvSpPr>
+        <p:spPr>
+          <a:xfrm>
+            <a:off x="9848088" y="2176272"/>
+            <a:ext cx="1389888" cy="164592"/>
+          </a:xfrm>
+          <a:prstGeom prst="rect">
+            <a:avLst/>
+          </a:prstGeom>
+          <a:noFill/>
+        </p:spPr>
+        <p:txBody>
+          <a:bodyPr wrap="none" lIns="0" rIns="0" tIns="0" bIns="0">
+            <a:spAutoFit/>
+          </a:bodyPr>
+          <a:lstStyle/>
+          <a:p>
+            <a:pPr algn="ctr"/>
+            <a:r>
+              <a:rPr sz="900" b="1">
+                <a:solidFill>
+                  <a:srgbClr val="1F355E"/>
+                </a:solidFill>
+                <a:latin typeface="Apple SD Gothic Neo"/>
+              </a:rPr>
+              <a:t>1회 · 3.0 ms</a:t>
+            </a:r>
+          </a:p>
+        </p:txBody>
+      </p:sp>
+      <p:sp>
+        <p:nvSpPr>
+          <p:cNvPr id="25" name="TextBox 24"/>
+          <p:cNvSpPr txBox="1"/>
+          <p:nvPr/>
+        </p:nvSpPr>
+        <p:spPr>
+          <a:xfrm>
+            <a:off x="2103120" y="2176272"/>
+            <a:ext cx="7589520" cy="164592"/>
+          </a:xfrm>
+          <a:prstGeom prst="rect">
+            <a:avLst/>
+          </a:prstGeom>
+          <a:noFill/>
+        </p:spPr>
+        <p:txBody>
+          <a:bodyPr wrap="none" lIns="0" rIns="0" tIns="0" bIns="0">
+            <a:spAutoFit/>
+          </a:bodyPr>
+          <a:lstStyle/>
+          <a:p>
+            <a:pPr algn="ctr"/>
+            <a:r>
+              <a:rPr sz="850" b="0">
+                <a:solidFill>
+                  <a:srgbClr val="888888"/>
+                </a:solidFill>
+                <a:latin typeface="Apple SD Gothic Neo"/>
+              </a:rPr>
+              <a:t>원문과 세그먼트는 PostgreSQL, 임베딩은 외부 API — 여기서는 Qdrant 요청이 없다</a:t>
+            </a:r>
+          </a:p>
+        </p:txBody>
+      </p:sp>
+      <p:sp>
+        <p:nvSpPr>
+          <p:cNvPr id="26" name="TextBox 25"/>
+          <p:cNvSpPr txBox="1"/>
+          <p:nvPr/>
+        </p:nvSpPr>
+        <p:spPr>
+          <a:xfrm>
+            <a:off x="411480" y="2615184"/>
+            <a:ext cx="5486400" cy="274320"/>
+          </a:xfrm>
+          <a:prstGeom prst="rect">
+            <a:avLst/>
+          </a:prstGeom>
+          <a:noFill/>
+        </p:spPr>
+        <p:txBody>
+          <a:bodyPr wrap="square" lIns="0" rIns="0" tIns="0" bIns="0">
+            <a:spAutoFit/>
+          </a:bodyPr>
+          <a:lstStyle/>
+          <a:p>
+            <a:pPr algn="l"/>
+            <a:r>
+              <a:rPr sz="1400" b="1">
+                <a:solidFill>
+                  <a:srgbClr val="1F355E"/>
+                </a:solidFill>
+                <a:latin typeface="Apple SD Gothic Neo"/>
+              </a:rPr>
+              <a:t>② 검색   POST /memories/search</a:t>
+            </a:r>
+          </a:p>
+        </p:txBody>
+      </p:sp>
+      <p:sp>
+        <p:nvSpPr>
+          <p:cNvPr id="27" name="Rounded Rectangle 26"/>
+          <p:cNvSpPr/>
+          <p:nvPr/>
+        </p:nvSpPr>
+        <p:spPr>
+          <a:xfrm>
+            <a:off x="411480" y="2926080"/>
+            <a:ext cx="1261872" cy="603504"/>
+          </a:xfrm>
+          <a:prstGeom prst="roundRect">
+            <a:avLst>
+              <a:gd name="adj" fmla="val 12000"/>
+            </a:avLst>
+          </a:prstGeom>
+          <a:solidFill>
+            <a:srgbClr val="CDEAE4"/>
+          </a:solidFill>
+          <a:ln w="28575">
+            <a:solidFill>
+              <a:srgbClr val="1F355E"/>
+            </a:solidFill>
+          </a:ln>
+          <a:effectLst/>
+        </p:spPr>
+        <p:style>
+          <a:lnRef idx="1">
+            <a:schemeClr val="accent1"/>
+          </a:lnRef>
+          <a:fillRef idx="3">
+            <a:schemeClr val="accent1"/>
+          </a:fillRef>
+          <a:effectRef idx="2">
+            <a:schemeClr val="accent1"/>
+          </a:effectRef>
+          <a:fontRef idx="minor">
+            <a:schemeClr val="lt1"/>
+          </a:fontRef>
+        </p:style>
+        <p:txBody>
+          <a:bodyPr rtlCol="0" anchor="ctr" wrap="square" lIns="36576" rIns="36576" tIns="0" bIns="0"/>
+          <a:lstStyle/>
+          <a:p>
+            <a:pPr algn="ctr"/>
+            <a:r>
+              <a:rPr sz="900" b="1">
+                <a:solidFill>
+                  <a:srgbClr val="1A1A1A"/>
+                </a:solidFill>
+                <a:latin typeface="Apple SD Gothic Neo"/>
+              </a:rPr>
+              <a:t>세션 확보</a:t>
+            </a:r>
+          </a:p>
+          <a:p>
+            <a:pPr algn="ctr"/>
+            <a:r>
+              <a:rPr sz="900" b="0">
+                <a:solidFill>
+                  <a:srgbClr val="1A1A1A"/>
+                </a:solidFill>
+                <a:latin typeface="Apple SD Gothic Neo"/>
+              </a:rPr>
+              <a:t>LRU · RW 락</a:t>
+            </a:r>
+          </a:p>
+        </p:txBody>
+      </p:sp>
+      <p:sp>
+        <p:nvSpPr>
+          <p:cNvPr id="28" name="Right Arrow 27"/>
+          <p:cNvSpPr/>
+          <p:nvPr/>
+        </p:nvSpPr>
+        <p:spPr>
+          <a:xfrm>
+            <a:off x="1682495" y="3177540"/>
+            <a:ext cx="128016" cy="100584"/>
+          </a:xfrm>
+          <a:prstGeom prst="rightArrow">
+            <a:avLst>
+              <a:gd name="adj1" fmla="val 50000"/>
+              <a:gd name="adj2" fmla="val 50000"/>
+            </a:avLst>
+          </a:prstGeom>
+          <a:solidFill>
+            <a:srgbClr val="555555"/>
+          </a:solidFill>
+          <a:ln>
+            <a:noFill/>
+          </a:ln>
+          <a:effectLst/>
+        </p:spPr>
+        <p:style>
+          <a:lnRef idx="1">
+            <a:schemeClr val="accent1"/>
+          </a:lnRef>
+          <a:fillRef idx="3">
+            <a:schemeClr val="accent1"/>
+          </a:fillRef>
+          <a:effectRef idx="2">
+            <a:schemeClr val="accent1"/>
+          </a:effectRef>
+          <a:fontRef idx="minor">
+            <a:schemeClr val="lt1"/>
+          </a:fontRef>
+        </p:style>
+        <p:txBody>
+          <a:bodyPr rtlCol="0" anchor="ctr"/>
+          <a:lstStyle/>
+          <a:p>
+            <a:pPr algn="ctr"/>
+          </a:p>
+        </p:txBody>
+      </p:sp>
+      <p:sp>
+        <p:nvSpPr>
+          <p:cNvPr id="29" name="Rounded Rectangle 28"/>
+          <p:cNvSpPr/>
+          <p:nvPr/>
+        </p:nvSpPr>
+        <p:spPr>
+          <a:xfrm>
+            <a:off x="1815084" y="2926080"/>
+            <a:ext cx="1261872" cy="603504"/>
+          </a:xfrm>
+          <a:prstGeom prst="roundRect">
+            <a:avLst>
+              <a:gd name="adj" fmla="val 12000"/>
+            </a:avLst>
+          </a:prstGeom>
+          <a:solidFill>
+            <a:srgbClr val="F4F4F4"/>
+          </a:solidFill>
+          <a:ln w="16510">
+            <a:solidFill>
+              <a:srgbClr val="C4C4C4"/>
+            </a:solidFill>
+          </a:ln>
+          <a:effectLst/>
+        </p:spPr>
+        <p:style>
+          <a:lnRef idx="1">
+            <a:schemeClr val="accent1"/>
+          </a:lnRef>
+          <a:fillRef idx="3">
+            <a:schemeClr val="accent1"/>
+          </a:fillRef>
+          <a:effectRef idx="2">
+            <a:schemeClr val="accent1"/>
+          </a:effectRef>
+          <a:fontRef idx="minor">
+            <a:schemeClr val="lt1"/>
+          </a:fontRef>
+        </p:style>
+        <p:txBody>
+          <a:bodyPr rtlCol="0" anchor="ctr" wrap="square" lIns="36576" rIns="36576" tIns="0" bIns="0"/>
+          <a:lstStyle/>
+          <a:p>
+            <a:pPr algn="ctr"/>
+            <a:r>
+              <a:rPr sz="900" b="0">
+                <a:solidFill>
+                  <a:srgbClr val="8A8A8A"/>
+                </a:solidFill>
+                <a:latin typeface="Apple SD Gothic Neo"/>
+              </a:rPr>
+              <a:t>필터 파싱</a:t>
+            </a:r>
+          </a:p>
+          <a:p>
+            <a:pPr algn="ctr"/>
+            <a:r>
+              <a:rPr sz="900" b="0">
+                <a:solidFill>
+                  <a:srgbClr val="8A8A8A"/>
+                </a:solidFill>
+                <a:latin typeface="Apple SD Gothic Neo"/>
+              </a:rPr>
+              <a:t>검증 · 번역</a:t>
+            </a:r>
+          </a:p>
+        </p:txBody>
+      </p:sp>
+      <p:sp>
+        <p:nvSpPr>
+          <p:cNvPr id="30" name="Right Arrow 29"/>
+          <p:cNvSpPr/>
+          <p:nvPr/>
+        </p:nvSpPr>
+        <p:spPr>
+          <a:xfrm>
+            <a:off x="3086099" y="3177540"/>
+            <a:ext cx="128016" cy="100584"/>
+          </a:xfrm>
+          <a:prstGeom prst="rightArrow">
+            <a:avLst>
+              <a:gd name="adj1" fmla="val 50000"/>
+              <a:gd name="adj2" fmla="val 50000"/>
+            </a:avLst>
+          </a:prstGeom>
+          <a:solidFill>
+            <a:srgbClr val="555555"/>
+          </a:solidFill>
+          <a:ln>
+            <a:noFill/>
+          </a:ln>
+          <a:effectLst/>
+        </p:spPr>
+        <p:style>
+          <a:lnRef idx="1">
+            <a:schemeClr val="accent1"/>
+          </a:lnRef>
+          <a:fillRef idx="3">
+            <a:schemeClr val="accent1"/>
+          </a:fillRef>
+          <a:effectRef idx="2">
+            <a:schemeClr val="accent1"/>
+          </a:effectRef>
+          <a:fontRef idx="minor">
+            <a:schemeClr val="lt1"/>
+          </a:fontRef>
+        </p:style>
+        <p:txBody>
+          <a:bodyPr rtlCol="0" anchor="ctr"/>
+          <a:lstStyle/>
+          <a:p>
+            <a:pPr algn="ctr"/>
+          </a:p>
+        </p:txBody>
+      </p:sp>
+      <p:sp>
+        <p:nvSpPr>
+          <p:cNvPr id="31" name="Rounded Rectangle 30"/>
+          <p:cNvSpPr/>
+          <p:nvPr/>
+        </p:nvSpPr>
+        <p:spPr>
+          <a:xfrm>
+            <a:off x="3218688" y="2926080"/>
+            <a:ext cx="1261872" cy="603504"/>
+          </a:xfrm>
+          <a:prstGeom prst="roundRect">
+            <a:avLst>
+              <a:gd name="adj" fmla="val 12000"/>
+            </a:avLst>
+          </a:prstGeom>
+          <a:solidFill>
+            <a:srgbClr val="F4F4F4"/>
+          </a:solidFill>
+          <a:ln w="16510">
+            <a:solidFill>
+              <a:srgbClr val="C4C4C4"/>
+            </a:solidFill>
+          </a:ln>
+          <a:effectLst/>
+        </p:spPr>
+        <p:style>
+          <a:lnRef idx="1">
+            <a:schemeClr val="accent1"/>
+          </a:lnRef>
+          <a:fillRef idx="3">
+            <a:schemeClr val="accent1"/>
+          </a:fillRef>
+          <a:effectRef idx="2">
+            <a:schemeClr val="accent1"/>
+          </a:effectRef>
+          <a:fontRef idx="minor">
+            <a:schemeClr val="lt1"/>
+          </a:fontRef>
+        </p:style>
+        <p:txBody>
+          <a:bodyPr rtlCol="0" anchor="ctr" wrap="square" lIns="36576" rIns="36576" tIns="0" bIns="0"/>
+          <a:lstStyle/>
+          <a:p>
+            <a:pPr algn="ctr"/>
+            <a:r>
+              <a:rPr sz="900" b="0">
+                <a:solidFill>
+                  <a:srgbClr val="8A8A8A"/>
+                </a:solidFill>
+                <a:latin typeface="Apple SD Gothic Neo"/>
+              </a:rPr>
+              <a:t>쿼리 임베딩</a:t>
+            </a:r>
+          </a:p>
+          <a:p>
+            <a:pPr algn="ctr"/>
+            <a:r>
+              <a:rPr sz="900" b="0">
+                <a:solidFill>
+                  <a:srgbClr val="8A8A8A"/>
+                </a:solidFill>
+                <a:latin typeface="Apple SD Gothic Neo"/>
+              </a:rPr>
+              <a:t>외부 API</a:t>
+            </a:r>
+          </a:p>
+        </p:txBody>
+      </p:sp>
+      <p:sp>
+        <p:nvSpPr>
+          <p:cNvPr id="32" name="Right Arrow 31"/>
+          <p:cNvSpPr/>
+          <p:nvPr/>
+        </p:nvSpPr>
+        <p:spPr>
+          <a:xfrm>
+            <a:off x="4489704" y="3177540"/>
+            <a:ext cx="128016" cy="100584"/>
+          </a:xfrm>
+          <a:prstGeom prst="rightArrow">
+            <a:avLst>
+              <a:gd name="adj1" fmla="val 50000"/>
+              <a:gd name="adj2" fmla="val 50000"/>
+            </a:avLst>
+          </a:prstGeom>
+          <a:solidFill>
+            <a:srgbClr val="555555"/>
+          </a:solidFill>
+          <a:ln>
+            <a:noFill/>
+          </a:ln>
+          <a:effectLst/>
+        </p:spPr>
+        <p:style>
+          <a:lnRef idx="1">
+            <a:schemeClr val="accent1"/>
+          </a:lnRef>
+          <a:fillRef idx="3">
+            <a:schemeClr val="accent1"/>
+          </a:fillRef>
+          <a:effectRef idx="2">
+            <a:schemeClr val="accent1"/>
+          </a:effectRef>
+          <a:fontRef idx="minor">
+            <a:schemeClr val="lt1"/>
+          </a:fontRef>
+        </p:style>
+        <p:txBody>
+          <a:bodyPr rtlCol="0" anchor="ctr"/>
+          <a:lstStyle/>
+          <a:p>
+            <a:pPr algn="ctr"/>
+          </a:p>
+        </p:txBody>
+      </p:sp>
+      <p:sp>
+        <p:nvSpPr>
+          <p:cNvPr id="33" name="Rounded Rectangle 32"/>
+          <p:cNvSpPr/>
+          <p:nvPr/>
+        </p:nvSpPr>
+        <p:spPr>
+          <a:xfrm>
+            <a:off x="4622292" y="2926080"/>
+            <a:ext cx="1261872" cy="603504"/>
+          </a:xfrm>
+          <a:prstGeom prst="roundRect">
+            <a:avLst>
+              <a:gd name="adj" fmla="val 12000"/>
+            </a:avLst>
+          </a:prstGeom>
+          <a:solidFill>
+            <a:srgbClr val="CDEAE4"/>
+          </a:solidFill>
+          <a:ln w="28575">
+            <a:solidFill>
+              <a:srgbClr val="1F355E"/>
+            </a:solidFill>
+          </a:ln>
+          <a:effectLst/>
+        </p:spPr>
+        <p:style>
+          <a:lnRef idx="1">
+            <a:schemeClr val="accent1"/>
+          </a:lnRef>
+          <a:fillRef idx="3">
+            <a:schemeClr val="accent1"/>
+          </a:fillRef>
+          <a:effectRef idx="2">
+            <a:schemeClr val="accent1"/>
+          </a:effectRef>
+          <a:fontRef idx="minor">
+            <a:schemeClr val="lt1"/>
+          </a:fontRef>
+        </p:style>
+        <p:txBody>
+          <a:bodyPr rtlCol="0" anchor="ctr" wrap="square" lIns="36576" rIns="36576" tIns="0" bIns="0"/>
+          <a:lstStyle/>
+          <a:p>
+            <a:pPr algn="ctr"/>
+            <a:r>
+              <a:rPr sz="900" b="1">
+                <a:solidFill>
+                  <a:srgbClr val="1A1A1A"/>
+                </a:solidFill>
+                <a:latin typeface="Apple SD Gothic Neo"/>
+              </a:rPr>
+              <a:t>ANN 탐색</a:t>
+            </a:r>
+          </a:p>
+          <a:p>
+            <a:pPr algn="ctr"/>
+            <a:r>
+              <a:rPr sz="900" b="0">
+                <a:solidFill>
+                  <a:srgbClr val="1A1A1A"/>
+                </a:solidFill>
+                <a:latin typeface="Apple SD Gothic Neo"/>
+              </a:rPr>
+              <a:t>+ payload 필터</a:t>
+            </a:r>
+          </a:p>
+        </p:txBody>
+      </p:sp>
+      <p:sp>
+        <p:nvSpPr>
+          <p:cNvPr id="34" name="Right Arrow 33"/>
+          <p:cNvSpPr/>
+          <p:nvPr/>
+        </p:nvSpPr>
+        <p:spPr>
+          <a:xfrm>
+            <a:off x="5893307" y="3177540"/>
+            <a:ext cx="128016" cy="100584"/>
+          </a:xfrm>
+          <a:prstGeom prst="rightArrow">
+            <a:avLst>
+              <a:gd name="adj1" fmla="val 50000"/>
+              <a:gd name="adj2" fmla="val 50000"/>
+            </a:avLst>
+          </a:prstGeom>
+          <a:solidFill>
+            <a:srgbClr val="555555"/>
+          </a:solidFill>
+          <a:ln>
+            <a:noFill/>
+          </a:ln>
+          <a:effectLst/>
+        </p:spPr>
+        <p:style>
+          <a:lnRef idx="1">
+            <a:schemeClr val="accent1"/>
+          </a:lnRef>
+          <a:fillRef idx="3">
+            <a:schemeClr val="accent1"/>
+          </a:fillRef>
+          <a:effectRef idx="2">
+            <a:schemeClr val="accent1"/>
+          </a:effectRef>
+          <a:fontRef idx="minor">
+            <a:schemeClr val="lt1"/>
+          </a:fontRef>
+        </p:style>
+        <p:txBody>
+          <a:bodyPr rtlCol="0" anchor="ctr"/>
+          <a:lstStyle/>
+          <a:p>
+            <a:pPr algn="ctr"/>
+          </a:p>
+        </p:txBody>
+      </p:sp>
+      <p:sp>
+        <p:nvSpPr>
+          <p:cNvPr id="35" name="Rounded Rectangle 34"/>
+          <p:cNvSpPr/>
+          <p:nvPr/>
+        </p:nvSpPr>
+        <p:spPr>
+          <a:xfrm>
+            <a:off x="6025896" y="2926080"/>
+            <a:ext cx="1261872" cy="603504"/>
+          </a:xfrm>
+          <a:prstGeom prst="roundRect">
+            <a:avLst>
+              <a:gd name="adj" fmla="val 12000"/>
+            </a:avLst>
+          </a:prstGeom>
+          <a:solidFill>
+            <a:srgbClr val="F4F4F4"/>
+          </a:solidFill>
+          <a:ln w="16510">
+            <a:solidFill>
+              <a:srgbClr val="C4C4C4"/>
+            </a:solidFill>
+          </a:ln>
+          <a:effectLst/>
+        </p:spPr>
+        <p:style>
+          <a:lnRef idx="1">
+            <a:schemeClr val="accent1"/>
+          </a:lnRef>
+          <a:fillRef idx="3">
+            <a:schemeClr val="accent1"/>
+          </a:fillRef>
+          <a:effectRef idx="2">
+            <a:schemeClr val="accent1"/>
+          </a:effectRef>
+          <a:fontRef idx="minor">
+            <a:schemeClr val="lt1"/>
+          </a:fontRef>
+        </p:style>
+        <p:txBody>
+          <a:bodyPr rtlCol="0" anchor="ctr" wrap="square" lIns="36576" rIns="36576" tIns="0" bIns="0"/>
+          <a:lstStyle/>
+          <a:p>
+            <a:pPr algn="ctr"/>
+            <a:r>
+              <a:rPr sz="900" b="0">
+                <a:solidFill>
+                  <a:srgbClr val="8A8A8A"/>
+                </a:solidFill>
+                <a:latin typeface="Apple SD Gothic Neo"/>
+              </a:rPr>
+              <a:t>문맥 walk</a:t>
+            </a:r>
+          </a:p>
+          <a:p>
+            <a:pPr algn="ctr"/>
+            <a:r>
+              <a:rPr sz="900" b="0">
+                <a:solidFill>
+                  <a:srgbClr val="8A8A8A"/>
+                </a:solidFill>
+                <a:latin typeface="Apple SD Gothic Neo"/>
+              </a:rPr>
+              <a:t>PostgreSQL</a:t>
+            </a:r>
+          </a:p>
+        </p:txBody>
+      </p:sp>
+      <p:sp>
+        <p:nvSpPr>
+          <p:cNvPr id="36" name="Right Arrow 35"/>
+          <p:cNvSpPr/>
+          <p:nvPr/>
+        </p:nvSpPr>
+        <p:spPr>
+          <a:xfrm>
+            <a:off x="7296912" y="3177540"/>
+            <a:ext cx="128016" cy="100584"/>
+          </a:xfrm>
+          <a:prstGeom prst="rightArrow">
+            <a:avLst>
+              <a:gd name="adj1" fmla="val 50000"/>
+              <a:gd name="adj2" fmla="val 50000"/>
+            </a:avLst>
+          </a:prstGeom>
+          <a:solidFill>
+            <a:srgbClr val="555555"/>
+          </a:solidFill>
+          <a:ln>
+            <a:noFill/>
+          </a:ln>
+          <a:effectLst/>
+        </p:spPr>
+        <p:style>
+          <a:lnRef idx="1">
+            <a:schemeClr val="accent1"/>
+          </a:lnRef>
+          <a:fillRef idx="3">
+            <a:schemeClr val="accent1"/>
+          </a:fillRef>
+          <a:effectRef idx="2">
+            <a:schemeClr val="accent1"/>
+          </a:effectRef>
+          <a:fontRef idx="minor">
+            <a:schemeClr val="lt1"/>
+          </a:fontRef>
+        </p:style>
+        <p:txBody>
+          <a:bodyPr rtlCol="0" anchor="ctr"/>
+          <a:lstStyle/>
+          <a:p>
+            <a:pPr algn="ctr"/>
+          </a:p>
+        </p:txBody>
+      </p:sp>
+      <p:sp>
+        <p:nvSpPr>
+          <p:cNvPr id="37" name="Rounded Rectangle 36"/>
+          <p:cNvSpPr/>
+          <p:nvPr/>
+        </p:nvSpPr>
+        <p:spPr>
+          <a:xfrm>
+            <a:off x="7429500" y="2926080"/>
+            <a:ext cx="1261872" cy="603504"/>
+          </a:xfrm>
+          <a:prstGeom prst="roundRect">
+            <a:avLst>
+              <a:gd name="adj" fmla="val 12000"/>
+            </a:avLst>
+          </a:prstGeom>
+          <a:solidFill>
+            <a:srgbClr val="F4F4F4"/>
+          </a:solidFill>
+          <a:ln w="16510">
+            <a:solidFill>
+              <a:srgbClr val="C4C4C4"/>
+            </a:solidFill>
+          </a:ln>
+          <a:effectLst/>
+        </p:spPr>
+        <p:style>
+          <a:lnRef idx="1">
+            <a:schemeClr val="accent1"/>
+          </a:lnRef>
+          <a:fillRef idx="3">
+            <a:schemeClr val="accent1"/>
+          </a:fillRef>
+          <a:effectRef idx="2">
+            <a:schemeClr val="accent1"/>
+          </a:effectRef>
+          <a:fontRef idx="minor">
+            <a:schemeClr val="lt1"/>
+          </a:fontRef>
+        </p:style>
+        <p:txBody>
+          <a:bodyPr rtlCol="0" anchor="ctr" wrap="square" lIns="36576" rIns="36576" tIns="0" bIns="0"/>
+          <a:lstStyle/>
+          <a:p>
+            <a:pPr algn="ctr"/>
+            <a:r>
+              <a:rPr sz="900" b="0">
+                <a:solidFill>
+                  <a:srgbClr val="8A8A8A"/>
+                </a:solidFill>
+                <a:latin typeface="Apple SD Gothic Neo"/>
+              </a:rPr>
+              <a:t>리랭킹</a:t>
+            </a:r>
+          </a:p>
+          <a:p>
+            <a:pPr algn="ctr"/>
+            <a:r>
+              <a:rPr sz="900" b="0">
+                <a:solidFill>
+                  <a:srgbClr val="8A8A8A"/>
+                </a:solidFill>
+                <a:latin typeface="Apple SD Gothic Neo"/>
+              </a:rPr>
+              <a:t>기본 없음</a:t>
+            </a:r>
+          </a:p>
+        </p:txBody>
+      </p:sp>
+      <p:sp>
+        <p:nvSpPr>
+          <p:cNvPr id="38" name="Right Arrow 37"/>
+          <p:cNvSpPr/>
+          <p:nvPr/>
+        </p:nvSpPr>
+        <p:spPr>
+          <a:xfrm>
+            <a:off x="8700515" y="3177540"/>
+            <a:ext cx="128016" cy="100584"/>
+          </a:xfrm>
+          <a:prstGeom prst="rightArrow">
+            <a:avLst>
+              <a:gd name="adj1" fmla="val 50000"/>
+              <a:gd name="adj2" fmla="val 50000"/>
+            </a:avLst>
+          </a:prstGeom>
+          <a:solidFill>
+            <a:srgbClr val="555555"/>
+          </a:solidFill>
+          <a:ln>
+            <a:noFill/>
+          </a:ln>
+          <a:effectLst/>
+        </p:spPr>
+        <p:style>
+          <a:lnRef idx="1">
+            <a:schemeClr val="accent1"/>
+          </a:lnRef>
+          <a:fillRef idx="3">
+            <a:schemeClr val="accent1"/>
+          </a:fillRef>
+          <a:effectRef idx="2">
+            <a:schemeClr val="accent1"/>
+          </a:effectRef>
+          <a:fontRef idx="minor">
+            <a:schemeClr val="lt1"/>
+          </a:fontRef>
+        </p:style>
+        <p:txBody>
+          <a:bodyPr rtlCol="0" anchor="ctr"/>
+          <a:lstStyle/>
+          <a:p>
+            <a:pPr algn="ctr"/>
+          </a:p>
+        </p:txBody>
+      </p:sp>
+      <p:sp>
+        <p:nvSpPr>
+          <p:cNvPr id="39" name="Rounded Rectangle 38"/>
+          <p:cNvSpPr/>
+          <p:nvPr/>
+        </p:nvSpPr>
+        <p:spPr>
+          <a:xfrm>
+            <a:off x="8833103" y="2926080"/>
+            <a:ext cx="1261872" cy="603504"/>
+          </a:xfrm>
+          <a:prstGeom prst="roundRect">
+            <a:avLst>
+              <a:gd name="adj" fmla="val 12000"/>
+            </a:avLst>
+          </a:prstGeom>
+          <a:solidFill>
+            <a:srgbClr val="F4F4F4"/>
+          </a:solidFill>
+          <a:ln w="16510">
+            <a:solidFill>
+              <a:srgbClr val="C4C4C4"/>
+            </a:solidFill>
+          </a:ln>
+          <a:effectLst/>
+        </p:spPr>
+        <p:style>
+          <a:lnRef idx="1">
+            <a:schemeClr val="accent1"/>
+          </a:lnRef>
+          <a:fillRef idx="3">
+            <a:schemeClr val="accent1"/>
+          </a:fillRef>
+          <a:effectRef idx="2">
+            <a:schemeClr val="accent1"/>
+          </a:effectRef>
+          <a:fontRef idx="minor">
+            <a:schemeClr val="lt1"/>
+          </a:fontRef>
+        </p:style>
+        <p:txBody>
+          <a:bodyPr rtlCol="0" anchor="ctr" wrap="square" lIns="36576" rIns="36576" tIns="0" bIns="0"/>
+          <a:lstStyle/>
+          <a:p>
+            <a:pPr algn="ctr"/>
+            <a:r>
+              <a:rPr sz="900" b="0">
+                <a:solidFill>
+                  <a:srgbClr val="8A8A8A"/>
+                </a:solidFill>
+                <a:latin typeface="Apple SD Gothic Neo"/>
+              </a:rPr>
+              <a:t>결과 조립</a:t>
+            </a:r>
+          </a:p>
+          <a:p>
+            <a:pPr algn="ctr"/>
+            <a:r>
+              <a:rPr sz="900" b="0">
+                <a:solidFill>
+                  <a:srgbClr val="8A8A8A"/>
+                </a:solidFill>
+                <a:latin typeface="Apple SD Gothic Neo"/>
+              </a:rPr>
+              <a:t>프로세스 내</a:t>
+            </a:r>
+          </a:p>
+        </p:txBody>
+      </p:sp>
+      <p:sp>
+        <p:nvSpPr>
+          <p:cNvPr id="40" name="Right Arrow 39"/>
+          <p:cNvSpPr/>
+          <p:nvPr/>
+        </p:nvSpPr>
+        <p:spPr>
+          <a:xfrm>
+            <a:off x="10104119" y="3177540"/>
+            <a:ext cx="128016" cy="100584"/>
+          </a:xfrm>
+          <a:prstGeom prst="rightArrow">
+            <a:avLst>
+              <a:gd name="adj1" fmla="val 50000"/>
+              <a:gd name="adj2" fmla="val 50000"/>
+            </a:avLst>
+          </a:prstGeom>
+          <a:solidFill>
+            <a:srgbClr val="555555"/>
+          </a:solidFill>
+          <a:ln>
+            <a:noFill/>
+          </a:ln>
+          <a:effectLst/>
+        </p:spPr>
+        <p:style>
+          <a:lnRef idx="1">
+            <a:schemeClr val="accent1"/>
+          </a:lnRef>
+          <a:fillRef idx="3">
+            <a:schemeClr val="accent1"/>
+          </a:fillRef>
+          <a:effectRef idx="2">
+            <a:schemeClr val="accent1"/>
+          </a:effectRef>
+          <a:fontRef idx="minor">
+            <a:schemeClr val="lt1"/>
+          </a:fontRef>
+        </p:style>
+        <p:txBody>
+          <a:bodyPr rtlCol="0" anchor="ctr"/>
+          <a:lstStyle/>
+          <a:p>
+            <a:pPr algn="ctr"/>
+          </a:p>
+        </p:txBody>
+      </p:sp>
+      <p:sp>
+        <p:nvSpPr>
+          <p:cNvPr id="41" name="Rounded Rectangle 40"/>
+          <p:cNvSpPr/>
+          <p:nvPr/>
+        </p:nvSpPr>
+        <p:spPr>
+          <a:xfrm>
+            <a:off x="10236707" y="2926080"/>
+            <a:ext cx="1261872" cy="603504"/>
+          </a:xfrm>
+          <a:prstGeom prst="roundRect">
+            <a:avLst>
+              <a:gd name="adj" fmla="val 12000"/>
+            </a:avLst>
+          </a:prstGeom>
+          <a:solidFill>
+            <a:srgbClr val="F4F4F4"/>
+          </a:solidFill>
+          <a:ln w="16510">
+            <a:solidFill>
+              <a:srgbClr val="C4C4C4"/>
+            </a:solidFill>
+          </a:ln>
+          <a:effectLst/>
+        </p:spPr>
+        <p:style>
+          <a:lnRef idx="1">
+            <a:schemeClr val="accent1"/>
+          </a:lnRef>
+          <a:fillRef idx="3">
+            <a:schemeClr val="accent1"/>
+          </a:fillRef>
+          <a:effectRef idx="2">
+            <a:schemeClr val="accent1"/>
+          </a:effectRef>
+          <a:fontRef idx="minor">
+            <a:schemeClr val="lt1"/>
+          </a:fontRef>
+        </p:style>
+        <p:txBody>
+          <a:bodyPr rtlCol="0" anchor="ctr" wrap="square" lIns="36576" rIns="36576" tIns="0" bIns="0"/>
+          <a:lstStyle/>
+          <a:p>
+            <a:pPr algn="ctr"/>
+            <a:r>
+              <a:rPr sz="900" b="0">
+                <a:solidFill>
+                  <a:srgbClr val="8A8A8A"/>
+                </a:solidFill>
+                <a:latin typeface="Apple SD Gothic Neo"/>
+              </a:rPr>
+              <a:t>원문 복원</a:t>
+            </a:r>
+          </a:p>
+          <a:p>
+            <a:pPr algn="ctr"/>
+            <a:r>
+              <a:rPr sz="900" b="0">
+                <a:solidFill>
+                  <a:srgbClr val="8A8A8A"/>
+                </a:solidFill>
+                <a:latin typeface="Apple SD Gothic Neo"/>
+              </a:rPr>
+              <a:t>PK 조회 · PG</a:t>
+            </a:r>
+          </a:p>
+        </p:txBody>
+      </p:sp>
+      <p:sp>
+        <p:nvSpPr>
+          <p:cNvPr id="42" name="TextBox 41"/>
+          <p:cNvSpPr txBox="1"/>
+          <p:nvPr/>
+        </p:nvSpPr>
+        <p:spPr>
+          <a:xfrm>
+            <a:off x="411480" y="3566160"/>
+            <a:ext cx="1261872" cy="164592"/>
+          </a:xfrm>
+          <a:prstGeom prst="rect">
+            <a:avLst/>
+          </a:prstGeom>
+          <a:noFill/>
+        </p:spPr>
+        <p:txBody>
+          <a:bodyPr wrap="none" lIns="0" rIns="0" tIns="0" bIns="0">
+            <a:spAutoFit/>
+          </a:bodyPr>
+          <a:lstStyle/>
+          <a:p>
+            <a:pPr algn="ctr"/>
+            <a:r>
+              <a:rPr sz="900" b="1">
+                <a:solidFill>
+                  <a:srgbClr val="1F355E"/>
+                </a:solidFill>
+                <a:latin typeface="Apple SD Gothic Neo"/>
+              </a:rPr>
+              <a:t>0 · 2 · 17회</a:t>
+            </a:r>
+          </a:p>
+        </p:txBody>
+      </p:sp>
+      <p:sp>
+        <p:nvSpPr>
+          <p:cNvPr id="43" name="TextBox 42"/>
+          <p:cNvSpPr txBox="1"/>
+          <p:nvPr/>
+        </p:nvSpPr>
+        <p:spPr>
+          <a:xfrm>
+            <a:off x="4622292" y="3566160"/>
+            <a:ext cx="1261872" cy="164592"/>
+          </a:xfrm>
+          <a:prstGeom prst="rect">
+            <a:avLst/>
+          </a:prstGeom>
+          <a:noFill/>
+        </p:spPr>
+        <p:txBody>
+          <a:bodyPr wrap="none" lIns="0" rIns="0" tIns="0" bIns="0">
+            <a:spAutoFit/>
+          </a:bodyPr>
+          <a:lstStyle/>
+          <a:p>
+            <a:pPr algn="ctr"/>
+            <a:r>
+              <a:rPr sz="900" b="1">
+                <a:solidFill>
+                  <a:srgbClr val="1F355E"/>
+                </a:solidFill>
+                <a:latin typeface="Apple SD Gothic Neo"/>
+              </a:rPr>
+              <a:t>1회 · 1.6~2.5 ms</a:t>
+            </a:r>
+          </a:p>
+        </p:txBody>
+      </p:sp>
+      <p:sp>
+        <p:nvSpPr>
+          <p:cNvPr id="44" name="TextBox 43"/>
+          <p:cNvSpPr txBox="1"/>
+          <p:nvPr/>
+        </p:nvSpPr>
+        <p:spPr>
+          <a:xfrm>
+            <a:off x="6025896" y="3566160"/>
+            <a:ext cx="5468112" cy="164592"/>
+          </a:xfrm>
+          <a:prstGeom prst="rect">
+            <a:avLst/>
+          </a:prstGeom>
+          <a:noFill/>
+        </p:spPr>
+        <p:txBody>
+          <a:bodyPr wrap="none" lIns="0" rIns="0" tIns="0" bIns="0">
+            <a:spAutoFit/>
+          </a:bodyPr>
+          <a:lstStyle/>
+          <a:p>
+            <a:pPr algn="ctr"/>
+            <a:r>
+              <a:rPr sz="850" b="0">
+                <a:solidFill>
+                  <a:srgbClr val="888888"/>
+                </a:solidFill>
+                <a:latin typeface="Apple SD Gothic Neo"/>
+              </a:rPr>
+              <a:t>이 뒤로 Qdrant 요청은 0회 — 문맥 walk와 원문 복원은 PostgreSQL이다</a:t>
+            </a:r>
+          </a:p>
+        </p:txBody>
+      </p:sp>
+      <p:sp>
+        <p:nvSpPr>
+          <p:cNvPr id="45" name="Rectangle 44"/>
+          <p:cNvSpPr/>
+          <p:nvPr/>
+        </p:nvSpPr>
+        <p:spPr>
+          <a:xfrm>
+            <a:off x="411480" y="3858768"/>
+            <a:ext cx="6675120" cy="256032"/>
+          </a:xfrm>
+          <a:prstGeom prst="rect">
+            <a:avLst/>
+          </a:prstGeom>
+          <a:solidFill>
+            <a:srgbClr val="1F355E"/>
+          </a:solidFill>
+          <a:ln>
+            <a:noFill/>
+          </a:ln>
+          <a:effectLst/>
+        </p:spPr>
+        <p:style>
+          <a:lnRef idx="1">
+            <a:schemeClr val="accent1"/>
+          </a:lnRef>
+          <a:fillRef idx="3">
+            <a:schemeClr val="accent1"/>
+          </a:fillRef>
+          <a:effectRef idx="2">
+            <a:schemeClr val="accent1"/>
+          </a:effectRef>
+          <a:fontRef idx="minor">
+            <a:schemeClr val="lt1"/>
+          </a:fontRef>
+        </p:style>
+        <p:txBody>
+          <a:bodyPr rtlCol="0" anchor="ctr"/>
+          <a:lstStyle/>
+          <a:p>
+            <a:pPr algn="ctr"/>
+          </a:p>
+        </p:txBody>
+      </p:sp>
+      <p:sp>
+        <p:nvSpPr>
+          <p:cNvPr id="46" name="TextBox 45"/>
+          <p:cNvSpPr txBox="1"/>
+          <p:nvPr/>
+        </p:nvSpPr>
+        <p:spPr>
+          <a:xfrm>
+            <a:off x="475488" y="3895344"/>
+            <a:ext cx="2660903" cy="182880"/>
+          </a:xfrm>
+          <a:prstGeom prst="rect">
+            <a:avLst/>
+          </a:prstGeom>
+          <a:noFill/>
+        </p:spPr>
+        <p:txBody>
+          <a:bodyPr wrap="none" lIns="0" rIns="0" tIns="0" bIns="0">
+            <a:spAutoFit/>
+          </a:bodyPr>
+          <a:lstStyle/>
+          <a:p>
+            <a:pPr algn="l"/>
+            <a:r>
+              <a:rPr sz="900" b="1">
+                <a:solidFill>
+                  <a:srgbClr val="FFFFFF"/>
+                </a:solidFill>
+                <a:latin typeface="Apple SD Gothic Neo"/>
+              </a:rPr>
+              <a:t>세션 확보의 상태</a:t>
+            </a:r>
+          </a:p>
+        </p:txBody>
+      </p:sp>
+      <p:sp>
+        <p:nvSpPr>
+          <p:cNvPr id="47" name="TextBox 46"/>
+          <p:cNvSpPr txBox="1"/>
+          <p:nvPr/>
+        </p:nvSpPr>
+        <p:spPr>
+          <a:xfrm>
+            <a:off x="3264408" y="3895344"/>
+            <a:ext cx="694944" cy="182880"/>
+          </a:xfrm>
+          <a:prstGeom prst="rect">
+            <a:avLst/>
+          </a:prstGeom>
+          <a:noFill/>
+        </p:spPr>
+        <p:txBody>
+          <a:bodyPr wrap="none" lIns="0" rIns="0" tIns="0" bIns="0">
+            <a:spAutoFit/>
+          </a:bodyPr>
+          <a:lstStyle/>
+          <a:p>
+            <a:pPr algn="l"/>
+            <a:r>
+              <a:rPr sz="900" b="1">
+                <a:solidFill>
+                  <a:srgbClr val="FFFFFF"/>
+                </a:solidFill>
+                <a:latin typeface="Apple SD Gothic Neo"/>
+              </a:rPr>
+              <a:t>요청</a:t>
+            </a:r>
+          </a:p>
+        </p:txBody>
+      </p:sp>
+      <p:sp>
+        <p:nvSpPr>
+          <p:cNvPr id="48" name="TextBox 47"/>
+          <p:cNvSpPr txBox="1"/>
+          <p:nvPr/>
+        </p:nvSpPr>
+        <p:spPr>
+          <a:xfrm>
+            <a:off x="4087368" y="3895344"/>
+            <a:ext cx="1289304" cy="182880"/>
+          </a:xfrm>
+          <a:prstGeom prst="rect">
+            <a:avLst/>
+          </a:prstGeom>
+          <a:noFill/>
+        </p:spPr>
+        <p:txBody>
+          <a:bodyPr wrap="none" lIns="0" rIns="0" tIns="0" bIns="0">
+            <a:spAutoFit/>
+          </a:bodyPr>
+          <a:lstStyle/>
+          <a:p>
+            <a:pPr algn="l"/>
+            <a:r>
+              <a:rPr sz="900" b="1">
+                <a:solidFill>
+                  <a:srgbClr val="FFFFFF"/>
+                </a:solidFill>
+                <a:latin typeface="Apple SD Gothic Neo"/>
+              </a:rPr>
+              <a:t>실측 시간</a:t>
+            </a:r>
+          </a:p>
+        </p:txBody>
+      </p:sp>
+      <p:sp>
+        <p:nvSpPr>
+          <p:cNvPr id="49" name="TextBox 48"/>
+          <p:cNvSpPr txBox="1"/>
+          <p:nvPr/>
+        </p:nvSpPr>
+        <p:spPr>
+          <a:xfrm>
+            <a:off x="5504688" y="3895344"/>
+            <a:ext cx="1517904" cy="182880"/>
+          </a:xfrm>
+          <a:prstGeom prst="rect">
+            <a:avLst/>
+          </a:prstGeom>
+          <a:noFill/>
+        </p:spPr>
+        <p:txBody>
+          <a:bodyPr wrap="none" lIns="0" rIns="0" tIns="0" bIns="0">
+            <a:spAutoFit/>
+          </a:bodyPr>
+          <a:lstStyle/>
+          <a:p>
+            <a:pPr algn="l"/>
+            <a:r>
+              <a:rPr sz="900" b="1">
+                <a:solidFill>
+                  <a:srgbClr val="FFFFFF"/>
+                </a:solidFill>
+                <a:latin typeface="Apple SD Gothic Neo"/>
+              </a:rPr>
+              <a:t>언제 생기나</a:t>
+            </a:r>
+          </a:p>
+        </p:txBody>
+      </p:sp>
+      <p:sp>
+        <p:nvSpPr>
+          <p:cNvPr id="50" name="Rectangle 49"/>
+          <p:cNvSpPr/>
+          <p:nvPr/>
+        </p:nvSpPr>
+        <p:spPr>
+          <a:xfrm>
+            <a:off x="411480" y="4114800"/>
+            <a:ext cx="6675120" cy="274320"/>
+          </a:xfrm>
+          <a:prstGeom prst="rect">
+            <a:avLst/>
+          </a:prstGeom>
+          <a:solidFill>
+            <a:srgbClr val="DBE6F6"/>
+          </a:solidFill>
+          <a:ln w="12700">
+            <a:solidFill>
+              <a:srgbClr val="FFFFFF"/>
+            </a:solidFill>
+          </a:ln>
+          <a:effectLst/>
+        </p:spPr>
+        <p:style>
+          <a:lnRef idx="1">
+            <a:schemeClr val="accent1"/>
+          </a:lnRef>
+          <a:fillRef idx="3">
+            <a:schemeClr val="accent1"/>
+          </a:fillRef>
+          <a:effectRef idx="2">
+            <a:schemeClr val="accent1"/>
+          </a:effectRef>
+          <a:fontRef idx="minor">
+            <a:schemeClr val="lt1"/>
+          </a:fontRef>
+        </p:style>
+        <p:txBody>
+          <a:bodyPr rtlCol="0" anchor="ctr"/>
+          <a:lstStyle/>
+          <a:p>
+            <a:pPr algn="ctr"/>
+          </a:p>
+        </p:txBody>
+      </p:sp>
+      <p:sp>
+        <p:nvSpPr>
+          <p:cNvPr id="51" name="TextBox 50"/>
+          <p:cNvSpPr txBox="1"/>
+          <p:nvPr/>
+        </p:nvSpPr>
+        <p:spPr>
+          <a:xfrm>
+            <a:off x="475488" y="4160520"/>
+            <a:ext cx="2660903" cy="182880"/>
+          </a:xfrm>
+          <a:prstGeom prst="rect">
+            <a:avLst/>
+          </a:prstGeom>
+          <a:noFill/>
+        </p:spPr>
+        <p:txBody>
+          <a:bodyPr wrap="none" lIns="0" rIns="0" tIns="0" bIns="0">
+            <a:spAutoFit/>
+          </a:bodyPr>
+          <a:lstStyle/>
+          <a:p>
+            <a:pPr algn="l"/>
+            <a:r>
+              <a:rPr sz="850" b="0">
+                <a:solidFill>
+                  <a:srgbClr val="1A1A1A"/>
+                </a:solidFill>
+                <a:latin typeface="Apple SD Gothic Neo"/>
+              </a:rPr>
+              <a:t>바로 처리 — 캐시에 인스턴스 있음</a:t>
+            </a:r>
+          </a:p>
+        </p:txBody>
+      </p:sp>
+      <p:sp>
+        <p:nvSpPr>
+          <p:cNvPr id="52" name="TextBox 51"/>
+          <p:cNvSpPr txBox="1"/>
+          <p:nvPr/>
+        </p:nvSpPr>
+        <p:spPr>
+          <a:xfrm>
+            <a:off x="3264408" y="4160520"/>
+            <a:ext cx="694944" cy="182880"/>
+          </a:xfrm>
+          <a:prstGeom prst="rect">
+            <a:avLst/>
+          </a:prstGeom>
+          <a:noFill/>
+        </p:spPr>
+        <p:txBody>
+          <a:bodyPr wrap="none" lIns="0" rIns="0" tIns="0" bIns="0">
+            <a:spAutoFit/>
+          </a:bodyPr>
+          <a:lstStyle/>
+          <a:p>
+            <a:pPr algn="ctr"/>
+            <a:r>
+              <a:rPr sz="1050" b="1">
+                <a:solidFill>
+                  <a:srgbClr val="1F4E79"/>
+                </a:solidFill>
+                <a:latin typeface="Menlo"/>
+              </a:rPr>
+              <a:t>0회</a:t>
+            </a:r>
+          </a:p>
+        </p:txBody>
+      </p:sp>
+      <p:sp>
+        <p:nvSpPr>
+          <p:cNvPr id="53" name="TextBox 52"/>
+          <p:cNvSpPr txBox="1"/>
+          <p:nvPr/>
+        </p:nvSpPr>
+        <p:spPr>
+          <a:xfrm>
+            <a:off x="4087368" y="4160520"/>
+            <a:ext cx="1289304" cy="182880"/>
+          </a:xfrm>
+          <a:prstGeom prst="rect">
+            <a:avLst/>
+          </a:prstGeom>
+          <a:noFill/>
+        </p:spPr>
+        <p:txBody>
+          <a:bodyPr wrap="none" lIns="0" rIns="0" tIns="0" bIns="0">
+            <a:spAutoFit/>
+          </a:bodyPr>
+          <a:lstStyle/>
+          <a:p>
+            <a:pPr algn="ctr"/>
+            <a:r>
+              <a:rPr sz="1050" b="1">
+                <a:solidFill>
+                  <a:srgbClr val="1F4E79"/>
+                </a:solidFill>
+                <a:latin typeface="Menlo"/>
+              </a:rPr>
+              <a:t>0 ms</a:t>
+            </a:r>
+          </a:p>
+        </p:txBody>
+      </p:sp>
+      <p:sp>
+        <p:nvSpPr>
+          <p:cNvPr id="54" name="TextBox 53"/>
+          <p:cNvSpPr txBox="1"/>
+          <p:nvPr/>
+        </p:nvSpPr>
+        <p:spPr>
+          <a:xfrm>
+            <a:off x="5504688" y="4160520"/>
+            <a:ext cx="1517904" cy="182880"/>
+          </a:xfrm>
+          <a:prstGeom prst="rect">
+            <a:avLst/>
+          </a:prstGeom>
+          <a:noFill/>
+        </p:spPr>
+        <p:txBody>
+          <a:bodyPr wrap="none" lIns="0" rIns="0" tIns="0" bIns="0">
+            <a:spAutoFit/>
+          </a:bodyPr>
+          <a:lstStyle/>
+          <a:p>
+            <a:pPr algn="l"/>
+            <a:r>
+              <a:rPr sz="850" b="0">
+                <a:solidFill>
+                  <a:srgbClr val="1A1A1A"/>
+                </a:solidFill>
+                <a:latin typeface="Apple SD Gothic Neo"/>
+              </a:rPr>
+              <a:t>대부분의 요청</a:t>
+            </a:r>
+          </a:p>
+        </p:txBody>
+      </p:sp>
+      <p:sp>
+        <p:nvSpPr>
+          <p:cNvPr id="55" name="Rectangle 54"/>
+          <p:cNvSpPr/>
+          <p:nvPr/>
+        </p:nvSpPr>
+        <p:spPr>
+          <a:xfrm>
+            <a:off x="411480" y="4389120"/>
+            <a:ext cx="6675120" cy="274320"/>
+          </a:xfrm>
+          <a:prstGeom prst="rect">
+            <a:avLst/>
+          </a:prstGeom>
+          <a:solidFill>
+            <a:srgbClr val="DBE6F6"/>
+          </a:solidFill>
+          <a:ln w="12700">
+            <a:solidFill>
+              <a:srgbClr val="FFFFFF"/>
+            </a:solidFill>
+          </a:ln>
+          <a:effectLst/>
+        </p:spPr>
+        <p:style>
+          <a:lnRef idx="1">
+            <a:schemeClr val="accent1"/>
+          </a:lnRef>
+          <a:fillRef idx="3">
+            <a:schemeClr val="accent1"/>
+          </a:fillRef>
+          <a:effectRef idx="2">
+            <a:schemeClr val="accent1"/>
+          </a:effectRef>
+          <a:fontRef idx="minor">
+            <a:schemeClr val="lt1"/>
+          </a:fontRef>
+        </p:style>
+        <p:txBody>
+          <a:bodyPr rtlCol="0" anchor="ctr"/>
+          <a:lstStyle/>
+          <a:p>
+            <a:pPr algn="ctr"/>
+          </a:p>
+        </p:txBody>
+      </p:sp>
+      <p:sp>
+        <p:nvSpPr>
+          <p:cNvPr id="56" name="TextBox 55"/>
+          <p:cNvSpPr txBox="1"/>
+          <p:nvPr/>
+        </p:nvSpPr>
+        <p:spPr>
+          <a:xfrm>
+            <a:off x="475488" y="4434840"/>
+            <a:ext cx="2660903" cy="182880"/>
+          </a:xfrm>
+          <a:prstGeom prst="rect">
+            <a:avLst/>
+          </a:prstGeom>
+          <a:noFill/>
+        </p:spPr>
+        <p:txBody>
+          <a:bodyPr wrap="none" lIns="0" rIns="0" tIns="0" bIns="0">
+            <a:spAutoFit/>
+          </a:bodyPr>
+          <a:lstStyle/>
+          <a:p>
+            <a:pPr algn="l"/>
+            <a:r>
+              <a:rPr sz="850" b="0">
+                <a:solidFill>
+                  <a:srgbClr val="1A1A1A"/>
+                </a:solidFill>
+                <a:latin typeface="Apple SD Gothic Neo"/>
+              </a:rPr>
+              <a:t>재준비 — 캐시에서 빠짐</a:t>
+            </a:r>
+          </a:p>
+        </p:txBody>
+      </p:sp>
+      <p:sp>
+        <p:nvSpPr>
+          <p:cNvPr id="57" name="TextBox 56"/>
+          <p:cNvSpPr txBox="1"/>
+          <p:nvPr/>
+        </p:nvSpPr>
+        <p:spPr>
+          <a:xfrm>
+            <a:off x="3264408" y="4434840"/>
+            <a:ext cx="694944" cy="182880"/>
+          </a:xfrm>
+          <a:prstGeom prst="rect">
+            <a:avLst/>
+          </a:prstGeom>
+          <a:noFill/>
+        </p:spPr>
+        <p:txBody>
+          <a:bodyPr wrap="none" lIns="0" rIns="0" tIns="0" bIns="0">
+            <a:spAutoFit/>
+          </a:bodyPr>
+          <a:lstStyle/>
+          <a:p>
+            <a:pPr algn="ctr"/>
+            <a:r>
+              <a:rPr sz="1050" b="1">
+                <a:solidFill>
+                  <a:srgbClr val="1F4E79"/>
+                </a:solidFill>
+                <a:latin typeface="Menlo"/>
+              </a:rPr>
+              <a:t>2회</a:t>
+            </a:r>
+          </a:p>
+        </p:txBody>
+      </p:sp>
+      <p:sp>
+        <p:nvSpPr>
+          <p:cNvPr id="58" name="TextBox 57"/>
+          <p:cNvSpPr txBox="1"/>
+          <p:nvPr/>
+        </p:nvSpPr>
+        <p:spPr>
+          <a:xfrm>
+            <a:off x="4087368" y="4434840"/>
+            <a:ext cx="1289304" cy="182880"/>
+          </a:xfrm>
+          <a:prstGeom prst="rect">
+            <a:avLst/>
+          </a:prstGeom>
+          <a:noFill/>
+        </p:spPr>
+        <p:txBody>
+          <a:bodyPr wrap="none" lIns="0" rIns="0" tIns="0" bIns="0">
+            <a:spAutoFit/>
+          </a:bodyPr>
+          <a:lstStyle/>
+          <a:p>
+            <a:pPr algn="ctr"/>
+            <a:r>
+              <a:rPr sz="1050" b="1">
+                <a:solidFill>
+                  <a:srgbClr val="1F4E79"/>
+                </a:solidFill>
+                <a:latin typeface="Menlo"/>
+              </a:rPr>
+              <a:t>3.4 ms</a:t>
+            </a:r>
+          </a:p>
+        </p:txBody>
+      </p:sp>
+      <p:sp>
+        <p:nvSpPr>
+          <p:cNvPr id="59" name="TextBox 58"/>
+          <p:cNvSpPr txBox="1"/>
+          <p:nvPr/>
+        </p:nvSpPr>
+        <p:spPr>
+          <a:xfrm>
+            <a:off x="5504688" y="4434840"/>
+            <a:ext cx="1517904" cy="182880"/>
+          </a:xfrm>
+          <a:prstGeom prst="rect">
+            <a:avLst/>
+          </a:prstGeom>
+          <a:noFill/>
+        </p:spPr>
+        <p:txBody>
+          <a:bodyPr wrap="none" lIns="0" rIns="0" tIns="0" bIns="0">
+            <a:spAutoFit/>
+          </a:bodyPr>
+          <a:lstStyle/>
+          <a:p>
+            <a:pPr algn="l"/>
+            <a:r>
+              <a:rPr sz="850" b="0">
+                <a:solidFill>
+                  <a:srgbClr val="1A1A1A"/>
+                </a:solidFill>
+                <a:latin typeface="Apple SD Gothic Neo"/>
+              </a:rPr>
+              <a:t>유휴 10분 · 100칸 초과</a:t>
+            </a:r>
+          </a:p>
+        </p:txBody>
+      </p:sp>
+      <p:sp>
+        <p:nvSpPr>
+          <p:cNvPr id="60" name="Rectangle 59"/>
+          <p:cNvSpPr/>
+          <p:nvPr/>
+        </p:nvSpPr>
+        <p:spPr>
+          <a:xfrm>
+            <a:off x="411480" y="4663440"/>
+            <a:ext cx="6675120" cy="274320"/>
+          </a:xfrm>
+          <a:prstGeom prst="rect">
+            <a:avLst/>
+          </a:prstGeom>
+          <a:solidFill>
+            <a:srgbClr val="DBE6F6"/>
+          </a:solidFill>
+          <a:ln w="19050">
+            <a:solidFill>
+              <a:srgbClr val="A33333"/>
+            </a:solidFill>
+          </a:ln>
+          <a:effectLst/>
+        </p:spPr>
+        <p:style>
+          <a:lnRef idx="1">
+            <a:schemeClr val="accent1"/>
+          </a:lnRef>
+          <a:fillRef idx="3">
+            <a:schemeClr val="accent1"/>
+          </a:fillRef>
+          <a:effectRef idx="2">
+            <a:schemeClr val="accent1"/>
+          </a:effectRef>
+          <a:fontRef idx="minor">
+            <a:schemeClr val="lt1"/>
+          </a:fontRef>
+        </p:style>
+        <p:txBody>
+          <a:bodyPr rtlCol="0" anchor="ctr"/>
+          <a:lstStyle/>
+          <a:p>
+            <a:pPr algn="ctr"/>
+          </a:p>
+        </p:txBody>
+      </p:sp>
+      <p:sp>
+        <p:nvSpPr>
+          <p:cNvPr id="61" name="TextBox 60"/>
+          <p:cNvSpPr txBox="1"/>
+          <p:nvPr/>
+        </p:nvSpPr>
+        <p:spPr>
+          <a:xfrm>
+            <a:off x="475488" y="4709159"/>
+            <a:ext cx="2660903" cy="182880"/>
+          </a:xfrm>
+          <a:prstGeom prst="rect">
+            <a:avLst/>
+          </a:prstGeom>
+          <a:noFill/>
+        </p:spPr>
+        <p:txBody>
+          <a:bodyPr wrap="none" lIns="0" rIns="0" tIns="0" bIns="0">
+            <a:spAutoFit/>
+          </a:bodyPr>
+          <a:lstStyle/>
+          <a:p>
+            <a:pPr algn="l"/>
+            <a:r>
+              <a:rPr sz="850" b="0">
+                <a:solidFill>
+                  <a:srgbClr val="1A1A1A"/>
+                </a:solidFill>
+                <a:latin typeface="Apple SD Gothic Neo"/>
+              </a:rPr>
+              <a:t>신규 등록 — 처음 보는 세션</a:t>
+            </a:r>
+          </a:p>
+        </p:txBody>
+      </p:sp>
+      <p:sp>
+        <p:nvSpPr>
+          <p:cNvPr id="62" name="TextBox 61"/>
+          <p:cNvSpPr txBox="1"/>
+          <p:nvPr/>
+        </p:nvSpPr>
+        <p:spPr>
+          <a:xfrm>
+            <a:off x="3264408" y="4709159"/>
+            <a:ext cx="694944" cy="182880"/>
+          </a:xfrm>
+          <a:prstGeom prst="rect">
+            <a:avLst/>
+          </a:prstGeom>
+          <a:noFill/>
+        </p:spPr>
+        <p:txBody>
+          <a:bodyPr wrap="none" lIns="0" rIns="0" tIns="0" bIns="0">
+            <a:spAutoFit/>
+          </a:bodyPr>
+          <a:lstStyle/>
+          <a:p>
+            <a:pPr algn="ctr"/>
+            <a:r>
+              <a:rPr sz="1050" b="1">
+                <a:solidFill>
+                  <a:srgbClr val="1F4E79"/>
+                </a:solidFill>
+                <a:latin typeface="Menlo"/>
+              </a:rPr>
+              <a:t>17회</a:t>
+            </a:r>
+          </a:p>
+        </p:txBody>
+      </p:sp>
+      <p:sp>
+        <p:nvSpPr>
+          <p:cNvPr id="63" name="TextBox 62"/>
+          <p:cNvSpPr txBox="1"/>
+          <p:nvPr/>
+        </p:nvSpPr>
+        <p:spPr>
+          <a:xfrm>
+            <a:off x="4087368" y="4709159"/>
+            <a:ext cx="1289304" cy="182880"/>
+          </a:xfrm>
+          <a:prstGeom prst="rect">
+            <a:avLst/>
+          </a:prstGeom>
+          <a:noFill/>
+        </p:spPr>
+        <p:txBody>
+          <a:bodyPr wrap="none" lIns="0" rIns="0" tIns="0" bIns="0">
+            <a:spAutoFit/>
+          </a:bodyPr>
+          <a:lstStyle/>
+          <a:p>
+            <a:pPr algn="ctr"/>
+            <a:r>
+              <a:rPr sz="1050" b="1">
+                <a:solidFill>
+                  <a:srgbClr val="1F4E79"/>
+                </a:solidFill>
+                <a:latin typeface="Menlo"/>
+              </a:rPr>
+              <a:t>850 → 47 ms</a:t>
+            </a:r>
+          </a:p>
+        </p:txBody>
+      </p:sp>
+      <p:sp>
+        <p:nvSpPr>
+          <p:cNvPr id="64" name="TextBox 63"/>
+          <p:cNvSpPr txBox="1"/>
+          <p:nvPr/>
+        </p:nvSpPr>
+        <p:spPr>
+          <a:xfrm>
+            <a:off x="5504688" y="4709159"/>
+            <a:ext cx="1517904" cy="182880"/>
+          </a:xfrm>
+          <a:prstGeom prst="rect">
+            <a:avLst/>
+          </a:prstGeom>
+          <a:noFill/>
+        </p:spPr>
+        <p:txBody>
+          <a:bodyPr wrap="none" lIns="0" rIns="0" tIns="0" bIns="0">
+            <a:spAutoFit/>
+          </a:bodyPr>
+          <a:lstStyle/>
+          <a:p>
+            <a:pPr algn="l"/>
+            <a:r>
+              <a:rPr sz="850" b="0">
+                <a:solidFill>
+                  <a:srgbClr val="1A1A1A"/>
+                </a:solidFill>
+                <a:latin typeface="Apple SD Gothic Neo"/>
+              </a:rPr>
+              <a:t>그 세션의 첫 요청 한 번</a:t>
+            </a:r>
+          </a:p>
+        </p:txBody>
+      </p:sp>
+      <p:sp>
+        <p:nvSpPr>
+          <p:cNvPr id="65" name="Oval 64"/>
+          <p:cNvSpPr/>
+          <p:nvPr/>
+        </p:nvSpPr>
+        <p:spPr>
+          <a:xfrm>
+            <a:off x="146304" y="4142232"/>
+            <a:ext cx="219456" cy="219456"/>
+          </a:xfrm>
+          <a:prstGeom prst="ellipse">
+            <a:avLst/>
+          </a:prstGeom>
+          <a:solidFill>
+            <a:srgbClr val="1F7A6A"/>
+          </a:solidFill>
+          <a:ln w="15240">
+            <a:solidFill>
+              <a:srgbClr val="FFFFFF"/>
+            </a:solidFill>
+          </a:ln>
+          <a:effectLst/>
+        </p:spPr>
+        <p:style>
+          <a:lnRef idx="1">
+            <a:schemeClr val="accent1"/>
+          </a:lnRef>
+          <a:fillRef idx="3">
+            <a:schemeClr val="accent1"/>
+          </a:fillRef>
+          <a:effectRef idx="2">
+            <a:schemeClr val="accent1"/>
+          </a:effectRef>
+          <a:fontRef idx="minor">
+            <a:schemeClr val="lt1"/>
+          </a:fontRef>
+        </p:style>
+        <p:txBody>
+          <a:bodyPr rtlCol="0" anchor="ctr" lIns="0" rIns="0" tIns="0" bIns="0"/>
+          <a:lstStyle/>
+          <a:p>
+            <a:pPr algn="ctr"/>
+            <a:r>
+              <a:rPr sz="900" b="1">
+                <a:solidFill>
+                  <a:srgbClr val="FFFFFF"/>
+                </a:solidFill>
+                <a:latin typeface="Apple SD Gothic Neo"/>
+              </a:rPr>
+              <a:t>⏱</a:t>
+            </a:r>
+          </a:p>
+        </p:txBody>
+      </p:sp>
+      <p:sp>
+        <p:nvSpPr>
+          <p:cNvPr id="66" name="Rounded Rectangle 65"/>
+          <p:cNvSpPr/>
+          <p:nvPr/>
+        </p:nvSpPr>
+        <p:spPr>
+          <a:xfrm>
+            <a:off x="7360920" y="3858768"/>
+            <a:ext cx="4416552" cy="1078992"/>
+          </a:xfrm>
+          <a:prstGeom prst="roundRect">
+            <a:avLst>
+              <a:gd name="adj" fmla="val 12000"/>
+            </a:avLst>
+          </a:prstGeom>
+          <a:solidFill>
+            <a:srgbClr val="FBE6C8"/>
+          </a:solidFill>
+          <a:ln w="16510">
+            <a:solidFill>
+              <a:srgbClr val="B3781F"/>
+            </a:solidFill>
+          </a:ln>
+          <a:effectLst/>
+        </p:spPr>
+        <p:style>
+          <a:lnRef idx="1">
+            <a:schemeClr val="accent1"/>
+          </a:lnRef>
+          <a:fillRef idx="3">
+            <a:schemeClr val="accent1"/>
+          </a:fillRef>
+          <a:effectRef idx="2">
+            <a:schemeClr val="accent1"/>
+          </a:effectRef>
+          <a:fontRef idx="minor">
+            <a:schemeClr val="lt1"/>
+          </a:fontRef>
+        </p:style>
+        <p:txBody>
+          <a:bodyPr rtlCol="0" anchor="ctr" wrap="square" lIns="36576" rIns="36576" tIns="0" bIns="0"/>
+          <a:lstStyle/>
+          <a:p>
+            <a:pPr algn="ctr"/>
+          </a:p>
+        </p:txBody>
+      </p:sp>
+      <p:sp>
+        <p:nvSpPr>
+          <p:cNvPr id="67" name="TextBox 66"/>
+          <p:cNvSpPr txBox="1"/>
+          <p:nvPr/>
+        </p:nvSpPr>
+        <p:spPr>
+          <a:xfrm>
+            <a:off x="7498080" y="3931920"/>
+            <a:ext cx="4005072" cy="201168"/>
+          </a:xfrm>
+          <a:prstGeom prst="rect">
+            <a:avLst/>
+          </a:prstGeom>
+          <a:noFill/>
+        </p:spPr>
+        <p:txBody>
+          <a:bodyPr wrap="none" lIns="0" rIns="0" tIns="0" bIns="0">
+            <a:spAutoFit/>
+          </a:bodyPr>
+          <a:lstStyle/>
+          <a:p>
+            <a:pPr algn="l"/>
+            <a:r>
+              <a:rPr sz="1100" b="1">
+                <a:solidFill>
+                  <a:srgbClr val="1A1A1A"/>
+                </a:solidFill>
+                <a:latin typeface="Apple SD Gothic Neo"/>
+              </a:rPr>
+              <a:t>같은 17회인데 시간은 18배 다르다</a:t>
+            </a:r>
+          </a:p>
+        </p:txBody>
+      </p:sp>
+      <p:sp>
+        <p:nvSpPr>
+          <p:cNvPr id="68" name="TextBox 67"/>
+          <p:cNvSpPr txBox="1"/>
+          <p:nvPr/>
+        </p:nvSpPr>
+        <p:spPr>
+          <a:xfrm>
+            <a:off x="7498080" y="4151376"/>
+            <a:ext cx="4187952" cy="164592"/>
+          </a:xfrm>
+          <a:prstGeom prst="rect">
+            <a:avLst/>
+          </a:prstGeom>
+          <a:noFill/>
+        </p:spPr>
+        <p:txBody>
+          <a:bodyPr wrap="none" lIns="0" rIns="0" tIns="0" bIns="0">
+            <a:spAutoFit/>
+          </a:bodyPr>
+          <a:lstStyle/>
+          <a:p>
+            <a:pPr algn="l"/>
+            <a:r>
+              <a:rPr sz="900" b="0">
+                <a:solidFill>
+                  <a:srgbClr val="1A1A1A"/>
+                </a:solidFill>
+                <a:latin typeface="Apple SD Gothic Neo"/>
+              </a:rPr>
+              <a:t>첫 세션 850ms — 컬렉션과 색인을 실제로 만든다</a:t>
+            </a:r>
+          </a:p>
+        </p:txBody>
+      </p:sp>
+      <p:sp>
+        <p:nvSpPr>
+          <p:cNvPr id="69" name="TextBox 68"/>
+          <p:cNvSpPr txBox="1"/>
+          <p:nvPr/>
+        </p:nvSpPr>
+        <p:spPr>
+          <a:xfrm>
+            <a:off x="7498080" y="4352544"/>
+            <a:ext cx="4187952" cy="164592"/>
+          </a:xfrm>
+          <a:prstGeom prst="rect">
+            <a:avLst/>
+          </a:prstGeom>
+          <a:noFill/>
+        </p:spPr>
+        <p:txBody>
+          <a:bodyPr wrap="none" lIns="0" rIns="0" tIns="0" bIns="0">
+            <a:spAutoFit/>
+          </a:bodyPr>
+          <a:lstStyle/>
+          <a:p>
+            <a:pPr algn="l"/>
+            <a:r>
+              <a:rPr sz="900" b="0">
+                <a:solidFill>
+                  <a:srgbClr val="1A1A1A"/>
+                </a:solidFill>
+                <a:latin typeface="Apple SD Gothic Neo"/>
+              </a:rPr>
+              <a:t>두 번째 새 세션부터 47ms — 이미 있다는 응답만 받는다</a:t>
+            </a:r>
+          </a:p>
+        </p:txBody>
+      </p:sp>
+      <p:sp>
+        <p:nvSpPr>
+          <p:cNvPr id="70" name="TextBox 69"/>
+          <p:cNvSpPr txBox="1"/>
+          <p:nvPr/>
+        </p:nvSpPr>
+        <p:spPr>
+          <a:xfrm>
+            <a:off x="7498080" y="4553712"/>
+            <a:ext cx="4187952" cy="164592"/>
+          </a:xfrm>
+          <a:prstGeom prst="rect">
+            <a:avLst/>
+          </a:prstGeom>
+          <a:noFill/>
+        </p:spPr>
+        <p:txBody>
+          <a:bodyPr wrap="none" lIns="0" rIns="0" tIns="0" bIns="0">
+            <a:spAutoFit/>
+          </a:bodyPr>
+          <a:lstStyle/>
+          <a:p>
+            <a:pPr algn="l"/>
+            <a:r>
+              <a:rPr sz="900" b="0">
+                <a:solidFill>
+                  <a:srgbClr val="1A1A1A"/>
+                </a:solidFill>
+                <a:latin typeface="Apple SD Gothic Neo"/>
+              </a:rPr>
+              <a:t>850ms 내역: 색인 11회 667ms · 컬렉션 2회 165ms</a:t>
+            </a:r>
+          </a:p>
+        </p:txBody>
+      </p:sp>
+      <p:sp>
+        <p:nvSpPr>
+          <p:cNvPr id="71" name="Rounded Rectangle 70"/>
+          <p:cNvSpPr/>
+          <p:nvPr/>
+        </p:nvSpPr>
+        <p:spPr>
+          <a:xfrm>
+            <a:off x="411480" y="5029200"/>
+            <a:ext cx="11365992" cy="1389888"/>
+          </a:xfrm>
+          <a:prstGeom prst="roundRect">
+            <a:avLst>
+              <a:gd name="adj" fmla="val 6000"/>
+            </a:avLst>
+          </a:prstGeom>
+          <a:solidFill>
+            <a:srgbClr val="FAFAFA"/>
+          </a:solidFill>
+          <a:ln w="13970">
+            <a:solidFill>
+              <a:srgbClr val="999999"/>
+            </a:solidFill>
+          </a:ln>
+          <a:effectLst/>
+        </p:spPr>
+        <p:style>
+          <a:lnRef idx="1">
+            <a:schemeClr val="accent1"/>
+          </a:lnRef>
+          <a:fillRef idx="3">
+            <a:schemeClr val="accent1"/>
+          </a:fillRef>
+          <a:effectRef idx="2">
+            <a:schemeClr val="accent1"/>
+          </a:effectRef>
+          <a:fontRef idx="minor">
+            <a:schemeClr val="lt1"/>
+          </a:fontRef>
+        </p:style>
+        <p:txBody>
+          <a:bodyPr rtlCol="0" anchor="ctr"/>
+          <a:lstStyle/>
+          <a:p>
+            <a:pPr algn="ctr"/>
+          </a:p>
+        </p:txBody>
+      </p:sp>
+      <p:sp>
+        <p:nvSpPr>
+          <p:cNvPr id="72" name="TextBox 71"/>
+          <p:cNvSpPr txBox="1"/>
+          <p:nvPr/>
+        </p:nvSpPr>
+        <p:spPr>
+          <a:xfrm>
+            <a:off x="685800" y="5148072"/>
+            <a:ext cx="2743200" cy="274320"/>
+          </a:xfrm>
+          <a:prstGeom prst="rect">
+            <a:avLst/>
+          </a:prstGeom>
+          <a:noFill/>
+        </p:spPr>
+        <p:txBody>
+          <a:bodyPr wrap="none" lIns="0" rIns="0" tIns="0" bIns="0">
+            <a:spAutoFit/>
+          </a:bodyPr>
+          <a:lstStyle/>
+          <a:p>
+            <a:pPr algn="l"/>
+            <a:r>
+              <a:rPr sz="1300" b="1">
+                <a:solidFill>
+                  <a:srgbClr val="1A1A1A"/>
+                </a:solidFill>
+                <a:latin typeface="Apple SD Gothic Neo"/>
+              </a:rPr>
+              <a:t>결론</a:t>
+            </a:r>
+          </a:p>
+        </p:txBody>
+      </p:sp>
+      <p:sp>
+        <p:nvSpPr>
+          <p:cNvPr id="73" name="TextBox 72"/>
+          <p:cNvSpPr txBox="1"/>
+          <p:nvPr/>
+        </p:nvSpPr>
+        <p:spPr>
+          <a:xfrm>
+            <a:off x="685800" y="5477256"/>
+            <a:ext cx="10817352" cy="219456"/>
+          </a:xfrm>
+          <a:prstGeom prst="rect">
+            <a:avLst/>
+          </a:prstGeom>
+          <a:noFill/>
+        </p:spPr>
+        <p:txBody>
+          <a:bodyPr wrap="none" lIns="0" rIns="0" tIns="0" bIns="0">
+            <a:spAutoFit/>
+          </a:bodyPr>
+          <a:lstStyle/>
+          <a:p>
+            <a:pPr algn="l"/>
+            <a:r>
+              <a:rPr sz="1000" b="1">
+                <a:solidFill>
+                  <a:srgbClr val="1A1A1A"/>
+                </a:solidFill>
+                <a:latin typeface="Apple SD Gothic Neo"/>
+              </a:rPr>
+              <a:t>Qdrant가 닿는 곳은 파이프라인 전체에서 세 군데뿐이다.</a:t>
+            </a:r>
+            <a:r>
+              <a:rPr sz="1000" b="0">
+                <a:solidFill>
+                  <a:srgbClr val="1A1A1A"/>
+                </a:solidFill>
+                <a:latin typeface="Apple SD Gothic Neo"/>
+              </a:rPr>
+              <a:t> 세션 확보, 벡터 upsert, ANN 탐색이다.</a:t>
+            </a:r>
+          </a:p>
+        </p:txBody>
+      </p:sp>
+      <p:sp>
+        <p:nvSpPr>
+          <p:cNvPr id="74" name="TextBox 73"/>
+          <p:cNvSpPr txBox="1"/>
+          <p:nvPr/>
+        </p:nvSpPr>
+        <p:spPr>
+          <a:xfrm>
+            <a:off x="685800" y="5715000"/>
+            <a:ext cx="10817352" cy="219456"/>
+          </a:xfrm>
+          <a:prstGeom prst="rect">
+            <a:avLst/>
+          </a:prstGeom>
+          <a:noFill/>
+        </p:spPr>
+        <p:txBody>
+          <a:bodyPr wrap="none" lIns="0" rIns="0" tIns="0" bIns="0">
+            <a:spAutoFit/>
+          </a:bodyPr>
+          <a:lstStyle/>
+          <a:p>
+            <a:pPr algn="l"/>
+            <a:r>
+              <a:rPr sz="1000" b="1">
+                <a:solidFill>
+                  <a:srgbClr val="1A1A1A"/>
+                </a:solidFill>
+                <a:latin typeface="Apple SD Gothic Neo"/>
+              </a:rPr>
+              <a:t>평상시 Qdrant가 쓰는 시간은 저장 3.0ms, 검색 2ms 안팎이다.</a:t>
+            </a:r>
+            <a:r>
+              <a:rPr sz="1000" b="0">
+                <a:solidFill>
+                  <a:srgbClr val="1A1A1A"/>
+                </a:solidFill>
+                <a:latin typeface="Apple SD Gothic Neo"/>
+              </a:rPr>
+              <a:t> 문맥 walk와 리랭킹, 원문 복원은 Qdrant 요청이 0회다.</a:t>
+            </a:r>
+          </a:p>
+        </p:txBody>
+      </p:sp>
+      <p:sp>
+        <p:nvSpPr>
+          <p:cNvPr id="75" name="TextBox 74"/>
+          <p:cNvSpPr txBox="1"/>
+          <p:nvPr/>
+        </p:nvSpPr>
+        <p:spPr>
+          <a:xfrm>
+            <a:off x="685800" y="5952744"/>
+            <a:ext cx="10817352" cy="219456"/>
+          </a:xfrm>
+          <a:prstGeom prst="rect">
+            <a:avLst/>
+          </a:prstGeom>
+          <a:noFill/>
+        </p:spPr>
+        <p:txBody>
+          <a:bodyPr wrap="none" lIns="0" rIns="0" tIns="0" bIns="0">
+            <a:spAutoFit/>
+          </a:bodyPr>
+          <a:lstStyle/>
+          <a:p>
+            <a:pPr algn="l"/>
+            <a:r>
+              <a:rPr sz="1000" b="1">
+                <a:solidFill>
+                  <a:srgbClr val="1A1A1A"/>
+                </a:solidFill>
+                <a:latin typeface="Apple SD Gothic Neo"/>
+              </a:rPr>
+              <a:t>검색 옵션을 바꿔도 요청은 1회로 고정이다.</a:t>
+            </a:r>
+            <a:r>
+              <a:rPr sz="1000" b="0">
+                <a:solidFill>
+                  <a:srgbClr val="1A1A1A"/>
+                </a:solidFill>
+                <a:latin typeface="Apple SD Gothic Neo"/>
+              </a:rPr>
+              <a:t> top_k와 필터, 문맥 확장, 점수 기준 모두 마찬가지다.</a:t>
+            </a:r>
+          </a:p>
+        </p:txBody>
+      </p:sp>
+      <p:sp>
+        <p:nvSpPr>
+          <p:cNvPr id="76" name="TextBox 75"/>
+          <p:cNvSpPr txBox="1"/>
+          <p:nvPr/>
+        </p:nvSpPr>
+        <p:spPr>
+          <a:xfrm>
+            <a:off x="685800" y="6190488"/>
+            <a:ext cx="10817352" cy="219456"/>
+          </a:xfrm>
+          <a:prstGeom prst="rect">
+            <a:avLst/>
+          </a:prstGeom>
+          <a:noFill/>
+        </p:spPr>
+        <p:txBody>
+          <a:bodyPr wrap="none" lIns="0" rIns="0" tIns="0" bIns="0">
+            <a:spAutoFit/>
+          </a:bodyPr>
+          <a:lstStyle/>
+          <a:p>
+            <a:pPr algn="l"/>
+            <a:r>
+              <a:rPr sz="1000" b="1">
+                <a:solidFill>
+                  <a:srgbClr val="1A1A1A"/>
+                </a:solidFill>
+                <a:latin typeface="Apple SD Gothic Neo"/>
+              </a:rPr>
+              <a:t>이 시간은 같은 장비 기준이다.</a:t>
+            </a:r>
+            <a:r>
+              <a:rPr sz="1000" b="0">
+                <a:solidFill>
+                  <a:srgbClr val="1A1A1A"/>
+                </a:solidFill>
+                <a:latin typeface="Apple SD Gothic Neo"/>
+              </a:rPr>
+              <a:t> Qdrant를 다른 노드에 두면 요청마다 네트워크 왕복이 그대로 더해진다.</a:t>
+            </a:r>
+          </a:p>
+        </p:txBody>
+      </p:sp>
+      <p:sp>
+        <p:nvSpPr>
+          <p:cNvPr id="77" name="TextBox 76"/>
+          <p:cNvSpPr txBox="1"/>
+          <p:nvPr/>
+        </p:nvSpPr>
+        <p:spPr>
+          <a:xfrm>
+            <a:off x="384048" y="6492240"/>
+            <a:ext cx="11430000" cy="219456"/>
+          </a:xfrm>
+          <a:prstGeom prst="rect">
+            <a:avLst/>
+          </a:prstGeom>
+          <a:noFill/>
+        </p:spPr>
+        <p:txBody>
+          <a:bodyPr wrap="square" lIns="0" rIns="0" tIns="0" bIns="0">
+            <a:spAutoFit/>
+          </a:bodyPr>
+          <a:lstStyle/>
+          <a:p>
+            <a:pPr algn="l"/>
+            <a:r>
+              <a:rPr sz="950" b="0">
+                <a:solidFill>
+                  <a:srgbClr val="888888"/>
+                </a:solidFill>
+                <a:latin typeface="Apple SD Gothic Neo"/>
+              </a:rPr>
+              <a:t>근거: 측정 기록 2부(S1~S13)와 qdrant_request_trace.json. 요청별 ms는 qdrant-client의 HTTP 전송 함수에서 직접 쟀다.</a:t>
+            </a:r>
+          </a:p>
+        </p:txBody>
+      </p:sp>
+    </p:spTree>
+  </p:cSld>
+  <p:clrMapOvr>
+    <a:masterClrMapping/>
+  </p:clrMapOvr>
+</p:sld>
+</file>
+
+<file path=ppt/slides/slide9.xml><?xml version="1.0" encoding="utf-8"?>
+<p:sld xmlns:a="http://schemas.openxmlformats.org/drawingml/2006/main" xmlns:p="http://schemas.openxmlformats.org/presentationml/2006/main" xmlns:r="http://schemas.openxmlformats.org/officeDocument/2006/relationships">
+  <p:cSld>
+    <p:spTree>
+      <p:nvGrpSpPr>
+        <p:cNvPr id="1" name=""/>
+        <p:cNvGrpSpPr/>
+        <p:nvPr/>
+      </p:nvGrpSpPr>
+      <p:grpSpPr/>
+      <p:sp>
+        <p:nvSpPr>
+          <p:cNvPr id="2" name="Rectangle 1"/>
+          <p:cNvSpPr/>
+          <p:nvPr/>
+        </p:nvSpPr>
+        <p:spPr>
+          <a:xfrm>
+            <a:off x="0" y="0"/>
+            <a:ext cx="12188952" cy="749808"/>
+          </a:xfrm>
+          <a:prstGeom prst="rect">
+            <a:avLst/>
+          </a:prstGeom>
+          <a:solidFill>
+            <a:srgbClr val="1F355E"/>
+          </a:solidFill>
+          <a:ln>
+            <a:noFill/>
+          </a:ln>
+          <a:effectLst/>
+        </p:spPr>
+        <p:style>
+          <a:lnRef idx="1">
+            <a:schemeClr val="accent1"/>
+          </a:lnRef>
+          <a:fillRef idx="3">
+            <a:schemeClr val="accent1"/>
+          </a:fillRef>
+          <a:effectRef idx="2">
+            <a:schemeClr val="accent1"/>
+          </a:effectRef>
+          <a:fontRef idx="minor">
+            <a:schemeClr val="lt1"/>
+          </a:fontRef>
+        </p:style>
+        <p:txBody>
+          <a:bodyPr rtlCol="0" anchor="ctr"/>
+          <a:lstStyle/>
+          <a:p>
+            <a:pPr algn="ctr"/>
+          </a:p>
+        </p:txBody>
+      </p:sp>
+      <p:sp>
+        <p:nvSpPr>
+          <p:cNvPr id="3" name="TextBox 2"/>
+          <p:cNvSpPr txBox="1"/>
+          <p:nvPr/>
+        </p:nvSpPr>
+        <p:spPr>
+          <a:xfrm>
+            <a:off x="384048" y="118872"/>
+            <a:ext cx="11155680" cy="310896"/>
+          </a:xfrm>
+          <a:prstGeom prst="rect">
+            <a:avLst/>
+          </a:prstGeom>
+          <a:noFill/>
+        </p:spPr>
+        <p:txBody>
+          <a:bodyPr wrap="square" lIns="0" rIns="0" tIns="0" bIns="0">
+            <a:spAutoFit/>
+          </a:bodyPr>
+          <a:lstStyle/>
+          <a:p>
+            <a:pPr algn="l"/>
+            <a:r>
+              <a:rPr sz="2100" b="1">
+                <a:solidFill>
+                  <a:srgbClr val="FFFFFF"/>
+                </a:solidFill>
+                <a:latin typeface="Apple SD Gothic Neo"/>
+              </a:rPr>
+              <a:t>요약 — Qdrant를 건드리는 곳은 세 군데뿐</a:t>
+            </a:r>
+          </a:p>
+        </p:txBody>
+      </p:sp>
+      <p:sp>
+        <p:nvSpPr>
+          <p:cNvPr id="4" name="TextBox 3"/>
+          <p:cNvSpPr txBox="1"/>
+          <p:nvPr/>
+        </p:nvSpPr>
+        <p:spPr>
+          <a:xfrm>
+            <a:off x="384048" y="448056"/>
+            <a:ext cx="11338560" cy="219456"/>
+          </a:xfrm>
+          <a:prstGeom prst="rect">
+            <a:avLst/>
+          </a:prstGeom>
+          <a:noFill/>
+        </p:spPr>
+        <p:txBody>
+          <a:bodyPr wrap="none" lIns="0" rIns="0" tIns="0" bIns="0">
+            <a:spAutoFit/>
+          </a:bodyPr>
+          <a:lstStyle/>
+          <a:p>
+            <a:pPr algn="l"/>
+            <a:r>
+              <a:rPr sz="1000" b="0">
+                <a:solidFill>
+                  <a:srgbClr val="C8D4E6"/>
+                </a:solidFill>
+                <a:latin typeface="Menlo"/>
+              </a:rPr>
+              <a:t>파이프라인을 걷어내고 접점만 남긴 그림 · 아래 두 막대는 눈금이 서로 다르다</a:t>
+            </a:r>
+          </a:p>
+        </p:txBody>
+      </p:sp>
+      <p:sp>
+        <p:nvSpPr>
+          <p:cNvPr id="5" name="Rounded Rectangle 4"/>
+          <p:cNvSpPr/>
+          <p:nvPr/>
+        </p:nvSpPr>
+        <p:spPr>
+          <a:xfrm>
+            <a:off x="411480" y="1051560"/>
+            <a:ext cx="3611880" cy="2057400"/>
+          </a:xfrm>
+          <a:prstGeom prst="roundRect">
+            <a:avLst>
+              <a:gd name="adj" fmla="val 12000"/>
+            </a:avLst>
+          </a:prstGeom>
+          <a:solidFill>
+            <a:srgbClr val="CDEAE4"/>
+          </a:solidFill>
+          <a:ln w="16510">
+            <a:solidFill>
+              <a:srgbClr val="1F7A6A"/>
+            </a:solidFill>
+          </a:ln>
+          <a:effectLst/>
+        </p:spPr>
+        <p:style>
+          <a:lnRef idx="1">
+            <a:schemeClr val="accent1"/>
+          </a:lnRef>
+          <a:fillRef idx="3">
+            <a:schemeClr val="accent1"/>
+          </a:fillRef>
+          <a:effectRef idx="2">
+            <a:schemeClr val="accent1"/>
+          </a:effectRef>
+          <a:fontRef idx="minor">
+            <a:schemeClr val="lt1"/>
+          </a:fontRef>
+        </p:style>
+        <p:txBody>
+          <a:bodyPr rtlCol="0" anchor="ctr" wrap="square" lIns="36576" rIns="36576" tIns="0" bIns="0"/>
+          <a:lstStyle/>
+          <a:p>
+            <a:pPr algn="ctr"/>
+          </a:p>
+        </p:txBody>
+      </p:sp>
+      <p:sp>
+        <p:nvSpPr>
+          <p:cNvPr id="6" name="Oval 5"/>
+          <p:cNvSpPr/>
+          <p:nvPr/>
+        </p:nvSpPr>
+        <p:spPr>
+          <a:xfrm>
+            <a:off x="3749040" y="996696"/>
+            <a:ext cx="219456" cy="219456"/>
+          </a:xfrm>
+          <a:prstGeom prst="ellipse">
+            <a:avLst/>
+          </a:prstGeom>
+          <a:solidFill>
+            <a:srgbClr val="1F7A6A"/>
+          </a:solidFill>
+          <a:ln w="15240">
+            <a:solidFill>
+              <a:srgbClr val="FFFFFF"/>
+            </a:solidFill>
+          </a:ln>
+          <a:effectLst/>
+        </p:spPr>
+        <p:style>
+          <a:lnRef idx="1">
+            <a:schemeClr val="accent1"/>
+          </a:lnRef>
+          <a:fillRef idx="3">
+            <a:schemeClr val="accent1"/>
+          </a:fillRef>
+          <a:effectRef idx="2">
+            <a:schemeClr val="accent1"/>
+          </a:effectRef>
+          <a:fontRef idx="minor">
+            <a:schemeClr val="lt1"/>
+          </a:fontRef>
+        </p:style>
+        <p:txBody>
+          <a:bodyPr rtlCol="0" anchor="ctr" lIns="0" rIns="0" tIns="0" bIns="0"/>
+          <a:lstStyle/>
+          <a:p>
+            <a:pPr algn="ctr"/>
+            <a:r>
+              <a:rPr sz="900" b="1">
+                <a:solidFill>
+                  <a:srgbClr val="FFFFFF"/>
+                </a:solidFill>
+                <a:latin typeface="Apple SD Gothic Neo"/>
+              </a:rPr>
+              <a:t>⏱</a:t>
+            </a:r>
+          </a:p>
+        </p:txBody>
+      </p:sp>
+      <p:sp>
+        <p:nvSpPr>
+          <p:cNvPr id="7" name="TextBox 6"/>
+          <p:cNvSpPr txBox="1"/>
+          <p:nvPr/>
+        </p:nvSpPr>
+        <p:spPr>
+          <a:xfrm>
+            <a:off x="576072" y="1152144"/>
+            <a:ext cx="3108960" cy="237744"/>
+          </a:xfrm>
+          <a:prstGeom prst="rect">
+            <a:avLst/>
+          </a:prstGeom>
+          <a:noFill/>
+        </p:spPr>
+        <p:txBody>
+          <a:bodyPr wrap="none" lIns="0" rIns="0" tIns="0" bIns="0">
+            <a:spAutoFit/>
+          </a:bodyPr>
+          <a:lstStyle/>
+          <a:p>
+            <a:pPr algn="l"/>
+            <a:r>
+              <a:rPr sz="1300" b="1">
+                <a:solidFill>
+                  <a:srgbClr val="1A1A1A"/>
+                </a:solidFill>
+                <a:latin typeface="Apple SD Gothic Neo"/>
+              </a:rPr>
+              <a:t>① 세션 확보</a:t>
+            </a:r>
+          </a:p>
+        </p:txBody>
+      </p:sp>
+      <p:sp>
+        <p:nvSpPr>
+          <p:cNvPr id="8" name="TextBox 7"/>
+          <p:cNvSpPr txBox="1"/>
+          <p:nvPr/>
+        </p:nvSpPr>
+        <p:spPr>
+          <a:xfrm>
+            <a:off x="576072" y="1481328"/>
+            <a:ext cx="3291840" cy="457200"/>
+          </a:xfrm>
+          <a:prstGeom prst="rect">
+            <a:avLst/>
+          </a:prstGeom>
+          <a:noFill/>
+        </p:spPr>
+        <p:txBody>
+          <a:bodyPr wrap="none" lIns="0" rIns="0" tIns="0" bIns="0">
+            <a:spAutoFit/>
+          </a:bodyPr>
+          <a:lstStyle/>
+          <a:p>
+            <a:pPr algn="l"/>
+            <a:r>
+              <a:rPr sz="2700" b="1">
+                <a:solidFill>
+                  <a:srgbClr val="1F355E"/>
+                </a:solidFill>
+                <a:latin typeface="Apple SD Gothic Neo"/>
+              </a:rPr>
+              <a:t>0 · 2 · 17회</a:t>
+            </a:r>
+          </a:p>
+        </p:txBody>
+      </p:sp>
+      <p:sp>
+        <p:nvSpPr>
+          <p:cNvPr id="9" name="TextBox 8"/>
+          <p:cNvSpPr txBox="1"/>
+          <p:nvPr/>
+        </p:nvSpPr>
+        <p:spPr>
+          <a:xfrm>
+            <a:off x="576072" y="2157984"/>
+            <a:ext cx="3337560" cy="182880"/>
+          </a:xfrm>
+          <a:prstGeom prst="rect">
+            <a:avLst/>
+          </a:prstGeom>
+          <a:noFill/>
+        </p:spPr>
+        <p:txBody>
+          <a:bodyPr wrap="square" lIns="0" rIns="0" tIns="0" bIns="0">
+            <a:spAutoFit/>
+          </a:bodyPr>
+          <a:lstStyle/>
+          <a:p>
+            <a:pPr algn="l"/>
+            <a:r>
+              <a:rPr sz="900" b="0">
+                <a:solidFill>
+                  <a:srgbClr val="1A1A1A"/>
+                </a:solidFill>
+                <a:latin typeface="Apple SD Gothic Neo"/>
+              </a:rPr>
+              <a:t>요청 직전의 준비 단계. 저장과 검색이 같이 쓴다</a:t>
+            </a:r>
+          </a:p>
+        </p:txBody>
+      </p:sp>
+      <p:sp>
+        <p:nvSpPr>
+          <p:cNvPr id="10" name="TextBox 9"/>
+          <p:cNvSpPr txBox="1"/>
+          <p:nvPr/>
+        </p:nvSpPr>
+        <p:spPr>
+          <a:xfrm>
+            <a:off x="576072" y="2377439"/>
+            <a:ext cx="3337560" cy="182880"/>
+          </a:xfrm>
+          <a:prstGeom prst="rect">
+            <a:avLst/>
+          </a:prstGeom>
+          <a:noFill/>
+        </p:spPr>
+        <p:txBody>
+          <a:bodyPr wrap="square" lIns="0" rIns="0" tIns="0" bIns="0">
+            <a:spAutoFit/>
+          </a:bodyPr>
+          <a:lstStyle/>
+          <a:p>
+            <a:pPr algn="l"/>
+            <a:r>
+              <a:rPr sz="900" b="0">
+                <a:solidFill>
+                  <a:srgbClr val="1A1A1A"/>
+                </a:solidFill>
+                <a:latin typeface="Apple SD Gothic Neo"/>
+              </a:rPr>
+              <a:t>캐시에 있으면 0회, 빠지면 2회, 처음이면 17회</a:t>
+            </a:r>
+          </a:p>
+        </p:txBody>
+      </p:sp>
+      <p:sp>
+        <p:nvSpPr>
+          <p:cNvPr id="11" name="Rectangle 10"/>
+          <p:cNvSpPr/>
+          <p:nvPr/>
+        </p:nvSpPr>
+        <p:spPr>
+          <a:xfrm>
+            <a:off x="576072" y="2688336"/>
+            <a:ext cx="3291840" cy="9144"/>
+          </a:xfrm>
+          <a:prstGeom prst="rect">
+            <a:avLst/>
+          </a:prstGeom>
+          <a:solidFill>
+            <a:srgbClr val="1F7A6A"/>
+          </a:solidFill>
+          <a:ln>
+            <a:noFill/>
+          </a:ln>
+          <a:effectLst/>
+        </p:spPr>
+        <p:style>
+          <a:lnRef idx="1">
+            <a:schemeClr val="accent1"/>
+          </a:lnRef>
+          <a:fillRef idx="3">
+            <a:schemeClr val="accent1"/>
+          </a:fillRef>
+          <a:effectRef idx="2">
+            <a:schemeClr val="accent1"/>
+          </a:effectRef>
+          <a:fontRef idx="minor">
+            <a:schemeClr val="lt1"/>
+          </a:fontRef>
+        </p:style>
+        <p:txBody>
+          <a:bodyPr rtlCol="0" anchor="ctr"/>
+          <a:lstStyle/>
+          <a:p>
+            <a:pPr algn="ctr"/>
+          </a:p>
+        </p:txBody>
+      </p:sp>
+      <p:sp>
+        <p:nvSpPr>
+          <p:cNvPr id="12" name="TextBox 11"/>
+          <p:cNvSpPr txBox="1"/>
+          <p:nvPr/>
+        </p:nvSpPr>
+        <p:spPr>
+          <a:xfrm>
+            <a:off x="576072" y="2779776"/>
+            <a:ext cx="3291840" cy="182880"/>
+          </a:xfrm>
+          <a:prstGeom prst="rect">
+            <a:avLst/>
+          </a:prstGeom>
+          <a:noFill/>
+        </p:spPr>
+        <p:txBody>
+          <a:bodyPr wrap="none" lIns="0" rIns="0" tIns="0" bIns="0">
+            <a:spAutoFit/>
+          </a:bodyPr>
+          <a:lstStyle/>
+          <a:p>
+            <a:pPr algn="l"/>
+            <a:r>
+              <a:rPr sz="850" b="0">
+                <a:solidFill>
+                  <a:srgbClr val="888888"/>
+                </a:solidFill>
+                <a:latin typeface="Apple SD Gothic Neo"/>
+              </a:rPr>
+              <a:t>저장 · 검색 공통</a:t>
+            </a:r>
+          </a:p>
+        </p:txBody>
+      </p:sp>
+      <p:sp>
+        <p:nvSpPr>
+          <p:cNvPr id="13" name="Rounded Rectangle 12"/>
+          <p:cNvSpPr/>
+          <p:nvPr/>
+        </p:nvSpPr>
+        <p:spPr>
+          <a:xfrm>
+            <a:off x="4288536" y="1051560"/>
+            <a:ext cx="3611880" cy="2057400"/>
+          </a:xfrm>
+          <a:prstGeom prst="roundRect">
+            <a:avLst>
+              <a:gd name="adj" fmla="val 12000"/>
+            </a:avLst>
+          </a:prstGeom>
+          <a:solidFill>
+            <a:srgbClr val="CDEAE4"/>
+          </a:solidFill>
+          <a:ln w="16510">
+            <a:solidFill>
+              <a:srgbClr val="1F7A6A"/>
+            </a:solidFill>
+          </a:ln>
+          <a:effectLst/>
+        </p:spPr>
+        <p:style>
+          <a:lnRef idx="1">
+            <a:schemeClr val="accent1"/>
+          </a:lnRef>
+          <a:fillRef idx="3">
+            <a:schemeClr val="accent1"/>
+          </a:fillRef>
+          <a:effectRef idx="2">
+            <a:schemeClr val="accent1"/>
+          </a:effectRef>
+          <a:fontRef idx="minor">
+            <a:schemeClr val="lt1"/>
+          </a:fontRef>
+        </p:style>
+        <p:txBody>
+          <a:bodyPr rtlCol="0" anchor="ctr" wrap="square" lIns="36576" rIns="36576" tIns="0" bIns="0"/>
+          <a:lstStyle/>
+          <a:p>
+            <a:pPr algn="ctr"/>
+          </a:p>
+        </p:txBody>
+      </p:sp>
+      <p:sp>
+        <p:nvSpPr>
+          <p:cNvPr id="14" name="Oval 13"/>
+          <p:cNvSpPr/>
+          <p:nvPr/>
+        </p:nvSpPr>
+        <p:spPr>
+          <a:xfrm>
+            <a:off x="7626096" y="996696"/>
+            <a:ext cx="219456" cy="219456"/>
+          </a:xfrm>
+          <a:prstGeom prst="ellipse">
+            <a:avLst/>
+          </a:prstGeom>
+          <a:solidFill>
+            <a:srgbClr val="1F7A6A"/>
+          </a:solidFill>
+          <a:ln w="15240">
+            <a:solidFill>
+              <a:srgbClr val="FFFFFF"/>
+            </a:solidFill>
+          </a:ln>
+          <a:effectLst/>
+        </p:spPr>
+        <p:style>
+          <a:lnRef idx="1">
+            <a:schemeClr val="accent1"/>
+          </a:lnRef>
+          <a:fillRef idx="3">
+            <a:schemeClr val="accent1"/>
+          </a:fillRef>
+          <a:effectRef idx="2">
+            <a:schemeClr val="accent1"/>
+          </a:effectRef>
+          <a:fontRef idx="minor">
+            <a:schemeClr val="lt1"/>
+          </a:fontRef>
+        </p:style>
+        <p:txBody>
+          <a:bodyPr rtlCol="0" anchor="ctr" lIns="0" rIns="0" tIns="0" bIns="0"/>
+          <a:lstStyle/>
+          <a:p>
+            <a:pPr algn="ctr"/>
+            <a:r>
+              <a:rPr sz="900" b="1">
+                <a:solidFill>
+                  <a:srgbClr val="FFFFFF"/>
+                </a:solidFill>
+                <a:latin typeface="Apple SD Gothic Neo"/>
+              </a:rPr>
+              <a:t>⏱</a:t>
+            </a:r>
+          </a:p>
+        </p:txBody>
+      </p:sp>
+      <p:sp>
+        <p:nvSpPr>
+          <p:cNvPr id="15" name="TextBox 14"/>
+          <p:cNvSpPr txBox="1"/>
+          <p:nvPr/>
+        </p:nvSpPr>
+        <p:spPr>
+          <a:xfrm>
+            <a:off x="4453128" y="1152144"/>
+            <a:ext cx="3108960" cy="237744"/>
+          </a:xfrm>
+          <a:prstGeom prst="rect">
+            <a:avLst/>
+          </a:prstGeom>
+          <a:noFill/>
+        </p:spPr>
+        <p:txBody>
+          <a:bodyPr wrap="none" lIns="0" rIns="0" tIns="0" bIns="0">
+            <a:spAutoFit/>
+          </a:bodyPr>
+          <a:lstStyle/>
+          <a:p>
+            <a:pPr algn="l"/>
+            <a:r>
+              <a:rPr sz="1300" b="1">
+                <a:solidFill>
+                  <a:srgbClr val="1A1A1A"/>
+                </a:solidFill>
+                <a:latin typeface="Apple SD Gothic Neo"/>
+              </a:rPr>
+              <a:t>② 벡터 upsert</a:t>
+            </a:r>
+          </a:p>
+        </p:txBody>
+      </p:sp>
+      <p:sp>
+        <p:nvSpPr>
+          <p:cNvPr id="16" name="TextBox 15"/>
+          <p:cNvSpPr txBox="1"/>
+          <p:nvPr/>
+        </p:nvSpPr>
+        <p:spPr>
+          <a:xfrm>
+            <a:off x="4453128" y="1481328"/>
+            <a:ext cx="3291840" cy="457200"/>
+          </a:xfrm>
+          <a:prstGeom prst="rect">
+            <a:avLst/>
+          </a:prstGeom>
+          <a:noFill/>
+        </p:spPr>
+        <p:txBody>
+          <a:bodyPr wrap="none" lIns="0" rIns="0" tIns="0" bIns="0">
+            <a:spAutoFit/>
+          </a:bodyPr>
+          <a:lstStyle/>
+          <a:p>
+            <a:pPr algn="l"/>
+            <a:r>
+              <a:rPr sz="2700" b="1">
+                <a:solidFill>
+                  <a:srgbClr val="1F355E"/>
+                </a:solidFill>
+                <a:latin typeface="Apple SD Gothic Neo"/>
+              </a:rPr>
+              <a:t>1회</a:t>
+            </a:r>
+          </a:p>
+        </p:txBody>
+      </p:sp>
+      <p:sp>
+        <p:nvSpPr>
+          <p:cNvPr id="17" name="TextBox 16"/>
+          <p:cNvSpPr txBox="1"/>
+          <p:nvPr/>
+        </p:nvSpPr>
+        <p:spPr>
+          <a:xfrm>
+            <a:off x="4453128" y="2157984"/>
+            <a:ext cx="3337560" cy="182880"/>
+          </a:xfrm>
+          <a:prstGeom prst="rect">
+            <a:avLst/>
+          </a:prstGeom>
+          <a:noFill/>
+        </p:spPr>
+        <p:txBody>
+          <a:bodyPr wrap="square" lIns="0" rIns="0" tIns="0" bIns="0">
+            <a:spAutoFit/>
+          </a:bodyPr>
+          <a:lstStyle/>
+          <a:p>
+            <a:pPr algn="l"/>
+            <a:r>
+              <a:rPr sz="900" b="0">
+                <a:solidFill>
+                  <a:srgbClr val="1A1A1A"/>
+                </a:solidFill>
+                <a:latin typeface="Apple SD Gothic Neo"/>
+              </a:rPr>
+              <a:t>저장 요청 1건당 항상 1회</a:t>
+            </a:r>
+          </a:p>
+        </p:txBody>
+      </p:sp>
+      <p:sp>
+        <p:nvSpPr>
+          <p:cNvPr id="18" name="TextBox 17"/>
+          <p:cNvSpPr txBox="1"/>
+          <p:nvPr/>
+        </p:nvSpPr>
+        <p:spPr>
+          <a:xfrm>
+            <a:off x="4453128" y="2377439"/>
+            <a:ext cx="3337560" cy="182880"/>
+          </a:xfrm>
+          <a:prstGeom prst="rect">
+            <a:avLst/>
+          </a:prstGeom>
+          <a:noFill/>
+        </p:spPr>
+        <p:txBody>
+          <a:bodyPr wrap="square" lIns="0" rIns="0" tIns="0" bIns="0">
+            <a:spAutoFit/>
+          </a:bodyPr>
+          <a:lstStyle/>
+          <a:p>
+            <a:pPr algn="l"/>
+            <a:r>
+              <a:rPr sz="900" b="0">
+                <a:solidFill>
+                  <a:srgbClr val="1A1A1A"/>
+                </a:solidFill>
+                <a:latin typeface="Apple SD Gothic Neo"/>
+              </a:rPr>
+              <a:t>에피소드를 몇 건 담아 보내든 1회로 고정된다</a:t>
+            </a:r>
+          </a:p>
+        </p:txBody>
+      </p:sp>
+      <p:sp>
+        <p:nvSpPr>
+          <p:cNvPr id="19" name="Rectangle 18"/>
+          <p:cNvSpPr/>
+          <p:nvPr/>
+        </p:nvSpPr>
+        <p:spPr>
+          <a:xfrm>
+            <a:off x="4453128" y="2688336"/>
+            <a:ext cx="3291840" cy="9144"/>
+          </a:xfrm>
+          <a:prstGeom prst="rect">
+            <a:avLst/>
+          </a:prstGeom>
+          <a:solidFill>
+            <a:srgbClr val="1F7A6A"/>
+          </a:solidFill>
+          <a:ln>
+            <a:noFill/>
+          </a:ln>
+          <a:effectLst/>
+        </p:spPr>
+        <p:style>
+          <a:lnRef idx="1">
+            <a:schemeClr val="accent1"/>
+          </a:lnRef>
+          <a:fillRef idx="3">
+            <a:schemeClr val="accent1"/>
+          </a:fillRef>
+          <a:effectRef idx="2">
+            <a:schemeClr val="accent1"/>
+          </a:effectRef>
+          <a:fontRef idx="minor">
+            <a:schemeClr val="lt1"/>
+          </a:fontRef>
+        </p:style>
+        <p:txBody>
+          <a:bodyPr rtlCol="0" anchor="ctr"/>
+          <a:lstStyle/>
+          <a:p>
+            <a:pPr algn="ctr"/>
+          </a:p>
+        </p:txBody>
+      </p:sp>
+      <p:sp>
+        <p:nvSpPr>
+          <p:cNvPr id="20" name="TextBox 19"/>
+          <p:cNvSpPr txBox="1"/>
+          <p:nvPr/>
+        </p:nvSpPr>
+        <p:spPr>
+          <a:xfrm>
+            <a:off x="4453128" y="2779776"/>
+            <a:ext cx="3291840" cy="182880"/>
+          </a:xfrm>
+          <a:prstGeom prst="rect">
+            <a:avLst/>
+          </a:prstGeom>
+          <a:noFill/>
+        </p:spPr>
+        <p:txBody>
+          <a:bodyPr wrap="none" lIns="0" rIns="0" tIns="0" bIns="0">
+            <a:spAutoFit/>
+          </a:bodyPr>
+          <a:lstStyle/>
+          <a:p>
+            <a:pPr algn="l"/>
+            <a:r>
+              <a:rPr sz="850" b="0">
+                <a:solidFill>
+                  <a:srgbClr val="888888"/>
+                </a:solidFill>
+                <a:latin typeface="Apple SD Gothic Neo"/>
+              </a:rPr>
+              <a:t>저장 경로</a:t>
+            </a:r>
+          </a:p>
+        </p:txBody>
+      </p:sp>
+      <p:sp>
+        <p:nvSpPr>
+          <p:cNvPr id="21" name="Rounded Rectangle 20"/>
+          <p:cNvSpPr/>
+          <p:nvPr/>
+        </p:nvSpPr>
+        <p:spPr>
+          <a:xfrm>
+            <a:off x="8165592" y="1051560"/>
+            <a:ext cx="3611880" cy="2057400"/>
+          </a:xfrm>
+          <a:prstGeom prst="roundRect">
+            <a:avLst>
+              <a:gd name="adj" fmla="val 12000"/>
+            </a:avLst>
+          </a:prstGeom>
+          <a:solidFill>
+            <a:srgbClr val="CDEAE4"/>
+          </a:solidFill>
+          <a:ln w="16510">
+            <a:solidFill>
+              <a:srgbClr val="1F7A6A"/>
+            </a:solidFill>
+          </a:ln>
+          <a:effectLst/>
+        </p:spPr>
+        <p:style>
+          <a:lnRef idx="1">
+            <a:schemeClr val="accent1"/>
+          </a:lnRef>
+          <a:fillRef idx="3">
+            <a:schemeClr val="accent1"/>
+          </a:fillRef>
+          <a:effectRef idx="2">
+            <a:schemeClr val="accent1"/>
+          </a:effectRef>
+          <a:fontRef idx="minor">
+            <a:schemeClr val="lt1"/>
+          </a:fontRef>
+        </p:style>
+        <p:txBody>
+          <a:bodyPr rtlCol="0" anchor="ctr" wrap="square" lIns="36576" rIns="36576" tIns="0" bIns="0"/>
+          <a:lstStyle/>
+          <a:p>
+            <a:pPr algn="ctr"/>
+          </a:p>
+        </p:txBody>
+      </p:sp>
+      <p:sp>
+        <p:nvSpPr>
+          <p:cNvPr id="22" name="Oval 21"/>
+          <p:cNvSpPr/>
+          <p:nvPr/>
+        </p:nvSpPr>
+        <p:spPr>
+          <a:xfrm>
+            <a:off x="11503151" y="996696"/>
+            <a:ext cx="219456" cy="219456"/>
+          </a:xfrm>
+          <a:prstGeom prst="ellipse">
+            <a:avLst/>
+          </a:prstGeom>
+          <a:solidFill>
+            <a:srgbClr val="1F7A6A"/>
+          </a:solidFill>
+          <a:ln w="15240">
+            <a:solidFill>
+              <a:srgbClr val="FFFFFF"/>
+            </a:solidFill>
+          </a:ln>
+          <a:effectLst/>
+        </p:spPr>
+        <p:style>
+          <a:lnRef idx="1">
+            <a:schemeClr val="accent1"/>
+          </a:lnRef>
+          <a:fillRef idx="3">
+            <a:schemeClr val="accent1"/>
+          </a:fillRef>
+          <a:effectRef idx="2">
+            <a:schemeClr val="accent1"/>
+          </a:effectRef>
+          <a:fontRef idx="minor">
+            <a:schemeClr val="lt1"/>
+          </a:fontRef>
+        </p:style>
+        <p:txBody>
+          <a:bodyPr rtlCol="0" anchor="ctr" lIns="0" rIns="0" tIns="0" bIns="0"/>
+          <a:lstStyle/>
+          <a:p>
+            <a:pPr algn="ctr"/>
+            <a:r>
+              <a:rPr sz="900" b="1">
+                <a:solidFill>
+                  <a:srgbClr val="FFFFFF"/>
+                </a:solidFill>
+                <a:latin typeface="Apple SD Gothic Neo"/>
+              </a:rPr>
+              <a:t>⏱</a:t>
+            </a:r>
+          </a:p>
+        </p:txBody>
+      </p:sp>
+      <p:sp>
+        <p:nvSpPr>
+          <p:cNvPr id="23" name="TextBox 22"/>
+          <p:cNvSpPr txBox="1"/>
+          <p:nvPr/>
+        </p:nvSpPr>
+        <p:spPr>
+          <a:xfrm>
+            <a:off x="8330183" y="1152144"/>
+            <a:ext cx="3108960" cy="237744"/>
+          </a:xfrm>
+          <a:prstGeom prst="rect">
+            <a:avLst/>
+          </a:prstGeom>
+          <a:noFill/>
+        </p:spPr>
+        <p:txBody>
+          <a:bodyPr wrap="none" lIns="0" rIns="0" tIns="0" bIns="0">
+            <a:spAutoFit/>
+          </a:bodyPr>
+          <a:lstStyle/>
+          <a:p>
+            <a:pPr algn="l"/>
+            <a:r>
+              <a:rPr sz="1300" b="1">
+                <a:solidFill>
+                  <a:srgbClr val="1A1A1A"/>
+                </a:solidFill>
+                <a:latin typeface="Apple SD Gothic Neo"/>
+              </a:rPr>
+              <a:t>③ ANN 탐색</a:t>
+            </a:r>
+          </a:p>
+        </p:txBody>
+      </p:sp>
+      <p:sp>
+        <p:nvSpPr>
+          <p:cNvPr id="24" name="TextBox 23"/>
+          <p:cNvSpPr txBox="1"/>
+          <p:nvPr/>
+        </p:nvSpPr>
+        <p:spPr>
+          <a:xfrm>
+            <a:off x="8330183" y="1481328"/>
+            <a:ext cx="3291840" cy="457200"/>
+          </a:xfrm>
+          <a:prstGeom prst="rect">
+            <a:avLst/>
+          </a:prstGeom>
+          <a:noFill/>
+        </p:spPr>
+        <p:txBody>
+          <a:bodyPr wrap="none" lIns="0" rIns="0" tIns="0" bIns="0">
+            <a:spAutoFit/>
+          </a:bodyPr>
+          <a:lstStyle/>
+          <a:p>
+            <a:pPr algn="l"/>
+            <a:r>
+              <a:rPr sz="2700" b="1">
+                <a:solidFill>
+                  <a:srgbClr val="1F355E"/>
+                </a:solidFill>
+                <a:latin typeface="Apple SD Gothic Neo"/>
+              </a:rPr>
+              <a:t>1회</a:t>
+            </a:r>
+          </a:p>
+        </p:txBody>
+      </p:sp>
+      <p:sp>
+        <p:nvSpPr>
+          <p:cNvPr id="25" name="TextBox 24"/>
+          <p:cNvSpPr txBox="1"/>
+          <p:nvPr/>
+        </p:nvSpPr>
+        <p:spPr>
+          <a:xfrm>
+            <a:off x="8330183" y="2157984"/>
+            <a:ext cx="3337560" cy="182880"/>
+          </a:xfrm>
+          <a:prstGeom prst="rect">
+            <a:avLst/>
+          </a:prstGeom>
+          <a:noFill/>
+        </p:spPr>
+        <p:txBody>
+          <a:bodyPr wrap="square" lIns="0" rIns="0" tIns="0" bIns="0">
+            <a:spAutoFit/>
+          </a:bodyPr>
+          <a:lstStyle/>
+          <a:p>
+            <a:pPr algn="l"/>
+            <a:r>
+              <a:rPr sz="900" b="0">
+                <a:solidFill>
+                  <a:srgbClr val="1A1A1A"/>
+                </a:solidFill>
+                <a:latin typeface="Apple SD Gothic Neo"/>
+              </a:rPr>
+              <a:t>검색 요청 1건당 항상 1회</a:t>
+            </a:r>
+          </a:p>
+        </p:txBody>
+      </p:sp>
+      <p:sp>
+        <p:nvSpPr>
+          <p:cNvPr id="26" name="TextBox 25"/>
+          <p:cNvSpPr txBox="1"/>
+          <p:nvPr/>
+        </p:nvSpPr>
+        <p:spPr>
+          <a:xfrm>
+            <a:off x="8330183" y="2377439"/>
+            <a:ext cx="3337560" cy="182880"/>
+          </a:xfrm>
+          <a:prstGeom prst="rect">
+            <a:avLst/>
+          </a:prstGeom>
+          <a:noFill/>
+        </p:spPr>
+        <p:txBody>
+          <a:bodyPr wrap="square" lIns="0" rIns="0" tIns="0" bIns="0">
+            <a:spAutoFit/>
+          </a:bodyPr>
+          <a:lstStyle/>
+          <a:p>
+            <a:pPr algn="l"/>
+            <a:r>
+              <a:rPr sz="900" b="0">
+                <a:solidFill>
+                  <a:srgbClr val="1A1A1A"/>
+                </a:solidFill>
+                <a:latin typeface="Apple SD Gothic Neo"/>
+              </a:rPr>
+              <a:t>top_k와 필터, 문맥 확장을 바꿔도 1회다</a:t>
+            </a:r>
+          </a:p>
+        </p:txBody>
+      </p:sp>
+      <p:sp>
+        <p:nvSpPr>
+          <p:cNvPr id="27" name="Rectangle 26"/>
+          <p:cNvSpPr/>
+          <p:nvPr/>
+        </p:nvSpPr>
+        <p:spPr>
+          <a:xfrm>
+            <a:off x="8330183" y="2688336"/>
+            <a:ext cx="3291840" cy="9144"/>
+          </a:xfrm>
+          <a:prstGeom prst="rect">
+            <a:avLst/>
+          </a:prstGeom>
+          <a:solidFill>
+            <a:srgbClr val="1F7A6A"/>
+          </a:solidFill>
+          <a:ln>
+            <a:noFill/>
+          </a:ln>
+          <a:effectLst/>
+        </p:spPr>
+        <p:style>
+          <a:lnRef idx="1">
+            <a:schemeClr val="accent1"/>
+          </a:lnRef>
+          <a:fillRef idx="3">
+            <a:schemeClr val="accent1"/>
+          </a:fillRef>
+          <a:effectRef idx="2">
+            <a:schemeClr val="accent1"/>
+          </a:effectRef>
+          <a:fontRef idx="minor">
+            <a:schemeClr val="lt1"/>
+          </a:fontRef>
+        </p:style>
+        <p:txBody>
+          <a:bodyPr rtlCol="0" anchor="ctr"/>
+          <a:lstStyle/>
+          <a:p>
+            <a:pPr algn="ctr"/>
+          </a:p>
+        </p:txBody>
+      </p:sp>
+      <p:sp>
+        <p:nvSpPr>
+          <p:cNvPr id="28" name="TextBox 27"/>
+          <p:cNvSpPr txBox="1"/>
+          <p:nvPr/>
+        </p:nvSpPr>
+        <p:spPr>
+          <a:xfrm>
+            <a:off x="8330183" y="2779776"/>
+            <a:ext cx="3291840" cy="182880"/>
+          </a:xfrm>
+          <a:prstGeom prst="rect">
+            <a:avLst/>
+          </a:prstGeom>
+          <a:noFill/>
+        </p:spPr>
+        <p:txBody>
+          <a:bodyPr wrap="none" lIns="0" rIns="0" tIns="0" bIns="0">
+            <a:spAutoFit/>
+          </a:bodyPr>
+          <a:lstStyle/>
+          <a:p>
+            <a:pPr algn="l"/>
+            <a:r>
+              <a:rPr sz="850" b="0">
+                <a:solidFill>
+                  <a:srgbClr val="888888"/>
+                </a:solidFill>
+                <a:latin typeface="Apple SD Gothic Neo"/>
+              </a:rPr>
+              <a:t>검색 경로</a:t>
+            </a:r>
+          </a:p>
+        </p:txBody>
+      </p:sp>
+      <p:sp>
+        <p:nvSpPr>
+          <p:cNvPr id="29" name="TextBox 28"/>
+          <p:cNvSpPr txBox="1"/>
+          <p:nvPr/>
+        </p:nvSpPr>
+        <p:spPr>
+          <a:xfrm>
+            <a:off x="411480" y="3218688"/>
+            <a:ext cx="11365992" cy="182880"/>
+          </a:xfrm>
+          <a:prstGeom prst="rect">
+            <a:avLst/>
+          </a:prstGeom>
+          <a:noFill/>
+        </p:spPr>
+        <p:txBody>
+          <a:bodyPr wrap="none" lIns="0" rIns="0" tIns="0" bIns="0">
+            <a:spAutoFit/>
+          </a:bodyPr>
+          <a:lstStyle/>
+          <a:p>
+            <a:pPr algn="l"/>
+            <a:r>
+              <a:rPr sz="900" b="0">
+                <a:solidFill>
+                  <a:srgbClr val="555555"/>
+                </a:solidFill>
+                <a:latin typeface="Apple SD Gothic Neo"/>
+              </a:rPr>
+              <a:t>나머지 단계는 Qdrant를 부르지 않는다. 원문 저장과 문맥 walk, 원문 복원은 PostgreSQL이고 세그먼트화와 필터 파싱, 리랭킹, 결과 조립은 프로세스 안에서 끝나며 임베딩은 별도 API다.</a:t>
+            </a:r>
+          </a:p>
+        </p:txBody>
+      </p:sp>
+      <p:sp>
+        <p:nvSpPr>
+          <p:cNvPr id="30" name="Rounded Rectangle 29"/>
+          <p:cNvSpPr/>
+          <p:nvPr/>
+        </p:nvSpPr>
+        <p:spPr>
+          <a:xfrm>
+            <a:off x="411480" y="3474720"/>
+            <a:ext cx="5440680" cy="1417320"/>
+          </a:xfrm>
+          <a:prstGeom prst="roundRect">
+            <a:avLst>
+              <a:gd name="adj" fmla="val 8000"/>
+            </a:avLst>
+          </a:prstGeom>
+          <a:solidFill>
+            <a:srgbClr val="F3F6FA"/>
+          </a:solidFill>
+          <a:ln w="13970">
+            <a:solidFill>
+              <a:srgbClr val="8CA0BE"/>
+            </a:solidFill>
+          </a:ln>
+          <a:effectLst/>
+        </p:spPr>
+        <p:style>
+          <a:lnRef idx="1">
+            <a:schemeClr val="accent1"/>
+          </a:lnRef>
+          <a:fillRef idx="3">
+            <a:schemeClr val="accent1"/>
+          </a:fillRef>
+          <a:effectRef idx="2">
+            <a:schemeClr val="accent1"/>
+          </a:effectRef>
+          <a:fontRef idx="minor">
+            <a:schemeClr val="lt1"/>
+          </a:fontRef>
+        </p:style>
+        <p:txBody>
+          <a:bodyPr rtlCol="0" anchor="ctr"/>
+          <a:lstStyle/>
+          <a:p>
+            <a:pPr algn="ctr"/>
+          </a:p>
+        </p:txBody>
+      </p:sp>
+      <p:sp>
+        <p:nvSpPr>
+          <p:cNvPr id="31" name="TextBox 30"/>
+          <p:cNvSpPr txBox="1"/>
+          <p:nvPr/>
+        </p:nvSpPr>
+        <p:spPr>
+          <a:xfrm>
+            <a:off x="548640" y="3547872"/>
+            <a:ext cx="5120640" cy="201168"/>
+          </a:xfrm>
+          <a:prstGeom prst="rect">
+            <a:avLst/>
+          </a:prstGeom>
+          <a:noFill/>
+        </p:spPr>
+        <p:txBody>
+          <a:bodyPr wrap="none" lIns="0" rIns="0" tIns="0" bIns="0">
+            <a:spAutoFit/>
+          </a:bodyPr>
+          <a:lstStyle/>
+          <a:p>
+            <a:pPr algn="l"/>
+            <a:r>
+              <a:rPr sz="1100" b="1">
+                <a:solidFill>
+                  <a:srgbClr val="1A1A1A"/>
+                </a:solidFill>
+                <a:latin typeface="Apple SD Gothic Neo"/>
+              </a:rPr>
+              <a:t>평상시   눈금 0~4 ms</a:t>
+            </a:r>
+          </a:p>
+        </p:txBody>
+      </p:sp>
+      <p:sp>
+        <p:nvSpPr>
+          <p:cNvPr id="32" name="TextBox 31"/>
+          <p:cNvSpPr txBox="1"/>
+          <p:nvPr/>
+        </p:nvSpPr>
+        <p:spPr>
+          <a:xfrm>
+            <a:off x="548640" y="3886200"/>
+            <a:ext cx="1691640" cy="164592"/>
+          </a:xfrm>
+          <a:prstGeom prst="rect">
+            <a:avLst/>
+          </a:prstGeom>
+          <a:noFill/>
+        </p:spPr>
+        <p:txBody>
+          <a:bodyPr wrap="none" lIns="0" rIns="0" tIns="0" bIns="0">
+            <a:spAutoFit/>
+          </a:bodyPr>
+          <a:lstStyle/>
+          <a:p>
+            <a:pPr algn="l"/>
+            <a:r>
+              <a:rPr sz="900" b="0">
+                <a:solidFill>
+                  <a:srgbClr val="1A1A1A"/>
+                </a:solidFill>
+                <a:latin typeface="Apple SD Gothic Neo"/>
+              </a:rPr>
+              <a:t>벡터 upsert — 저장 1건</a:t>
+            </a:r>
+          </a:p>
+        </p:txBody>
+      </p:sp>
+      <p:sp>
+        <p:nvSpPr>
+          <p:cNvPr id="33" name="Rectangle 32"/>
+          <p:cNvSpPr/>
+          <p:nvPr/>
+        </p:nvSpPr>
+        <p:spPr>
+          <a:xfrm>
+            <a:off x="2331720" y="3858768"/>
+            <a:ext cx="2240280" cy="182880"/>
+          </a:xfrm>
+          <a:prstGeom prst="rect">
+            <a:avLst/>
+          </a:prstGeom>
+          <a:solidFill>
+            <a:srgbClr val="ECECEC"/>
+          </a:solidFill>
+          <a:ln>
+            <a:noFill/>
+          </a:ln>
+          <a:effectLst/>
+        </p:spPr>
+        <p:style>
+          <a:lnRef idx="1">
+            <a:schemeClr val="accent1"/>
+          </a:lnRef>
+          <a:fillRef idx="3">
+            <a:schemeClr val="accent1"/>
+          </a:fillRef>
+          <a:effectRef idx="2">
+            <a:schemeClr val="accent1"/>
+          </a:effectRef>
+          <a:fontRef idx="minor">
+            <a:schemeClr val="lt1"/>
+          </a:fontRef>
+        </p:style>
+        <p:txBody>
+          <a:bodyPr rtlCol="0" anchor="ctr"/>
+          <a:lstStyle/>
+          <a:p>
+            <a:pPr algn="ctr"/>
+          </a:p>
+        </p:txBody>
+      </p:sp>
+      <p:sp>
+        <p:nvSpPr>
+          <p:cNvPr id="34" name="Rectangle 33"/>
+          <p:cNvSpPr/>
+          <p:nvPr/>
+        </p:nvSpPr>
+        <p:spPr>
+          <a:xfrm>
+            <a:off x="2331720" y="3858768"/>
+            <a:ext cx="1680210" cy="182880"/>
+          </a:xfrm>
+          <a:prstGeom prst="rect">
+            <a:avLst/>
+          </a:prstGeom>
+          <a:solidFill>
+            <a:srgbClr val="1F7A6A"/>
+          </a:solidFill>
+          <a:ln>
+            <a:noFill/>
+          </a:ln>
+          <a:effectLst/>
+        </p:spPr>
+        <p:style>
+          <a:lnRef idx="1">
+            <a:schemeClr val="accent1"/>
+          </a:lnRef>
+          <a:fillRef idx="3">
+            <a:schemeClr val="accent1"/>
+          </a:fillRef>
+          <a:effectRef idx="2">
+            <a:schemeClr val="accent1"/>
+          </a:effectRef>
+          <a:fontRef idx="minor">
+            <a:schemeClr val="lt1"/>
+          </a:fontRef>
+        </p:style>
+        <p:txBody>
+          <a:bodyPr rtlCol="0" anchor="ctr"/>
+          <a:lstStyle/>
+          <a:p>
+            <a:pPr algn="ctr"/>
+          </a:p>
+        </p:txBody>
+      </p:sp>
+      <p:sp>
+        <p:nvSpPr>
+          <p:cNvPr id="35" name="TextBox 34"/>
+          <p:cNvSpPr txBox="1"/>
+          <p:nvPr/>
+        </p:nvSpPr>
+        <p:spPr>
+          <a:xfrm>
+            <a:off x="4681728" y="3877055"/>
+            <a:ext cx="1097280" cy="182880"/>
+          </a:xfrm>
+          <a:prstGeom prst="rect">
+            <a:avLst/>
+          </a:prstGeom>
+          <a:noFill/>
+        </p:spPr>
+        <p:txBody>
+          <a:bodyPr wrap="none" lIns="0" rIns="0" tIns="0" bIns="0">
+            <a:spAutoFit/>
+          </a:bodyPr>
+          <a:lstStyle/>
+          <a:p>
+            <a:pPr algn="l"/>
+            <a:r>
+              <a:rPr sz="950" b="1">
+                <a:solidFill>
+                  <a:srgbClr val="1F4E79"/>
+                </a:solidFill>
+                <a:latin typeface="Menlo"/>
+              </a:rPr>
+              <a:t>3.0 ms</a:t>
+            </a:r>
+          </a:p>
+        </p:txBody>
+      </p:sp>
+      <p:sp>
+        <p:nvSpPr>
+          <p:cNvPr id="36" name="TextBox 35"/>
+          <p:cNvSpPr txBox="1"/>
+          <p:nvPr/>
+        </p:nvSpPr>
+        <p:spPr>
+          <a:xfrm>
+            <a:off x="548640" y="4206240"/>
+            <a:ext cx="1691640" cy="164592"/>
+          </a:xfrm>
+          <a:prstGeom prst="rect">
+            <a:avLst/>
+          </a:prstGeom>
+          <a:noFill/>
+        </p:spPr>
+        <p:txBody>
+          <a:bodyPr wrap="none" lIns="0" rIns="0" tIns="0" bIns="0">
+            <a:spAutoFit/>
+          </a:bodyPr>
+          <a:lstStyle/>
+          <a:p>
+            <a:pPr algn="l"/>
+            <a:r>
+              <a:rPr sz="900" b="0">
+                <a:solidFill>
+                  <a:srgbClr val="1A1A1A"/>
+                </a:solidFill>
+                <a:latin typeface="Apple SD Gothic Neo"/>
+              </a:rPr>
+              <a:t>ANN 탐색 — 검색 1건</a:t>
+            </a:r>
+          </a:p>
+        </p:txBody>
+      </p:sp>
+      <p:sp>
+        <p:nvSpPr>
+          <p:cNvPr id="37" name="Rectangle 36"/>
+          <p:cNvSpPr/>
+          <p:nvPr/>
+        </p:nvSpPr>
+        <p:spPr>
+          <a:xfrm>
+            <a:off x="2331720" y="4178807"/>
+            <a:ext cx="2240280" cy="182880"/>
+          </a:xfrm>
+          <a:prstGeom prst="rect">
+            <a:avLst/>
+          </a:prstGeom>
+          <a:solidFill>
+            <a:srgbClr val="ECECEC"/>
+          </a:solidFill>
+          <a:ln>
+            <a:noFill/>
+          </a:ln>
+          <a:effectLst/>
+        </p:spPr>
+        <p:style>
+          <a:lnRef idx="1">
+            <a:schemeClr val="accent1"/>
+          </a:lnRef>
+          <a:fillRef idx="3">
+            <a:schemeClr val="accent1"/>
+          </a:fillRef>
+          <a:effectRef idx="2">
+            <a:schemeClr val="accent1"/>
+          </a:effectRef>
+          <a:fontRef idx="minor">
+            <a:schemeClr val="lt1"/>
+          </a:fontRef>
+        </p:style>
+        <p:txBody>
+          <a:bodyPr rtlCol="0" anchor="ctr"/>
+          <a:lstStyle/>
+          <a:p>
+            <a:pPr algn="ctr"/>
+          </a:p>
+        </p:txBody>
+      </p:sp>
+      <p:sp>
+        <p:nvSpPr>
+          <p:cNvPr id="38" name="Rectangle 37"/>
+          <p:cNvSpPr/>
+          <p:nvPr/>
+        </p:nvSpPr>
+        <p:spPr>
+          <a:xfrm>
+            <a:off x="2331720" y="4178807"/>
+            <a:ext cx="1120140" cy="182880"/>
+          </a:xfrm>
+          <a:prstGeom prst="rect">
+            <a:avLst/>
+          </a:prstGeom>
+          <a:solidFill>
+            <a:srgbClr val="1F7A6A"/>
+          </a:solidFill>
+          <a:ln>
+            <a:noFill/>
+          </a:ln>
+          <a:effectLst/>
+        </p:spPr>
+        <p:style>
+          <a:lnRef idx="1">
+            <a:schemeClr val="accent1"/>
+          </a:lnRef>
+          <a:fillRef idx="3">
+            <a:schemeClr val="accent1"/>
+          </a:fillRef>
+          <a:effectRef idx="2">
+            <a:schemeClr val="accent1"/>
+          </a:effectRef>
+          <a:fontRef idx="minor">
+            <a:schemeClr val="lt1"/>
+          </a:fontRef>
+        </p:style>
+        <p:txBody>
+          <a:bodyPr rtlCol="0" anchor="ctr"/>
+          <a:lstStyle/>
+          <a:p>
+            <a:pPr algn="ctr"/>
+          </a:p>
+        </p:txBody>
+      </p:sp>
+      <p:sp>
+        <p:nvSpPr>
+          <p:cNvPr id="39" name="TextBox 38"/>
+          <p:cNvSpPr txBox="1"/>
+          <p:nvPr/>
+        </p:nvSpPr>
+        <p:spPr>
+          <a:xfrm>
+            <a:off x="4681728" y="4197095"/>
+            <a:ext cx="1097280" cy="182880"/>
+          </a:xfrm>
+          <a:prstGeom prst="rect">
+            <a:avLst/>
+          </a:prstGeom>
+          <a:noFill/>
+        </p:spPr>
+        <p:txBody>
+          <a:bodyPr wrap="none" lIns="0" rIns="0" tIns="0" bIns="0">
+            <a:spAutoFit/>
+          </a:bodyPr>
+          <a:lstStyle/>
+          <a:p>
+            <a:pPr algn="l"/>
+            <a:r>
+              <a:rPr sz="950" b="1">
+                <a:solidFill>
+                  <a:srgbClr val="1F4E79"/>
+                </a:solidFill>
+                <a:latin typeface="Menlo"/>
+              </a:rPr>
+              <a:t>2.0 ms</a:t>
+            </a:r>
+          </a:p>
+        </p:txBody>
+      </p:sp>
+      <p:sp>
+        <p:nvSpPr>
+          <p:cNvPr id="40" name="TextBox 39"/>
+          <p:cNvSpPr txBox="1"/>
+          <p:nvPr/>
+        </p:nvSpPr>
+        <p:spPr>
+          <a:xfrm>
+            <a:off x="548640" y="4526280"/>
+            <a:ext cx="1691640" cy="164592"/>
+          </a:xfrm>
+          <a:prstGeom prst="rect">
+            <a:avLst/>
+          </a:prstGeom>
+          <a:noFill/>
+        </p:spPr>
+        <p:txBody>
+          <a:bodyPr wrap="none" lIns="0" rIns="0" tIns="0" bIns="0">
+            <a:spAutoFit/>
+          </a:bodyPr>
+          <a:lstStyle/>
+          <a:p>
+            <a:pPr algn="l"/>
+            <a:r>
+              <a:rPr sz="900" b="0">
+                <a:solidFill>
+                  <a:srgbClr val="1A1A1A"/>
+                </a:solidFill>
+                <a:latin typeface="Apple SD Gothic Neo"/>
+              </a:rPr>
+              <a:t>재준비 2회 — 캐시 미스</a:t>
+            </a:r>
+          </a:p>
+        </p:txBody>
+      </p:sp>
+      <p:sp>
+        <p:nvSpPr>
+          <p:cNvPr id="41" name="Rectangle 40"/>
+          <p:cNvSpPr/>
+          <p:nvPr/>
+        </p:nvSpPr>
+        <p:spPr>
+          <a:xfrm>
+            <a:off x="2331720" y="4498848"/>
+            <a:ext cx="2240280" cy="182880"/>
+          </a:xfrm>
+          <a:prstGeom prst="rect">
+            <a:avLst/>
+          </a:prstGeom>
+          <a:solidFill>
+            <a:srgbClr val="ECECEC"/>
+          </a:solidFill>
+          <a:ln>
+            <a:noFill/>
+          </a:ln>
+          <a:effectLst/>
+        </p:spPr>
+        <p:style>
+          <a:lnRef idx="1">
+            <a:schemeClr val="accent1"/>
+          </a:lnRef>
+          <a:fillRef idx="3">
+            <a:schemeClr val="accent1"/>
+          </a:fillRef>
+          <a:effectRef idx="2">
+            <a:schemeClr val="accent1"/>
+          </a:effectRef>
+          <a:fontRef idx="minor">
+            <a:schemeClr val="lt1"/>
+          </a:fontRef>
+        </p:style>
+        <p:txBody>
+          <a:bodyPr rtlCol="0" anchor="ctr"/>
+          <a:lstStyle/>
+          <a:p>
+            <a:pPr algn="ctr"/>
+          </a:p>
+        </p:txBody>
+      </p:sp>
+      <p:sp>
+        <p:nvSpPr>
+          <p:cNvPr id="42" name="Rectangle 41"/>
+          <p:cNvSpPr/>
+          <p:nvPr/>
+        </p:nvSpPr>
+        <p:spPr>
+          <a:xfrm>
+            <a:off x="2331720" y="4498848"/>
+            <a:ext cx="1904238" cy="182880"/>
+          </a:xfrm>
+          <a:prstGeom prst="rect">
+            <a:avLst/>
+          </a:prstGeom>
+          <a:solidFill>
+            <a:srgbClr val="1F7A6A"/>
+          </a:solidFill>
+          <a:ln>
+            <a:noFill/>
+          </a:ln>
+          <a:effectLst/>
+        </p:spPr>
+        <p:style>
+          <a:lnRef idx="1">
+            <a:schemeClr val="accent1"/>
+          </a:lnRef>
+          <a:fillRef idx="3">
+            <a:schemeClr val="accent1"/>
+          </a:fillRef>
+          <a:effectRef idx="2">
+            <a:schemeClr val="accent1"/>
+          </a:effectRef>
+          <a:fontRef idx="minor">
+            <a:schemeClr val="lt1"/>
+          </a:fontRef>
+        </p:style>
+        <p:txBody>
+          <a:bodyPr rtlCol="0" anchor="ctr"/>
+          <a:lstStyle/>
+          <a:p>
+            <a:pPr algn="ctr"/>
+          </a:p>
+        </p:txBody>
+      </p:sp>
+      <p:sp>
+        <p:nvSpPr>
+          <p:cNvPr id="43" name="TextBox 42"/>
+          <p:cNvSpPr txBox="1"/>
+          <p:nvPr/>
+        </p:nvSpPr>
+        <p:spPr>
+          <a:xfrm>
+            <a:off x="4681728" y="4517136"/>
+            <a:ext cx="1097280" cy="182880"/>
+          </a:xfrm>
+          <a:prstGeom prst="rect">
+            <a:avLst/>
+          </a:prstGeom>
+          <a:noFill/>
+        </p:spPr>
+        <p:txBody>
+          <a:bodyPr wrap="none" lIns="0" rIns="0" tIns="0" bIns="0">
+            <a:spAutoFit/>
+          </a:bodyPr>
+          <a:lstStyle/>
+          <a:p>
+            <a:pPr algn="l"/>
+            <a:r>
+              <a:rPr sz="950" b="1">
+                <a:solidFill>
+                  <a:srgbClr val="1F4E79"/>
+                </a:solidFill>
+                <a:latin typeface="Menlo"/>
+              </a:rPr>
+              <a:t>3.4 ms</a:t>
+            </a:r>
+          </a:p>
+        </p:txBody>
+      </p:sp>
+      <p:sp>
+        <p:nvSpPr>
+          <p:cNvPr id="44" name="Rounded Rectangle 43"/>
+          <p:cNvSpPr/>
+          <p:nvPr/>
+        </p:nvSpPr>
+        <p:spPr>
+          <a:xfrm>
+            <a:off x="6336792" y="3474720"/>
+            <a:ext cx="5440680" cy="1417320"/>
+          </a:xfrm>
+          <a:prstGeom prst="roundRect">
+            <a:avLst>
+              <a:gd name="adj" fmla="val 8000"/>
+            </a:avLst>
+          </a:prstGeom>
+          <a:solidFill>
+            <a:srgbClr val="F3F6FA"/>
+          </a:solidFill>
+          <a:ln w="13970">
+            <a:solidFill>
+              <a:srgbClr val="8CA0BE"/>
+            </a:solidFill>
+          </a:ln>
+          <a:effectLst/>
+        </p:spPr>
+        <p:style>
+          <a:lnRef idx="1">
+            <a:schemeClr val="accent1"/>
+          </a:lnRef>
+          <a:fillRef idx="3">
+            <a:schemeClr val="accent1"/>
+          </a:fillRef>
+          <a:effectRef idx="2">
+            <a:schemeClr val="accent1"/>
+          </a:effectRef>
+          <a:fontRef idx="minor">
+            <a:schemeClr val="lt1"/>
+          </a:fontRef>
+        </p:style>
+        <p:txBody>
+          <a:bodyPr rtlCol="0" anchor="ctr"/>
+          <a:lstStyle/>
+          <a:p>
+            <a:pPr algn="ctr"/>
+          </a:p>
+        </p:txBody>
+      </p:sp>
+      <p:sp>
+        <p:nvSpPr>
+          <p:cNvPr id="45" name="TextBox 44"/>
+          <p:cNvSpPr txBox="1"/>
+          <p:nvPr/>
+        </p:nvSpPr>
+        <p:spPr>
+          <a:xfrm>
+            <a:off x="6473952" y="3547872"/>
+            <a:ext cx="5120640" cy="201168"/>
+          </a:xfrm>
+          <a:prstGeom prst="rect">
+            <a:avLst/>
+          </a:prstGeom>
+          <a:noFill/>
+        </p:spPr>
+        <p:txBody>
+          <a:bodyPr wrap="none" lIns="0" rIns="0" tIns="0" bIns="0">
+            <a:spAutoFit/>
+          </a:bodyPr>
+          <a:lstStyle/>
+          <a:p>
+            <a:pPr algn="l"/>
+            <a:r>
+              <a:rPr sz="1100" b="1">
+                <a:solidFill>
+                  <a:srgbClr val="1A1A1A"/>
+                </a:solidFill>
+                <a:latin typeface="Apple SD Gothic Neo"/>
+              </a:rPr>
+              <a:t>세션 등록   눈금 0~900 ms</a:t>
+            </a:r>
+          </a:p>
+        </p:txBody>
+      </p:sp>
+      <p:sp>
+        <p:nvSpPr>
+          <p:cNvPr id="46" name="TextBox 45"/>
+          <p:cNvSpPr txBox="1"/>
+          <p:nvPr/>
+        </p:nvSpPr>
+        <p:spPr>
+          <a:xfrm>
+            <a:off x="6473952" y="3886200"/>
+            <a:ext cx="1691640" cy="164592"/>
+          </a:xfrm>
+          <a:prstGeom prst="rect">
+            <a:avLst/>
+          </a:prstGeom>
+          <a:noFill/>
+        </p:spPr>
+        <p:txBody>
+          <a:bodyPr wrap="none" lIns="0" rIns="0" tIns="0" bIns="0">
+            <a:spAutoFit/>
+          </a:bodyPr>
+          <a:lstStyle/>
+          <a:p>
+            <a:pPr algn="l"/>
+            <a:r>
+              <a:rPr sz="900" b="0">
+                <a:solidFill>
+                  <a:srgbClr val="1A1A1A"/>
+                </a:solidFill>
+                <a:latin typeface="Apple SD Gothic Neo"/>
+              </a:rPr>
+              <a:t>첫 세션 17회</a:t>
+            </a:r>
+          </a:p>
+        </p:txBody>
+      </p:sp>
+      <p:sp>
+        <p:nvSpPr>
+          <p:cNvPr id="47" name="Rectangle 46"/>
+          <p:cNvSpPr/>
+          <p:nvPr/>
+        </p:nvSpPr>
+        <p:spPr>
+          <a:xfrm>
+            <a:off x="8257031" y="3858768"/>
+            <a:ext cx="2240280" cy="182880"/>
+          </a:xfrm>
+          <a:prstGeom prst="rect">
+            <a:avLst/>
+          </a:prstGeom>
+          <a:solidFill>
+            <a:srgbClr val="ECECEC"/>
+          </a:solidFill>
+          <a:ln>
+            <a:noFill/>
+          </a:ln>
+          <a:effectLst/>
+        </p:spPr>
+        <p:style>
+          <a:lnRef idx="1">
+            <a:schemeClr val="accent1"/>
+          </a:lnRef>
+          <a:fillRef idx="3">
+            <a:schemeClr val="accent1"/>
+          </a:fillRef>
+          <a:effectRef idx="2">
+            <a:schemeClr val="accent1"/>
+          </a:effectRef>
+          <a:fontRef idx="minor">
+            <a:schemeClr val="lt1"/>
+          </a:fontRef>
+        </p:style>
+        <p:txBody>
+          <a:bodyPr rtlCol="0" anchor="ctr"/>
+          <a:lstStyle/>
+          <a:p>
+            <a:pPr algn="ctr"/>
+          </a:p>
+        </p:txBody>
+      </p:sp>
+      <p:sp>
+        <p:nvSpPr>
+          <p:cNvPr id="48" name="Rectangle 47"/>
+          <p:cNvSpPr/>
+          <p:nvPr/>
+        </p:nvSpPr>
+        <p:spPr>
+          <a:xfrm>
+            <a:off x="8257031" y="3858768"/>
+            <a:ext cx="2115820" cy="182880"/>
+          </a:xfrm>
+          <a:prstGeom prst="rect">
+            <a:avLst/>
+          </a:prstGeom>
+          <a:solidFill>
+            <a:srgbClr val="A33333"/>
+          </a:solidFill>
+          <a:ln>
+            <a:noFill/>
+          </a:ln>
+          <a:effectLst/>
+        </p:spPr>
+        <p:style>
+          <a:lnRef idx="1">
+            <a:schemeClr val="accent1"/>
+          </a:lnRef>
+          <a:fillRef idx="3">
+            <a:schemeClr val="accent1"/>
+          </a:fillRef>
+          <a:effectRef idx="2">
+            <a:schemeClr val="accent1"/>
+          </a:effectRef>
+          <a:fontRef idx="minor">
+            <a:schemeClr val="lt1"/>
+          </a:fontRef>
+        </p:style>
+        <p:txBody>
+          <a:bodyPr rtlCol="0" anchor="ctr"/>
+          <a:lstStyle/>
+          <a:p>
+            <a:pPr algn="ctr"/>
+          </a:p>
+        </p:txBody>
+      </p:sp>
+      <p:sp>
+        <p:nvSpPr>
+          <p:cNvPr id="49" name="TextBox 48"/>
+          <p:cNvSpPr txBox="1"/>
+          <p:nvPr/>
+        </p:nvSpPr>
+        <p:spPr>
+          <a:xfrm>
+            <a:off x="10607040" y="3877055"/>
+            <a:ext cx="1097280" cy="182880"/>
+          </a:xfrm>
+          <a:prstGeom prst="rect">
+            <a:avLst/>
+          </a:prstGeom>
+          <a:noFill/>
+        </p:spPr>
+        <p:txBody>
+          <a:bodyPr wrap="none" lIns="0" rIns="0" tIns="0" bIns="0">
+            <a:spAutoFit/>
+          </a:bodyPr>
+          <a:lstStyle/>
+          <a:p>
+            <a:pPr algn="l"/>
+            <a:r>
+              <a:rPr sz="950" b="1">
+                <a:solidFill>
+                  <a:srgbClr val="1F4E79"/>
+                </a:solidFill>
+                <a:latin typeface="Menlo"/>
+              </a:rPr>
+              <a:t>850 ms</a:t>
+            </a:r>
+          </a:p>
+        </p:txBody>
+      </p:sp>
+      <p:sp>
+        <p:nvSpPr>
+          <p:cNvPr id="50" name="TextBox 49"/>
+          <p:cNvSpPr txBox="1"/>
+          <p:nvPr/>
+        </p:nvSpPr>
+        <p:spPr>
+          <a:xfrm>
+            <a:off x="6473952" y="4206240"/>
+            <a:ext cx="1691640" cy="164592"/>
+          </a:xfrm>
+          <a:prstGeom prst="rect">
+            <a:avLst/>
+          </a:prstGeom>
+          <a:noFill/>
+        </p:spPr>
+        <p:txBody>
+          <a:bodyPr wrap="none" lIns="0" rIns="0" tIns="0" bIns="0">
+            <a:spAutoFit/>
+          </a:bodyPr>
+          <a:lstStyle/>
+          <a:p>
+            <a:pPr algn="l"/>
+            <a:r>
+              <a:rPr sz="900" b="0">
+                <a:solidFill>
+                  <a:srgbClr val="1A1A1A"/>
+                </a:solidFill>
+                <a:latin typeface="Apple SD Gothic Neo"/>
+              </a:rPr>
+              <a:t>두 번째 세션부터 17회</a:t>
+            </a:r>
+          </a:p>
+        </p:txBody>
+      </p:sp>
+      <p:sp>
+        <p:nvSpPr>
+          <p:cNvPr id="51" name="Rectangle 50"/>
+          <p:cNvSpPr/>
+          <p:nvPr/>
+        </p:nvSpPr>
+        <p:spPr>
+          <a:xfrm>
+            <a:off x="8257031" y="4178808"/>
+            <a:ext cx="2240280" cy="182880"/>
+          </a:xfrm>
+          <a:prstGeom prst="rect">
+            <a:avLst/>
+          </a:prstGeom>
+          <a:solidFill>
+            <a:srgbClr val="ECECEC"/>
+          </a:solidFill>
+          <a:ln>
+            <a:noFill/>
+          </a:ln>
+          <a:effectLst/>
+        </p:spPr>
+        <p:style>
+          <a:lnRef idx="1">
+            <a:schemeClr val="accent1"/>
+          </a:lnRef>
+          <a:fillRef idx="3">
+            <a:schemeClr val="accent1"/>
+          </a:fillRef>
+          <a:effectRef idx="2">
+            <a:schemeClr val="accent1"/>
+          </a:effectRef>
+          <a:fontRef idx="minor">
+            <a:schemeClr val="lt1"/>
+          </a:fontRef>
+        </p:style>
+        <p:txBody>
+          <a:bodyPr rtlCol="0" anchor="ctr"/>
+          <a:lstStyle/>
+          <a:p>
+            <a:pPr algn="ctr"/>
+          </a:p>
+        </p:txBody>
+      </p:sp>
+      <p:sp>
+        <p:nvSpPr>
+          <p:cNvPr id="52" name="Rectangle 51"/>
+          <p:cNvSpPr/>
+          <p:nvPr/>
+        </p:nvSpPr>
+        <p:spPr>
+          <a:xfrm>
+            <a:off x="8257031" y="4178808"/>
+            <a:ext cx="116992" cy="182880"/>
+          </a:xfrm>
+          <a:prstGeom prst="rect">
+            <a:avLst/>
+          </a:prstGeom>
+          <a:solidFill>
+            <a:srgbClr val="1F7A6A"/>
+          </a:solidFill>
+          <a:ln>
+            <a:noFill/>
+          </a:ln>
+          <a:effectLst/>
+        </p:spPr>
+        <p:style>
+          <a:lnRef idx="1">
+            <a:schemeClr val="accent1"/>
+          </a:lnRef>
+          <a:fillRef idx="3">
+            <a:schemeClr val="accent1"/>
+          </a:fillRef>
+          <a:effectRef idx="2">
+            <a:schemeClr val="accent1"/>
+          </a:effectRef>
+          <a:fontRef idx="minor">
+            <a:schemeClr val="lt1"/>
+          </a:fontRef>
+        </p:style>
+        <p:txBody>
+          <a:bodyPr rtlCol="0" anchor="ctr"/>
+          <a:lstStyle/>
+          <a:p>
+            <a:pPr algn="ctr"/>
+          </a:p>
+        </p:txBody>
+      </p:sp>
+      <p:sp>
+        <p:nvSpPr>
+          <p:cNvPr id="53" name="TextBox 52"/>
+          <p:cNvSpPr txBox="1"/>
+          <p:nvPr/>
+        </p:nvSpPr>
+        <p:spPr>
+          <a:xfrm>
+            <a:off x="10607040" y="4197096"/>
+            <a:ext cx="1097280" cy="182880"/>
+          </a:xfrm>
+          <a:prstGeom prst="rect">
+            <a:avLst/>
+          </a:prstGeom>
+          <a:noFill/>
+        </p:spPr>
+        <p:txBody>
+          <a:bodyPr wrap="none" lIns="0" rIns="0" tIns="0" bIns="0">
+            <a:spAutoFit/>
+          </a:bodyPr>
+          <a:lstStyle/>
+          <a:p>
+            <a:pPr algn="l"/>
+            <a:r>
+              <a:rPr sz="950" b="1">
+                <a:solidFill>
+                  <a:srgbClr val="1F4E79"/>
+                </a:solidFill>
+                <a:latin typeface="Menlo"/>
+              </a:rPr>
+              <a:t>47 ms</a:t>
+            </a:r>
+          </a:p>
+        </p:txBody>
+      </p:sp>
+      <p:sp>
+        <p:nvSpPr>
+          <p:cNvPr id="54" name="TextBox 53"/>
+          <p:cNvSpPr txBox="1"/>
+          <p:nvPr/>
+        </p:nvSpPr>
+        <p:spPr>
+          <a:xfrm>
+            <a:off x="6473952" y="4553712"/>
+            <a:ext cx="5212080" cy="182880"/>
+          </a:xfrm>
+          <a:prstGeom prst="rect">
+            <a:avLst/>
+          </a:prstGeom>
+          <a:noFill/>
+        </p:spPr>
+        <p:txBody>
+          <a:bodyPr wrap="none" lIns="0" rIns="0" tIns="0" bIns="0">
+            <a:spAutoFit/>
+          </a:bodyPr>
+          <a:lstStyle/>
+          <a:p>
+            <a:pPr algn="l"/>
+            <a:r>
+              <a:rPr sz="850" b="0">
+                <a:solidFill>
+                  <a:srgbClr val="888888"/>
+                </a:solidFill>
+                <a:latin typeface="Apple SD Gothic Neo"/>
+              </a:rPr>
+              <a:t>850ms의 78%는 색인 생성 11회(667ms), 19%는 컬렉션 생성 2회(165ms)다</a:t>
+            </a:r>
+          </a:p>
+        </p:txBody>
+      </p:sp>
+      <p:sp>
+        <p:nvSpPr>
+          <p:cNvPr id="55" name="Rounded Rectangle 54"/>
+          <p:cNvSpPr/>
+          <p:nvPr/>
+        </p:nvSpPr>
+        <p:spPr>
+          <a:xfrm>
+            <a:off x="411480" y="4983480"/>
+            <a:ext cx="11365992" cy="1417320"/>
+          </a:xfrm>
+          <a:prstGeom prst="roundRect">
+            <a:avLst>
+              <a:gd name="adj" fmla="val 6000"/>
+            </a:avLst>
+          </a:prstGeom>
+          <a:solidFill>
+            <a:srgbClr val="FAFAFA"/>
+          </a:solidFill>
+          <a:ln w="13970">
+            <a:solidFill>
+              <a:srgbClr val="999999"/>
+            </a:solidFill>
+          </a:ln>
+          <a:effectLst/>
+        </p:spPr>
+        <p:style>
+          <a:lnRef idx="1">
+            <a:schemeClr val="accent1"/>
+          </a:lnRef>
+          <a:fillRef idx="3">
+            <a:schemeClr val="accent1"/>
+          </a:fillRef>
+          <a:effectRef idx="2">
+            <a:schemeClr val="accent1"/>
+          </a:effectRef>
+          <a:fontRef idx="minor">
+            <a:schemeClr val="lt1"/>
+          </a:fontRef>
+        </p:style>
+        <p:txBody>
+          <a:bodyPr rtlCol="0" anchor="ctr"/>
+          <a:lstStyle/>
+          <a:p>
+            <a:pPr algn="ctr"/>
+          </a:p>
+        </p:txBody>
+      </p:sp>
+      <p:sp>
+        <p:nvSpPr>
+          <p:cNvPr id="56" name="TextBox 55"/>
+          <p:cNvSpPr txBox="1"/>
+          <p:nvPr/>
+        </p:nvSpPr>
+        <p:spPr>
+          <a:xfrm>
+            <a:off x="685800" y="5102352"/>
+            <a:ext cx="2743200" cy="274320"/>
+          </a:xfrm>
+          <a:prstGeom prst="rect">
+            <a:avLst/>
+          </a:prstGeom>
+          <a:noFill/>
+        </p:spPr>
+        <p:txBody>
+          <a:bodyPr wrap="none" lIns="0" rIns="0" tIns="0" bIns="0">
+            <a:spAutoFit/>
+          </a:bodyPr>
+          <a:lstStyle/>
+          <a:p>
+            <a:pPr algn="l"/>
+            <a:r>
+              <a:rPr sz="1300" b="1">
+                <a:solidFill>
+                  <a:srgbClr val="1A1A1A"/>
+                </a:solidFill>
+                <a:latin typeface="Apple SD Gothic Neo"/>
+              </a:rPr>
+              <a:t>결론</a:t>
+            </a:r>
+          </a:p>
+        </p:txBody>
+      </p:sp>
+      <p:sp>
+        <p:nvSpPr>
+          <p:cNvPr id="57" name="TextBox 56"/>
+          <p:cNvSpPr txBox="1"/>
+          <p:nvPr/>
+        </p:nvSpPr>
+        <p:spPr>
+          <a:xfrm>
+            <a:off x="685800" y="5431536"/>
+            <a:ext cx="10817352" cy="219456"/>
+          </a:xfrm>
+          <a:prstGeom prst="rect">
+            <a:avLst/>
+          </a:prstGeom>
+          <a:noFill/>
+        </p:spPr>
+        <p:txBody>
+          <a:bodyPr wrap="none" lIns="0" rIns="0" tIns="0" bIns="0">
+            <a:spAutoFit/>
+          </a:bodyPr>
+          <a:lstStyle/>
+          <a:p>
+            <a:pPr algn="l"/>
+            <a:r>
+              <a:rPr sz="1000" b="1">
+                <a:solidFill>
+                  <a:srgbClr val="1A1A1A"/>
+                </a:solidFill>
+                <a:latin typeface="Apple SD Gothic Neo"/>
+              </a:rPr>
+              <a:t>평상시 Qdrant 부담은 요청당 2~3ms다.</a:t>
+            </a:r>
+            <a:r>
+              <a:rPr sz="1000" b="0">
+                <a:solidFill>
+                  <a:srgbClr val="1A1A1A"/>
+                </a:solidFill>
+                <a:latin typeface="Apple SD Gothic Neo"/>
+              </a:rPr>
+              <a:t> 저장도 검색도 요청 1회로 고정이고, 옵션을 바꿔도 늘지 않는다.</a:t>
+            </a:r>
+          </a:p>
+        </p:txBody>
+      </p:sp>
+      <p:sp>
+        <p:nvSpPr>
+          <p:cNvPr id="58" name="TextBox 57"/>
+          <p:cNvSpPr txBox="1"/>
+          <p:nvPr/>
+        </p:nvSpPr>
+        <p:spPr>
+          <a:xfrm>
+            <a:off x="685800" y="5669280"/>
+            <a:ext cx="10817352" cy="219456"/>
+          </a:xfrm>
+          <a:prstGeom prst="rect">
+            <a:avLst/>
+          </a:prstGeom>
+          <a:noFill/>
+        </p:spPr>
+        <p:txBody>
+          <a:bodyPr wrap="none" lIns="0" rIns="0" tIns="0" bIns="0">
+            <a:spAutoFit/>
+          </a:bodyPr>
+          <a:lstStyle/>
+          <a:p>
+            <a:pPr algn="l"/>
+            <a:r>
+              <a:rPr sz="1000" b="1">
+                <a:solidFill>
+                  <a:srgbClr val="1A1A1A"/>
+                </a:solidFill>
+                <a:latin typeface="Apple SD Gothic Neo"/>
+              </a:rPr>
+              <a:t>17회라는 숫자는 크지만 시간은 두 번째 세션부터 47ms다.</a:t>
+            </a:r>
+            <a:r>
+              <a:rPr sz="1000" b="0">
+                <a:solidFill>
+                  <a:srgbClr val="1A1A1A"/>
+                </a:solidFill>
+                <a:latin typeface="Apple SD Gothic Neo"/>
+              </a:rPr>
+              <a:t> 850ms는 컬렉션과 색인을 실제로 만드는 첫 한 번뿐이다.</a:t>
+            </a:r>
+          </a:p>
+        </p:txBody>
+      </p:sp>
+      <p:sp>
+        <p:nvSpPr>
+          <p:cNvPr id="59" name="TextBox 58"/>
+          <p:cNvSpPr txBox="1"/>
+          <p:nvPr/>
+        </p:nvSpPr>
+        <p:spPr>
+          <a:xfrm>
+            <a:off x="685800" y="5907024"/>
+            <a:ext cx="10817352" cy="219456"/>
+          </a:xfrm>
+          <a:prstGeom prst="rect">
+            <a:avLst/>
+          </a:prstGeom>
+          <a:noFill/>
+        </p:spPr>
+        <p:txBody>
+          <a:bodyPr wrap="none" lIns="0" rIns="0" tIns="0" bIns="0">
+            <a:spAutoFit/>
+          </a:bodyPr>
+          <a:lstStyle/>
+          <a:p>
+            <a:pPr algn="l"/>
+            <a:r>
+              <a:rPr sz="1000" b="1">
+                <a:solidFill>
+                  <a:srgbClr val="1A1A1A"/>
+                </a:solidFill>
+                <a:latin typeface="Apple SD Gothic Neo"/>
+              </a:rPr>
+              <a:t>그래서 세션이 늘 때 걱정할 곳은 등록 시간이 아니라</a:t>
+            </a:r>
+            <a:r>
+              <a:rPr sz="1000" b="0">
+                <a:solidFill>
+                  <a:srgbClr val="1A1A1A"/>
+                </a:solidFill>
+                <a:latin typeface="Apple SD Gothic Neo"/>
+              </a:rPr>
+              <a:t> 캐시 100칸을 넘겨 재준비가 상시화되는 쪽이다.</a:t>
+            </a:r>
+          </a:p>
+        </p:txBody>
+      </p:sp>
+      <p:sp>
+        <p:nvSpPr>
+          <p:cNvPr id="60" name="TextBox 59"/>
+          <p:cNvSpPr txBox="1"/>
+          <p:nvPr/>
+        </p:nvSpPr>
+        <p:spPr>
+          <a:xfrm>
+            <a:off x="685800" y="6144768"/>
+            <a:ext cx="10817352" cy="219456"/>
+          </a:xfrm>
+          <a:prstGeom prst="rect">
+            <a:avLst/>
+          </a:prstGeom>
+          <a:noFill/>
+        </p:spPr>
+        <p:txBody>
+          <a:bodyPr wrap="none" lIns="0" rIns="0" tIns="0" bIns="0">
+            <a:spAutoFit/>
+          </a:bodyPr>
+          <a:lstStyle/>
+          <a:p>
+            <a:pPr algn="l"/>
+            <a:r>
+              <a:rPr sz="1000" b="1">
+                <a:solidFill>
+                  <a:srgbClr val="1A1A1A"/>
+                </a:solidFill>
+                <a:latin typeface="Apple SD Gothic Neo"/>
+              </a:rPr>
+              <a:t>다만 이 값은 같은 장비 기준이다.</a:t>
+            </a:r>
+            <a:r>
+              <a:rPr sz="1000" b="0">
+                <a:solidFill>
+                  <a:srgbClr val="1A1A1A"/>
+                </a:solidFill>
+                <a:latin typeface="Apple SD Gothic Neo"/>
+              </a:rPr>
+              <a:t> Qdrant를 다른 노드에 두면 요청마다 네트워크 왕복이 그대로 더해진다.</a:t>
+            </a:r>
+          </a:p>
+        </p:txBody>
+      </p:sp>
+      <p:sp>
+        <p:nvSpPr>
+          <p:cNvPr id="61" name="TextBox 60"/>
+          <p:cNvSpPr txBox="1"/>
+          <p:nvPr/>
+        </p:nvSpPr>
+        <p:spPr>
+          <a:xfrm>
+            <a:off x="384048" y="6492240"/>
+            <a:ext cx="11430000" cy="219456"/>
+          </a:xfrm>
+          <a:prstGeom prst="rect">
+            <a:avLst/>
+          </a:prstGeom>
+          <a:noFill/>
+        </p:spPr>
+        <p:txBody>
+          <a:bodyPr wrap="square" lIns="0" rIns="0" tIns="0" bIns="0">
+            <a:spAutoFit/>
+          </a:bodyPr>
+          <a:lstStyle/>
+          <a:p>
+            <a:pPr algn="l"/>
+            <a:r>
+              <a:rPr sz="950" b="0">
+                <a:solidFill>
+                  <a:srgbClr val="888888"/>
+                </a:solidFill>
+                <a:latin typeface="Apple SD Gothic Neo"/>
+              </a:rPr>
+              <a:t>근거: 측정 기록 2부(S1~S13) · qdrant_request_trace.json · 보고서 6부. 기준 커밋 a8322a7, qdrant 1.17.0 + postgres 16.</a:t>
             </a:r>
           </a:p>
         </p:txBody>

--- a/docs/msr/memmachine_qdrant_requests.pptx
+++ b/docs/msr/memmachine_qdrant_requests.pptx
@@ -5633,7 +5633,7 @@
                 </a:solidFill>
                 <a:latin typeface="Apple SD Gothic Neo"/>
               </a:rPr>
-              <a:t>사용자 한 명에게 계좌 하나. 저장소 안에서 칸이 나뉜다</a:t>
+              <a:t>사용자 한 명에게 계좌 하나. 공간이 쪼개지는 게 아니라 표시로 갈린다</a:t>
             </a:r>
           </a:p>
         </p:txBody>
@@ -5924,7 +5924,7 @@
                 </a:solidFill>
                 <a:latin typeface="Apple SD Gothic Neo"/>
               </a:rPr>
-              <a:t>동시 활동 사용자가 100명을 넘으면 재준비가 반복된다</a:t>
+              <a:t>동시 활동 사용자가 100명을 넘고 일부가 쉬면 재준비가 반복된다</a:t>
             </a:r>
           </a:p>
         </p:txBody>
@@ -5959,7 +5959,7 @@
                 </a:solidFill>
                 <a:latin typeface="Apple SD Gothic Neo"/>
               </a:rPr>
-              <a:t>데이터베이스에도 사용자 수만큼 칸이 생긴다</a:t>
+              <a:t>데이터베이스에도 사용자 수만큼 구획이 생긴다. 테이블이 늘지는 않는다</a:t>
             </a:r>
           </a:p>
         </p:txBody>
@@ -6819,7 +6819,7 @@
                 </a:solidFill>
                 <a:latin typeface="Apple SD Gothic Neo"/>
               </a:rPr>
-              <a:t>100명 넘으면 재준비 반복</a:t>
+              <a:t>일부가 쉴 때 재준비 반복</a:t>
             </a:r>
           </a:p>
         </p:txBody>
@@ -14042,7 +14042,7 @@
                 </a:solidFill>
                 <a:latin typeface="Apple SD Gothic Neo"/>
               </a:rPr>
-              <a:t>worker 재시작 · 10분 넘게 쉰 세션 · worker당 활성 세션 100개 초과</a:t>
+              <a:t>worker 재시작 · 10분 넘게 쉰 세션 · 100칸이 찼고 유휴 인스턴스가 있을 때</a:t>
             </a:r>
           </a:p>
         </p:txBody>
@@ -14911,7 +14911,7 @@
                 </a:solidFill>
                 <a:latin typeface="Apple SD Gothic Neo"/>
               </a:rPr>
-              <a:t>worker당 활성 세션 100개 초과</a:t>
+              <a:t>worker당 동시 처리 세션 100개 초과</a:t>
             </a:r>
           </a:p>
         </p:txBody>
@@ -14946,7 +14946,7 @@
                 </a:solidFill>
                 <a:latin typeface="Menlo"/>
               </a:rPr>
-              <a:t>모두 2배</a:t>
+              <a:t>그대로</a:t>
             </a:r>
           </a:p>
         </p:txBody>
@@ -14981,7 +14981,7 @@
                 </a:solidFill>
                 <a:latin typeface="Apple SD Gothic Neo"/>
               </a:rPr>
-              <a:t>캐시 용량 초과</a:t>
+              <a:t>축출 대상이 없어 칸만 는다</a:t>
             </a:r>
           </a:p>
         </p:txBody>
@@ -15062,7 +15062,7 @@
                 </a:solidFill>
                 <a:latin typeface="Apple SD Gothic Neo"/>
               </a:rPr>
-              <a:t>10분 유휴 뒤 첫 요청</a:t>
+              <a:t>활성 세션 100개 초과 · 일부는 유휴</a:t>
             </a:r>
           </a:p>
         </p:txBody>
@@ -15097,7 +15097,7 @@
                 </a:solidFill>
                 <a:latin typeface="Menlo"/>
               </a:rPr>
-              <a:t>세션당 +1</a:t>
+              <a:t>일부 2배</a:t>
             </a:r>
           </a:p>
         </p:txBody>
@@ -15132,6 +15132,157 @@
                 </a:solidFill>
                 <a:latin typeface="Apple SD Gothic Neo"/>
               </a:rPr>
+              <a:t>유휴 인스턴스가 밀려남</a:t>
+            </a:r>
+          </a:p>
+        </p:txBody>
+      </p:sp>
+      <p:sp>
+        <p:nvSpPr>
+          <p:cNvPr id="59" name="Rectangle 58"/>
+          <p:cNvSpPr/>
+          <p:nvPr/>
+        </p:nvSpPr>
+        <p:spPr>
+          <a:xfrm>
+            <a:off x="6199632" y="2999231"/>
+            <a:ext cx="5577840" cy="274320"/>
+          </a:xfrm>
+          <a:prstGeom prst="rect">
+            <a:avLst/>
+          </a:prstGeom>
+          <a:solidFill>
+            <a:srgbClr val="DBE6F6"/>
+          </a:solidFill>
+          <a:ln w="12700">
+            <a:solidFill>
+              <a:srgbClr val="FFFFFF"/>
+            </a:solidFill>
+          </a:ln>
+          <a:effectLst/>
+        </p:spPr>
+        <p:style>
+          <a:lnRef idx="1">
+            <a:schemeClr val="accent1"/>
+          </a:lnRef>
+          <a:fillRef idx="3">
+            <a:schemeClr val="accent1"/>
+          </a:fillRef>
+          <a:effectRef idx="2">
+            <a:schemeClr val="accent1"/>
+          </a:effectRef>
+          <a:fontRef idx="minor">
+            <a:schemeClr val="lt1"/>
+          </a:fontRef>
+        </p:style>
+        <p:txBody>
+          <a:bodyPr rtlCol="0" anchor="ctr"/>
+          <a:lstStyle/>
+          <a:p>
+            <a:pPr algn="ctr"/>
+          </a:p>
+        </p:txBody>
+      </p:sp>
+      <p:sp>
+        <p:nvSpPr>
+          <p:cNvPr id="60" name="TextBox 59"/>
+          <p:cNvSpPr txBox="1"/>
+          <p:nvPr/>
+        </p:nvSpPr>
+        <p:spPr>
+          <a:xfrm>
+            <a:off x="6263640" y="3044951"/>
+            <a:ext cx="2523744" cy="182880"/>
+          </a:xfrm>
+          <a:prstGeom prst="rect">
+            <a:avLst/>
+          </a:prstGeom>
+          <a:noFill/>
+        </p:spPr>
+        <p:txBody>
+          <a:bodyPr wrap="none" lIns="0" rIns="0" tIns="0" bIns="0">
+            <a:spAutoFit/>
+          </a:bodyPr>
+          <a:lstStyle/>
+          <a:p>
+            <a:pPr algn="l"/>
+            <a:r>
+              <a:rPr sz="850" b="0">
+                <a:solidFill>
+                  <a:srgbClr val="1A1A1A"/>
+                </a:solidFill>
+                <a:latin typeface="Apple SD Gothic Neo"/>
+              </a:rPr>
+              <a:t>10분 유휴 뒤 첫 요청</a:t>
+            </a:r>
+          </a:p>
+        </p:txBody>
+      </p:sp>
+      <p:sp>
+        <p:nvSpPr>
+          <p:cNvPr id="61" name="TextBox 60"/>
+          <p:cNvSpPr txBox="1"/>
+          <p:nvPr/>
+        </p:nvSpPr>
+        <p:spPr>
+          <a:xfrm>
+            <a:off x="8915400" y="3044951"/>
+            <a:ext cx="1060704" cy="182880"/>
+          </a:xfrm>
+          <a:prstGeom prst="rect">
+            <a:avLst/>
+          </a:prstGeom>
+          <a:noFill/>
+        </p:spPr>
+        <p:txBody>
+          <a:bodyPr wrap="none" lIns="0" rIns="0" tIns="0" bIns="0">
+            <a:spAutoFit/>
+          </a:bodyPr>
+          <a:lstStyle/>
+          <a:p>
+            <a:pPr algn="ctr"/>
+            <a:r>
+              <a:rPr sz="1050" b="1">
+                <a:solidFill>
+                  <a:srgbClr val="1F4E79"/>
+                </a:solidFill>
+                <a:latin typeface="Menlo"/>
+              </a:rPr>
+              <a:t>세션당 +1</a:t>
+            </a:r>
+          </a:p>
+        </p:txBody>
+      </p:sp>
+      <p:sp>
+        <p:nvSpPr>
+          <p:cNvPr id="62" name="TextBox 61"/>
+          <p:cNvSpPr txBox="1"/>
+          <p:nvPr/>
+        </p:nvSpPr>
+        <p:spPr>
+          <a:xfrm>
+            <a:off x="10104120" y="3044951"/>
+            <a:ext cx="1609343" cy="182880"/>
+          </a:xfrm>
+          <a:prstGeom prst="rect">
+            <a:avLst/>
+          </a:prstGeom>
+          <a:noFill/>
+        </p:spPr>
+        <p:txBody>
+          <a:bodyPr wrap="none" lIns="0" rIns="0" tIns="0" bIns="0">
+            <a:spAutoFit/>
+          </a:bodyPr>
+          <a:lstStyle/>
+          <a:p>
+            <a:pPr algn="l"/>
+            <a:r>
+              <a:rPr sz="850" b="0">
+                <a:solidFill>
+                  <a:srgbClr val="1A1A1A"/>
+                </a:solidFill>
+                <a:latin typeface="Apple SD Gothic Neo"/>
+              </a:rPr>
               <a:t>유휴 600초 제거</a:t>
             </a:r>
           </a:p>
@@ -15139,7 +15290,7 @@
       </p:sp>
       <p:sp>
         <p:nvSpPr>
-          <p:cNvPr id="59" name="Rounded Rectangle 58"/>
+          <p:cNvPr id="63" name="Rounded Rectangle 62"/>
           <p:cNvSpPr/>
           <p:nvPr/>
         </p:nvSpPr>
@@ -15187,7 +15338,7 @@
       </p:sp>
       <p:sp>
         <p:nvSpPr>
-          <p:cNvPr id="60" name="TextBox 59"/>
+          <p:cNvPr id="64" name="TextBox 63"/>
           <p:cNvSpPr txBox="1"/>
           <p:nvPr/>
         </p:nvSpPr>
@@ -15222,7 +15373,7 @@
       </p:sp>
       <p:sp>
         <p:nvSpPr>
-          <p:cNvPr id="61" name="TextBox 60"/>
+          <p:cNvPr id="65" name="TextBox 64"/>
           <p:cNvSpPr txBox="1"/>
           <p:nvPr/>
         </p:nvSpPr>
@@ -15257,7 +15408,7 @@
       </p:sp>
       <p:sp>
         <p:nvSpPr>
-          <p:cNvPr id="62" name="Rounded Rectangle 61"/>
+          <p:cNvPr id="66" name="Rounded Rectangle 65"/>
           <p:cNvSpPr/>
           <p:nvPr/>
         </p:nvSpPr>
@@ -15305,7 +15456,7 @@
       </p:sp>
       <p:sp>
         <p:nvSpPr>
-          <p:cNvPr id="63" name="TextBox 62"/>
+          <p:cNvPr id="67" name="TextBox 66"/>
           <p:cNvSpPr txBox="1"/>
           <p:nvPr/>
         </p:nvSpPr>
@@ -15340,7 +15491,7 @@
       </p:sp>
       <p:sp>
         <p:nvSpPr>
-          <p:cNvPr id="64" name="TextBox 63"/>
+          <p:cNvPr id="68" name="TextBox 67"/>
           <p:cNvSpPr txBox="1"/>
           <p:nvPr/>
         </p:nvSpPr>
@@ -15384,7 +15535,7 @@
       </p:sp>
       <p:sp>
         <p:nvSpPr>
-          <p:cNvPr id="65" name="TextBox 64"/>
+          <p:cNvPr id="69" name="TextBox 68"/>
           <p:cNvSpPr txBox="1"/>
           <p:nvPr/>
         </p:nvSpPr>
@@ -15428,7 +15579,7 @@
       </p:sp>
       <p:sp>
         <p:nvSpPr>
-          <p:cNvPr id="66" name="TextBox 65"/>
+          <p:cNvPr id="70" name="TextBox 69"/>
           <p:cNvSpPr txBox="1"/>
           <p:nvPr/>
         </p:nvSpPr>
@@ -15456,7 +15607,7 @@
                 </a:solidFill>
                 <a:latin typeface="Apple SD Gothic Neo"/>
               </a:rPr>
-              <a:t>활성 세션이 worker당 100개를 넘으면</a:t>
+              <a:t>100칸을 넘길 때 무엇이 늘어나는지는 유휴 세션 유무로 갈린다.</a:t>
             </a:r>
             <a:r>
               <a:rPr sz="1050" b="0">
@@ -15465,14 +15616,14 @@
                 </a:solidFill>
                 <a:latin typeface="Apple SD Gothic Neo"/>
               </a:rPr>
-              <a:t> 모든 요청이 재준비가 되어 질의가 계속 2배로 유지된다.</a:t>
-            </a:r>
-          </a:p>
-        </p:txBody>
-      </p:sp>
-      <p:sp>
-        <p:nvSpPr>
-          <p:cNvPr id="67" name="TextBox 66"/>
+              <a:t> 전부 쓰는 중이면 캐시가 그냥 커지고, 유휴 세션이 섞였을 때만 밀려나 재준비가 반복된다.</a:t>
+            </a:r>
+          </a:p>
+        </p:txBody>
+      </p:sp>
+      <p:sp>
+        <p:nvSpPr>
+          <p:cNvPr id="71" name="TextBox 70"/>
           <p:cNvSpPr txBox="1"/>
           <p:nvPr/>
         </p:nvSpPr>
@@ -15516,7 +15667,7 @@
       </p:sp>
       <p:sp>
         <p:nvSpPr>
-          <p:cNvPr id="68" name="TextBox 67"/>
+          <p:cNvPr id="72" name="TextBox 71"/>
           <p:cNvSpPr txBox="1"/>
           <p:nvPr/>
         </p:nvSpPr>
@@ -17085,7 +17236,7 @@
                 </a:solidFill>
                 <a:latin typeface="Apple SD Gothic Neo"/>
               </a:rPr>
-              <a:t>ef 기본 100, 실제 폭은 max(ef, limit) — top_k 25 초과부터 커진다</a:t>
+              <a:t>한 번에 훑는 후보는 기본 100개다. top_k 25(=limit 100)를 넘으면 넓어진다</a:t>
             </a:r>
           </a:p>
         </p:txBody>
@@ -19547,7 +19698,7 @@
         <p:spPr>
           <a:xfrm>
             <a:off x="7086600" y="3108960"/>
-            <a:ext cx="4690872" cy="1051560"/>
+            <a:ext cx="4690872" cy="1243584"/>
           </a:xfrm>
           <a:prstGeom prst="roundRect">
             <a:avLst>
@@ -19651,7 +19802,7 @@
                 </a:solidFill>
                 <a:latin typeface="Menlo"/>
               </a:rPr>
-              <a:t>검색 = 임베딩 1 + 저장소 1 + PostgreSQL 3</a:t>
+              <a:t>검색 = 임베딩 1 · 저장소 1 · PostgreSQL 다수</a:t>
             </a:r>
           </a:p>
         </p:txBody>
@@ -19728,7 +19879,42 @@
       </p:sp>
       <p:sp>
         <p:nvSpPr>
-          <p:cNvPr id="63" name="Rectangle 62"/>
+          <p:cNvPr id="63" name="TextBox 62"/>
+          <p:cNvSpPr txBox="1"/>
+          <p:nvPr/>
+        </p:nvSpPr>
+        <p:spPr>
+          <a:xfrm>
+            <a:off x="7223760" y="4142232"/>
+            <a:ext cx="4434840" cy="164592"/>
+          </a:xfrm>
+          <a:prstGeom prst="rect">
+            <a:avLst/>
+          </a:prstGeom>
+          <a:noFill/>
+        </p:spPr>
+        <p:txBody>
+          <a:bodyPr wrap="none" lIns="0" rIns="0" tIns="0" bIns="0">
+            <a:spAutoFit/>
+          </a:bodyPr>
+          <a:lstStyle/>
+          <a:p>
+            <a:pPr algn="l"/>
+            <a:r>
+              <a:rPr sz="800" b="0">
+                <a:solidFill>
+                  <a:srgbClr val="888888"/>
+                </a:solidFill>
+                <a:latin typeface="Apple SD Gothic Neo"/>
+              </a:rPr>
+              <a:t>PostgreSQL 호출 수는 이번 회차에서 세지 않았다 (보고서 0부)</a:t>
+            </a:r>
+          </a:p>
+        </p:txBody>
+      </p:sp>
+      <p:sp>
+        <p:nvSpPr>
+          <p:cNvPr id="64" name="Rectangle 63"/>
           <p:cNvSpPr/>
           <p:nvPr/>
         </p:nvSpPr>
@@ -19774,7 +19960,7 @@
       </p:sp>
       <p:sp>
         <p:nvSpPr>
-          <p:cNvPr id="64" name="TextBox 63"/>
+          <p:cNvPr id="65" name="TextBox 64"/>
           <p:cNvSpPr txBox="1"/>
           <p:nvPr/>
         </p:nvSpPr>
@@ -19809,7 +19995,7 @@
       </p:sp>
       <p:sp>
         <p:nvSpPr>
-          <p:cNvPr id="65" name="TextBox 64"/>
+          <p:cNvPr id="66" name="TextBox 65"/>
           <p:cNvSpPr txBox="1"/>
           <p:nvPr/>
         </p:nvSpPr>
@@ -19844,14 +20030,14 @@
       </p:sp>
       <p:sp>
         <p:nvSpPr>
-          <p:cNvPr id="66" name="Rounded Rectangle 65"/>
+          <p:cNvPr id="67" name="Rounded Rectangle 66"/>
           <p:cNvSpPr/>
           <p:nvPr/>
         </p:nvSpPr>
         <p:spPr>
           <a:xfrm>
-            <a:off x="411480" y="5120640"/>
-            <a:ext cx="11365992" cy="1234440"/>
+            <a:off x="411480" y="5074920"/>
+            <a:ext cx="11365992" cy="1325880"/>
           </a:xfrm>
           <a:prstGeom prst="roundRect">
             <a:avLst>
@@ -19892,13 +20078,13 @@
       </p:sp>
       <p:sp>
         <p:nvSpPr>
-          <p:cNvPr id="67" name="TextBox 66"/>
-          <p:cNvSpPr txBox="1"/>
-          <p:nvPr/>
-        </p:nvSpPr>
-        <p:spPr>
-          <a:xfrm>
-            <a:off x="685800" y="5239512"/>
+          <p:cNvPr id="68" name="TextBox 67"/>
+          <p:cNvSpPr txBox="1"/>
+          <p:nvPr/>
+        </p:nvSpPr>
+        <p:spPr>
+          <a:xfrm>
+            <a:off x="685800" y="5193792"/>
             <a:ext cx="2743200" cy="274320"/>
           </a:xfrm>
           <a:prstGeom prst="rect">
@@ -19927,13 +20113,13 @@
       </p:sp>
       <p:sp>
         <p:nvSpPr>
-          <p:cNvPr id="68" name="TextBox 67"/>
-          <p:cNvSpPr txBox="1"/>
-          <p:nvPr/>
-        </p:nvSpPr>
-        <p:spPr>
-          <a:xfrm>
-            <a:off x="685800" y="5568696"/>
+          <p:cNvPr id="69" name="TextBox 68"/>
+          <p:cNvSpPr txBox="1"/>
+          <p:nvPr/>
+        </p:nvSpPr>
+        <p:spPr>
+          <a:xfrm>
+            <a:off x="685800" y="5522976"/>
             <a:ext cx="10817352" cy="219456"/>
           </a:xfrm>
           <a:prstGeom prst="rect">
@@ -19971,13 +20157,13 @@
       </p:sp>
       <p:sp>
         <p:nvSpPr>
-          <p:cNvPr id="69" name="TextBox 68"/>
-          <p:cNvSpPr txBox="1"/>
-          <p:nvPr/>
-        </p:nvSpPr>
-        <p:spPr>
-          <a:xfrm>
-            <a:off x="685800" y="5797296"/>
+          <p:cNvPr id="70" name="TextBox 69"/>
+          <p:cNvSpPr txBox="1"/>
+          <p:nvPr/>
+        </p:nvSpPr>
+        <p:spPr>
+          <a:xfrm>
+            <a:off x="685800" y="5751576"/>
             <a:ext cx="10817352" cy="219456"/>
           </a:xfrm>
           <a:prstGeom prst="rect">
@@ -20015,13 +20201,13 @@
       </p:sp>
       <p:sp>
         <p:nvSpPr>
-          <p:cNvPr id="70" name="TextBox 69"/>
-          <p:cNvSpPr txBox="1"/>
-          <p:nvPr/>
-        </p:nvSpPr>
-        <p:spPr>
-          <a:xfrm>
-            <a:off x="685800" y="6025896"/>
+          <p:cNvPr id="71" name="TextBox 70"/>
+          <p:cNvSpPr txBox="1"/>
+          <p:nvPr/>
+        </p:nvSpPr>
+        <p:spPr>
+          <a:xfrm>
+            <a:off x="685800" y="5980176"/>
             <a:ext cx="10817352" cy="219456"/>
           </a:xfrm>
           <a:prstGeom prst="rect">
@@ -20059,13 +20245,13 @@
       </p:sp>
       <p:sp>
         <p:nvSpPr>
-          <p:cNvPr id="71" name="TextBox 70"/>
-          <p:cNvSpPr txBox="1"/>
-          <p:nvPr/>
-        </p:nvSpPr>
-        <p:spPr>
-          <a:xfrm>
-            <a:off x="685800" y="6254496"/>
+          <p:cNvPr id="72" name="TextBox 71"/>
+          <p:cNvSpPr txBox="1"/>
+          <p:nvPr/>
+        </p:nvSpPr>
+        <p:spPr>
+          <a:xfrm>
+            <a:off x="685800" y="6208776"/>
             <a:ext cx="10817352" cy="219456"/>
           </a:xfrm>
           <a:prstGeom prst="rect">
@@ -20103,7 +20289,7 @@
       </p:sp>
       <p:sp>
         <p:nvSpPr>
-          <p:cNvPr id="72" name="TextBox 71"/>
+          <p:cNvPr id="73" name="TextBox 72"/>
           <p:cNvSpPr txBox="1"/>
           <p:nvPr/>
         </p:nvSpPr>
@@ -20869,7 +21055,7 @@
                 </a:solidFill>
                 <a:latin typeface="Apple SD Gothic Neo"/>
               </a:rPr>
-              <a:t>derivative</a:t>
+              <a:t>파생 생성</a:t>
             </a:r>
           </a:p>
           <a:p>
@@ -20881,7 +21067,7 @@
                 </a:solidFill>
                 <a:latin typeface="Apple SD Gothic Neo"/>
               </a:rPr>
-              <a:t>생성</a:t>
+              <a:t>임베딩할 텍스트</a:t>
             </a:r>
           </a:p>
         </p:txBody>
@@ -21264,7 +21450,7 @@
                 </a:solidFill>
                 <a:latin typeface="Apple SD Gothic Neo"/>
               </a:rPr>
-              <a:t>0 · 2 · 17회</a:t>
+              <a:t>0 · 1 · 17회</a:t>
             </a:r>
           </a:p>
         </p:txBody>
@@ -22285,7 +22471,7 @@
                 </a:solidFill>
                 <a:latin typeface="Apple SD Gothic Neo"/>
               </a:rPr>
-              <a:t>0 · 2 · 17회</a:t>
+              <a:t>0 · 1 · 17회</a:t>
             </a:r>
           </a:p>
         </p:txBody>
@@ -22369,7 +22555,7 @@
         <p:spPr>
           <a:xfrm>
             <a:off x="411480" y="3858768"/>
-            <a:ext cx="6675120" cy="256032"/>
+            <a:ext cx="11365992" cy="256032"/>
           </a:xfrm>
           <a:prstGeom prst="rect">
             <a:avLst/>
@@ -22413,7 +22599,7 @@
         <p:spPr>
           <a:xfrm>
             <a:off x="475488" y="3895344"/>
-            <a:ext cx="2660903" cy="182880"/>
+            <a:ext cx="2203703" cy="182880"/>
           </a:xfrm>
           <a:prstGeom prst="rect">
             <a:avLst/>
@@ -22447,8 +22633,8 @@
         </p:nvSpPr>
         <p:spPr>
           <a:xfrm>
-            <a:off x="3264408" y="3895344"/>
-            <a:ext cx="694944" cy="182880"/>
+            <a:off x="2807208" y="3895344"/>
+            <a:ext cx="649224" cy="182880"/>
           </a:xfrm>
           <a:prstGeom prst="rect">
             <a:avLst/>
@@ -22482,8 +22668,8 @@
         </p:nvSpPr>
         <p:spPr>
           <a:xfrm>
-            <a:off x="4087368" y="3895344"/>
-            <a:ext cx="1289304" cy="182880"/>
+            <a:off x="3584448" y="3895344"/>
+            <a:ext cx="1060704" cy="182880"/>
           </a:xfrm>
           <a:prstGeom prst="rect">
             <a:avLst/>
@@ -22517,8 +22703,8 @@
         </p:nvSpPr>
         <p:spPr>
           <a:xfrm>
-            <a:off x="5504688" y="3895344"/>
-            <a:ext cx="1517904" cy="182880"/>
+            <a:off x="4773168" y="3895344"/>
+            <a:ext cx="4078224" cy="182880"/>
           </a:xfrm>
           <a:prstGeom prst="rect">
             <a:avLst/>
@@ -22539,6 +22725,41 @@
                 </a:solidFill>
                 <a:latin typeface="Apple SD Gothic Neo"/>
               </a:rPr>
+              <a:t>무슨 호출이 왜 나가는가</a:t>
+            </a:r>
+          </a:p>
+        </p:txBody>
+      </p:sp>
+      <p:sp>
+        <p:nvSpPr>
+          <p:cNvPr id="50" name="TextBox 49"/>
+          <p:cNvSpPr txBox="1"/>
+          <p:nvPr/>
+        </p:nvSpPr>
+        <p:spPr>
+          <a:xfrm>
+            <a:off x="8979408" y="3895344"/>
+            <a:ext cx="2734056" cy="182880"/>
+          </a:xfrm>
+          <a:prstGeom prst="rect">
+            <a:avLst/>
+          </a:prstGeom>
+          <a:noFill/>
+        </p:spPr>
+        <p:txBody>
+          <a:bodyPr wrap="none" lIns="0" rIns="0" tIns="0" bIns="0">
+            <a:spAutoFit/>
+          </a:bodyPr>
+          <a:lstStyle/>
+          <a:p>
+            <a:pPr algn="l"/>
+            <a:r>
+              <a:rPr sz="900" b="1">
+                <a:solidFill>
+                  <a:srgbClr val="FFFFFF"/>
+                </a:solidFill>
+                <a:latin typeface="Apple SD Gothic Neo"/>
+              </a:rPr>
               <a:t>언제 생기나</a:t>
             </a:r>
           </a:p>
@@ -22546,14 +22767,14 @@
       </p:sp>
       <p:sp>
         <p:nvSpPr>
-          <p:cNvPr id="50" name="Rectangle 49"/>
+          <p:cNvPr id="51" name="Rectangle 50"/>
           <p:cNvSpPr/>
           <p:nvPr/>
         </p:nvSpPr>
         <p:spPr>
           <a:xfrm>
             <a:off x="411480" y="4114800"/>
-            <a:ext cx="6675120" cy="274320"/>
+            <a:ext cx="11365992" cy="274320"/>
           </a:xfrm>
           <a:prstGeom prst="rect">
             <a:avLst/>
@@ -22592,14 +22813,14 @@
       </p:sp>
       <p:sp>
         <p:nvSpPr>
-          <p:cNvPr id="51" name="TextBox 50"/>
+          <p:cNvPr id="52" name="TextBox 51"/>
           <p:cNvSpPr txBox="1"/>
           <p:nvPr/>
         </p:nvSpPr>
         <p:spPr>
           <a:xfrm>
             <a:off x="475488" y="4160520"/>
-            <a:ext cx="2660903" cy="182880"/>
+            <a:ext cx="2203703" cy="182880"/>
           </a:xfrm>
           <a:prstGeom prst="rect">
             <a:avLst/>
@@ -22620,21 +22841,21 @@
                 </a:solidFill>
                 <a:latin typeface="Apple SD Gothic Neo"/>
               </a:rPr>
-              <a:t>바로 처리 — 캐시에 인스턴스 있음</a:t>
-            </a:r>
-          </a:p>
-        </p:txBody>
-      </p:sp>
-      <p:sp>
-        <p:nvSpPr>
-          <p:cNvPr id="52" name="TextBox 51"/>
-          <p:cNvSpPr txBox="1"/>
-          <p:nvPr/>
-        </p:nvSpPr>
-        <p:spPr>
-          <a:xfrm>
-            <a:off x="3264408" y="4160520"/>
-            <a:ext cx="694944" cy="182880"/>
+              <a:t>바로 처리 — 캐시에 있음</a:t>
+            </a:r>
+          </a:p>
+        </p:txBody>
+      </p:sp>
+      <p:sp>
+        <p:nvSpPr>
+          <p:cNvPr id="53" name="TextBox 52"/>
+          <p:cNvSpPr txBox="1"/>
+          <p:nvPr/>
+        </p:nvSpPr>
+        <p:spPr>
+          <a:xfrm>
+            <a:off x="2807208" y="4160520"/>
+            <a:ext cx="649224" cy="182880"/>
           </a:xfrm>
           <a:prstGeom prst="rect">
             <a:avLst/>
@@ -22662,14 +22883,14 @@
       </p:sp>
       <p:sp>
         <p:nvSpPr>
-          <p:cNvPr id="53" name="TextBox 52"/>
-          <p:cNvSpPr txBox="1"/>
-          <p:nvPr/>
-        </p:nvSpPr>
-        <p:spPr>
-          <a:xfrm>
-            <a:off x="4087368" y="4160520"/>
-            <a:ext cx="1289304" cy="182880"/>
+          <p:cNvPr id="54" name="TextBox 53"/>
+          <p:cNvSpPr txBox="1"/>
+          <p:nvPr/>
+        </p:nvSpPr>
+        <p:spPr>
+          <a:xfrm>
+            <a:off x="3584448" y="4160520"/>
+            <a:ext cx="1060704" cy="182880"/>
           </a:xfrm>
           <a:prstGeom prst="rect">
             <a:avLst/>
@@ -22697,14 +22918,14 @@
       </p:sp>
       <p:sp>
         <p:nvSpPr>
-          <p:cNvPr id="54" name="TextBox 53"/>
-          <p:cNvSpPr txBox="1"/>
-          <p:nvPr/>
-        </p:nvSpPr>
-        <p:spPr>
-          <a:xfrm>
-            <a:off x="5504688" y="4160520"/>
-            <a:ext cx="1517904" cy="182880"/>
+          <p:cNvPr id="55" name="TextBox 54"/>
+          <p:cNvSpPr txBox="1"/>
+          <p:nvPr/>
+        </p:nvSpPr>
+        <p:spPr>
+          <a:xfrm>
+            <a:off x="4773168" y="4160520"/>
+            <a:ext cx="4078224" cy="182880"/>
           </a:xfrm>
           <a:prstGeom prst="rect">
             <a:avLst/>
@@ -22725,6 +22946,41 @@
                 </a:solidFill>
                 <a:latin typeface="Apple SD Gothic Neo"/>
               </a:rPr>
+              <a:t>준비 요청 없이 곧바로 본래 일로 간다</a:t>
+            </a:r>
+          </a:p>
+        </p:txBody>
+      </p:sp>
+      <p:sp>
+        <p:nvSpPr>
+          <p:cNvPr id="56" name="TextBox 55"/>
+          <p:cNvSpPr txBox="1"/>
+          <p:nvPr/>
+        </p:nvSpPr>
+        <p:spPr>
+          <a:xfrm>
+            <a:off x="8979408" y="4160520"/>
+            <a:ext cx="2734056" cy="182880"/>
+          </a:xfrm>
+          <a:prstGeom prst="rect">
+            <a:avLst/>
+          </a:prstGeom>
+          <a:noFill/>
+        </p:spPr>
+        <p:txBody>
+          <a:bodyPr wrap="none" lIns="0" rIns="0" tIns="0" bIns="0">
+            <a:spAutoFit/>
+          </a:bodyPr>
+          <a:lstStyle/>
+          <a:p>
+            <a:pPr algn="l"/>
+            <a:r>
+              <a:rPr sz="850" b="0">
+                <a:solidFill>
+                  <a:srgbClr val="1A1A1A"/>
+                </a:solidFill>
+                <a:latin typeface="Apple SD Gothic Neo"/>
+              </a:rPr>
               <a:t>대부분의 요청</a:t>
             </a:r>
           </a:p>
@@ -22732,14 +22988,14 @@
       </p:sp>
       <p:sp>
         <p:nvSpPr>
-          <p:cNvPr id="55" name="Rectangle 54"/>
+          <p:cNvPr id="57" name="Rectangle 56"/>
           <p:cNvSpPr/>
           <p:nvPr/>
         </p:nvSpPr>
         <p:spPr>
           <a:xfrm>
             <a:off x="411480" y="4389120"/>
-            <a:ext cx="6675120" cy="274320"/>
+            <a:ext cx="11365992" cy="274320"/>
           </a:xfrm>
           <a:prstGeom prst="rect">
             <a:avLst/>
@@ -22778,14 +23034,14 @@
       </p:sp>
       <p:sp>
         <p:nvSpPr>
-          <p:cNvPr id="56" name="TextBox 55"/>
+          <p:cNvPr id="58" name="TextBox 57"/>
           <p:cNvSpPr txBox="1"/>
           <p:nvPr/>
         </p:nvSpPr>
         <p:spPr>
           <a:xfrm>
             <a:off x="475488" y="4434840"/>
-            <a:ext cx="2660903" cy="182880"/>
+            <a:ext cx="2203703" cy="182880"/>
           </a:xfrm>
           <a:prstGeom prst="rect">
             <a:avLst/>
@@ -22813,14 +23069,14 @@
       </p:sp>
       <p:sp>
         <p:nvSpPr>
-          <p:cNvPr id="57" name="TextBox 56"/>
-          <p:cNvSpPr txBox="1"/>
-          <p:nvPr/>
-        </p:nvSpPr>
-        <p:spPr>
-          <a:xfrm>
-            <a:off x="3264408" y="4434840"/>
-            <a:ext cx="694944" cy="182880"/>
+          <p:cNvPr id="59" name="TextBox 58"/>
+          <p:cNvSpPr txBox="1"/>
+          <p:nvPr/>
+        </p:nvSpPr>
+        <p:spPr>
+          <a:xfrm>
+            <a:off x="2807208" y="4434840"/>
+            <a:ext cx="649224" cy="182880"/>
           </a:xfrm>
           <a:prstGeom prst="rect">
             <a:avLst/>
@@ -22841,21 +23097,21 @@
                 </a:solidFill>
                 <a:latin typeface="Menlo"/>
               </a:rPr>
-              <a:t>2회</a:t>
-            </a:r>
-          </a:p>
-        </p:txBody>
-      </p:sp>
-      <p:sp>
-        <p:nvSpPr>
-          <p:cNvPr id="58" name="TextBox 57"/>
-          <p:cNvSpPr txBox="1"/>
-          <p:nvPr/>
-        </p:nvSpPr>
-        <p:spPr>
-          <a:xfrm>
-            <a:off x="4087368" y="4434840"/>
-            <a:ext cx="1289304" cy="182880"/>
+              <a:t>1회</a:t>
+            </a:r>
+          </a:p>
+        </p:txBody>
+      </p:sp>
+      <p:sp>
+        <p:nvSpPr>
+          <p:cNvPr id="60" name="TextBox 59"/>
+          <p:cNvSpPr txBox="1"/>
+          <p:nvPr/>
+        </p:nvSpPr>
+        <p:spPr>
+          <a:xfrm>
+            <a:off x="3584448" y="4434840"/>
+            <a:ext cx="1060704" cy="182880"/>
           </a:xfrm>
           <a:prstGeom prst="rect">
             <a:avLst/>
@@ -22876,21 +23132,21 @@
                 </a:solidFill>
                 <a:latin typeface="Menlo"/>
               </a:rPr>
-              <a:t>3.4 ms</a:t>
-            </a:r>
-          </a:p>
-        </p:txBody>
-      </p:sp>
-      <p:sp>
-        <p:nvSpPr>
-          <p:cNvPr id="59" name="TextBox 58"/>
-          <p:cNvSpPr txBox="1"/>
-          <p:nvPr/>
-        </p:nvSpPr>
-        <p:spPr>
-          <a:xfrm>
-            <a:off x="5504688" y="4434840"/>
-            <a:ext cx="1517904" cy="182880"/>
+              <a:t>1.5 ms</a:t>
+            </a:r>
+          </a:p>
+        </p:txBody>
+      </p:sp>
+      <p:sp>
+        <p:nvSpPr>
+          <p:cNvPr id="61" name="TextBox 60"/>
+          <p:cNvSpPr txBox="1"/>
+          <p:nvPr/>
+        </p:nvSpPr>
+        <p:spPr>
+          <a:xfrm>
+            <a:off x="4773168" y="4434840"/>
+            <a:ext cx="4078224" cy="182880"/>
           </a:xfrm>
           <a:prstGeom prst="rect">
             <a:avLst/>
@@ -22911,21 +23167,56 @@
                 </a:solidFill>
                 <a:latin typeface="Apple SD Gothic Neo"/>
               </a:rPr>
-              <a:t>유휴 10분 · 100칸 초과</a:t>
-            </a:r>
-          </a:p>
-        </p:txBody>
-      </p:sp>
-      <p:sp>
-        <p:nvSpPr>
-          <p:cNvPr id="60" name="Rectangle 59"/>
+              <a:t>registry에서 그 세션 포인트 1개를 조회한다</a:t>
+            </a:r>
+          </a:p>
+        </p:txBody>
+      </p:sp>
+      <p:sp>
+        <p:nvSpPr>
+          <p:cNvPr id="62" name="TextBox 61"/>
+          <p:cNvSpPr txBox="1"/>
+          <p:nvPr/>
+        </p:nvSpPr>
+        <p:spPr>
+          <a:xfrm>
+            <a:off x="8979408" y="4434840"/>
+            <a:ext cx="2734056" cy="182880"/>
+          </a:xfrm>
+          <a:prstGeom prst="rect">
+            <a:avLst/>
+          </a:prstGeom>
+          <a:noFill/>
+        </p:spPr>
+        <p:txBody>
+          <a:bodyPr wrap="none" lIns="0" rIns="0" tIns="0" bIns="0">
+            <a:spAutoFit/>
+          </a:bodyPr>
+          <a:lstStyle/>
+          <a:p>
+            <a:pPr algn="l"/>
+            <a:r>
+              <a:rPr sz="850" b="0">
+                <a:solidFill>
+                  <a:srgbClr val="1A1A1A"/>
+                </a:solidFill>
+                <a:latin typeface="Apple SD Gothic Neo"/>
+              </a:rPr>
+              <a:t>유휴 10분 · 재시작 · 100칸 축출 시</a:t>
+            </a:r>
+          </a:p>
+        </p:txBody>
+      </p:sp>
+      <p:sp>
+        <p:nvSpPr>
+          <p:cNvPr id="63" name="Rectangle 62"/>
           <p:cNvSpPr/>
           <p:nvPr/>
         </p:nvSpPr>
         <p:spPr>
           <a:xfrm>
             <a:off x="411480" y="4663440"/>
-            <a:ext cx="6675120" cy="274320"/>
+            <a:ext cx="11365992" cy="274320"/>
           </a:xfrm>
           <a:prstGeom prst="rect">
             <a:avLst/>
@@ -22964,14 +23255,14 @@
       </p:sp>
       <p:sp>
         <p:nvSpPr>
-          <p:cNvPr id="61" name="TextBox 60"/>
+          <p:cNvPr id="64" name="TextBox 63"/>
           <p:cNvSpPr txBox="1"/>
           <p:nvPr/>
         </p:nvSpPr>
         <p:spPr>
           <a:xfrm>
             <a:off x="475488" y="4709159"/>
-            <a:ext cx="2660903" cy="182880"/>
+            <a:ext cx="2203703" cy="182880"/>
           </a:xfrm>
           <a:prstGeom prst="rect">
             <a:avLst/>
@@ -22999,14 +23290,14 @@
       </p:sp>
       <p:sp>
         <p:nvSpPr>
-          <p:cNvPr id="62" name="TextBox 61"/>
-          <p:cNvSpPr txBox="1"/>
-          <p:nvPr/>
-        </p:nvSpPr>
-        <p:spPr>
-          <a:xfrm>
-            <a:off x="3264408" y="4709159"/>
-            <a:ext cx="694944" cy="182880"/>
+          <p:cNvPr id="65" name="TextBox 64"/>
+          <p:cNvSpPr txBox="1"/>
+          <p:nvPr/>
+        </p:nvSpPr>
+        <p:spPr>
+          <a:xfrm>
+            <a:off x="2807208" y="4709159"/>
+            <a:ext cx="649224" cy="182880"/>
           </a:xfrm>
           <a:prstGeom prst="rect">
             <a:avLst/>
@@ -23034,14 +23325,14 @@
       </p:sp>
       <p:sp>
         <p:nvSpPr>
-          <p:cNvPr id="63" name="TextBox 62"/>
-          <p:cNvSpPr txBox="1"/>
-          <p:nvPr/>
-        </p:nvSpPr>
-        <p:spPr>
-          <a:xfrm>
-            <a:off x="4087368" y="4709159"/>
-            <a:ext cx="1289304" cy="182880"/>
+          <p:cNvPr id="66" name="TextBox 65"/>
+          <p:cNvSpPr txBox="1"/>
+          <p:nvPr/>
+        </p:nvSpPr>
+        <p:spPr>
+          <a:xfrm>
+            <a:off x="3584448" y="4709159"/>
+            <a:ext cx="1060704" cy="182880"/>
           </a:xfrm>
           <a:prstGeom prst="rect">
             <a:avLst/>
@@ -23069,14 +23360,14 @@
       </p:sp>
       <p:sp>
         <p:nvSpPr>
-          <p:cNvPr id="64" name="TextBox 63"/>
-          <p:cNvSpPr txBox="1"/>
-          <p:nvPr/>
-        </p:nvSpPr>
-        <p:spPr>
-          <a:xfrm>
-            <a:off x="5504688" y="4709159"/>
-            <a:ext cx="1517904" cy="182880"/>
+          <p:cNvPr id="67" name="TextBox 66"/>
+          <p:cNvSpPr txBox="1"/>
+          <p:nvPr/>
+        </p:nvSpPr>
+        <p:spPr>
+          <a:xfrm>
+            <a:off x="4773168" y="4709159"/>
+            <a:ext cx="4078224" cy="182880"/>
           </a:xfrm>
           <a:prstGeom prst="rect">
             <a:avLst/>
@@ -23097,14 +23388,49 @@
                 </a:solidFill>
                 <a:latin typeface="Apple SD Gothic Neo"/>
               </a:rPr>
-              <a:t>그 세션의 첫 요청 한 번</a:t>
-            </a:r>
-          </a:p>
-        </p:txBody>
-      </p:sp>
-      <p:sp>
-        <p:nvSpPr>
-          <p:cNvPr id="65" name="Oval 64"/>
+              <a:t>컬렉션 2개 165ms · 색인 11개 667ms · registry 4회 18ms</a:t>
+            </a:r>
+          </a:p>
+        </p:txBody>
+      </p:sp>
+      <p:sp>
+        <p:nvSpPr>
+          <p:cNvPr id="68" name="TextBox 67"/>
+          <p:cNvSpPr txBox="1"/>
+          <p:nvPr/>
+        </p:nvSpPr>
+        <p:spPr>
+          <a:xfrm>
+            <a:off x="8979408" y="4709159"/>
+            <a:ext cx="2734056" cy="182880"/>
+          </a:xfrm>
+          <a:prstGeom prst="rect">
+            <a:avLst/>
+          </a:prstGeom>
+          <a:noFill/>
+        </p:spPr>
+        <p:txBody>
+          <a:bodyPr wrap="none" lIns="0" rIns="0" tIns="0" bIns="0">
+            <a:spAutoFit/>
+          </a:bodyPr>
+          <a:lstStyle/>
+          <a:p>
+            <a:pPr algn="l"/>
+            <a:r>
+              <a:rPr sz="850" b="0">
+                <a:solidFill>
+                  <a:srgbClr val="1A1A1A"/>
+                </a:solidFill>
+                <a:latin typeface="Apple SD Gothic Neo"/>
+              </a:rPr>
+              <a:t>그 세션의 첫 요청 한 번 (내역은 7장)</a:t>
+            </a:r>
+          </a:p>
+        </p:txBody>
+      </p:sp>
+      <p:sp>
+        <p:nvSpPr>
+          <p:cNvPr id="69" name="Oval 68"/>
           <p:cNvSpPr/>
           <p:nvPr/>
         </p:nvSpPr>
@@ -23159,195 +23485,7 @@
       </p:sp>
       <p:sp>
         <p:nvSpPr>
-          <p:cNvPr id="66" name="Rounded Rectangle 65"/>
-          <p:cNvSpPr/>
-          <p:nvPr/>
-        </p:nvSpPr>
-        <p:spPr>
-          <a:xfrm>
-            <a:off x="7360920" y="3858768"/>
-            <a:ext cx="4416552" cy="1078992"/>
-          </a:xfrm>
-          <a:prstGeom prst="roundRect">
-            <a:avLst>
-              <a:gd name="adj" fmla="val 12000"/>
-            </a:avLst>
-          </a:prstGeom>
-          <a:solidFill>
-            <a:srgbClr val="FBE6C8"/>
-          </a:solidFill>
-          <a:ln w="16510">
-            <a:solidFill>
-              <a:srgbClr val="B3781F"/>
-            </a:solidFill>
-          </a:ln>
-          <a:effectLst/>
-        </p:spPr>
-        <p:style>
-          <a:lnRef idx="1">
-            <a:schemeClr val="accent1"/>
-          </a:lnRef>
-          <a:fillRef idx="3">
-            <a:schemeClr val="accent1"/>
-          </a:fillRef>
-          <a:effectRef idx="2">
-            <a:schemeClr val="accent1"/>
-          </a:effectRef>
-          <a:fontRef idx="minor">
-            <a:schemeClr val="lt1"/>
-          </a:fontRef>
-        </p:style>
-        <p:txBody>
-          <a:bodyPr rtlCol="0" anchor="ctr" wrap="square" lIns="36576" rIns="36576" tIns="0" bIns="0"/>
-          <a:lstStyle/>
-          <a:p>
-            <a:pPr algn="ctr"/>
-          </a:p>
-        </p:txBody>
-      </p:sp>
-      <p:sp>
-        <p:nvSpPr>
-          <p:cNvPr id="67" name="TextBox 66"/>
-          <p:cNvSpPr txBox="1"/>
-          <p:nvPr/>
-        </p:nvSpPr>
-        <p:spPr>
-          <a:xfrm>
-            <a:off x="7498080" y="3931920"/>
-            <a:ext cx="4005072" cy="201168"/>
-          </a:xfrm>
-          <a:prstGeom prst="rect">
-            <a:avLst/>
-          </a:prstGeom>
-          <a:noFill/>
-        </p:spPr>
-        <p:txBody>
-          <a:bodyPr wrap="none" lIns="0" rIns="0" tIns="0" bIns="0">
-            <a:spAutoFit/>
-          </a:bodyPr>
-          <a:lstStyle/>
-          <a:p>
-            <a:pPr algn="l"/>
-            <a:r>
-              <a:rPr sz="1100" b="1">
-                <a:solidFill>
-                  <a:srgbClr val="1A1A1A"/>
-                </a:solidFill>
-                <a:latin typeface="Apple SD Gothic Neo"/>
-              </a:rPr>
-              <a:t>같은 17회인데 시간은 18배 다르다</a:t>
-            </a:r>
-          </a:p>
-        </p:txBody>
-      </p:sp>
-      <p:sp>
-        <p:nvSpPr>
-          <p:cNvPr id="68" name="TextBox 67"/>
-          <p:cNvSpPr txBox="1"/>
-          <p:nvPr/>
-        </p:nvSpPr>
-        <p:spPr>
-          <a:xfrm>
-            <a:off x="7498080" y="4151376"/>
-            <a:ext cx="4187952" cy="164592"/>
-          </a:xfrm>
-          <a:prstGeom prst="rect">
-            <a:avLst/>
-          </a:prstGeom>
-          <a:noFill/>
-        </p:spPr>
-        <p:txBody>
-          <a:bodyPr wrap="none" lIns="0" rIns="0" tIns="0" bIns="0">
-            <a:spAutoFit/>
-          </a:bodyPr>
-          <a:lstStyle/>
-          <a:p>
-            <a:pPr algn="l"/>
-            <a:r>
-              <a:rPr sz="900" b="0">
-                <a:solidFill>
-                  <a:srgbClr val="1A1A1A"/>
-                </a:solidFill>
-                <a:latin typeface="Apple SD Gothic Neo"/>
-              </a:rPr>
-              <a:t>첫 세션 850ms — 컬렉션과 색인을 실제로 만든다</a:t>
-            </a:r>
-          </a:p>
-        </p:txBody>
-      </p:sp>
-      <p:sp>
-        <p:nvSpPr>
-          <p:cNvPr id="69" name="TextBox 68"/>
-          <p:cNvSpPr txBox="1"/>
-          <p:nvPr/>
-        </p:nvSpPr>
-        <p:spPr>
-          <a:xfrm>
-            <a:off x="7498080" y="4352544"/>
-            <a:ext cx="4187952" cy="164592"/>
-          </a:xfrm>
-          <a:prstGeom prst="rect">
-            <a:avLst/>
-          </a:prstGeom>
-          <a:noFill/>
-        </p:spPr>
-        <p:txBody>
-          <a:bodyPr wrap="none" lIns="0" rIns="0" tIns="0" bIns="0">
-            <a:spAutoFit/>
-          </a:bodyPr>
-          <a:lstStyle/>
-          <a:p>
-            <a:pPr algn="l"/>
-            <a:r>
-              <a:rPr sz="900" b="0">
-                <a:solidFill>
-                  <a:srgbClr val="1A1A1A"/>
-                </a:solidFill>
-                <a:latin typeface="Apple SD Gothic Neo"/>
-              </a:rPr>
-              <a:t>두 번째 새 세션부터 47ms — 이미 있다는 응답만 받는다</a:t>
-            </a:r>
-          </a:p>
-        </p:txBody>
-      </p:sp>
-      <p:sp>
-        <p:nvSpPr>
-          <p:cNvPr id="70" name="TextBox 69"/>
-          <p:cNvSpPr txBox="1"/>
-          <p:nvPr/>
-        </p:nvSpPr>
-        <p:spPr>
-          <a:xfrm>
-            <a:off x="7498080" y="4553712"/>
-            <a:ext cx="4187952" cy="164592"/>
-          </a:xfrm>
-          <a:prstGeom prst="rect">
-            <a:avLst/>
-          </a:prstGeom>
-          <a:noFill/>
-        </p:spPr>
-        <p:txBody>
-          <a:bodyPr wrap="none" lIns="0" rIns="0" tIns="0" bIns="0">
-            <a:spAutoFit/>
-          </a:bodyPr>
-          <a:lstStyle/>
-          <a:p>
-            <a:pPr algn="l"/>
-            <a:r>
-              <a:rPr sz="900" b="0">
-                <a:solidFill>
-                  <a:srgbClr val="1A1A1A"/>
-                </a:solidFill>
-                <a:latin typeface="Apple SD Gothic Neo"/>
-              </a:rPr>
-              <a:t>850ms 내역: 색인 11회 667ms · 컬렉션 2회 165ms</a:t>
-            </a:r>
-          </a:p>
-        </p:txBody>
-      </p:sp>
-      <p:sp>
-        <p:nvSpPr>
-          <p:cNvPr id="71" name="Rounded Rectangle 70"/>
+          <p:cNvPr id="70" name="Rounded Rectangle 69"/>
           <p:cNvSpPr/>
           <p:nvPr/>
         </p:nvSpPr>
@@ -23395,7 +23533,7 @@
       </p:sp>
       <p:sp>
         <p:nvSpPr>
-          <p:cNvPr id="72" name="TextBox 71"/>
+          <p:cNvPr id="71" name="TextBox 70"/>
           <p:cNvSpPr txBox="1"/>
           <p:nvPr/>
         </p:nvSpPr>
@@ -23430,7 +23568,7 @@
       </p:sp>
       <p:sp>
         <p:nvSpPr>
-          <p:cNvPr id="73" name="TextBox 72"/>
+          <p:cNvPr id="72" name="TextBox 71"/>
           <p:cNvSpPr txBox="1"/>
           <p:nvPr/>
         </p:nvSpPr>
@@ -23467,14 +23605,14 @@
                 </a:solidFill>
                 <a:latin typeface="Apple SD Gothic Neo"/>
               </a:rPr>
-              <a:t> 세션 확보, 벡터 upsert, ANN 탐색이다.</a:t>
-            </a:r>
-          </a:p>
-        </p:txBody>
-      </p:sp>
-      <p:sp>
-        <p:nvSpPr>
-          <p:cNvPr id="74" name="TextBox 73"/>
+              <a:t> 문맥 walk와 리랭킹, 원문 복원은 Qdrant 요청이 0회다.</a:t>
+            </a:r>
+          </a:p>
+        </p:txBody>
+      </p:sp>
+      <p:sp>
+        <p:nvSpPr>
+          <p:cNvPr id="73" name="TextBox 72"/>
           <p:cNvSpPr txBox="1"/>
           <p:nvPr/>
         </p:nvSpPr>
@@ -23511,14 +23649,14 @@
                 </a:solidFill>
                 <a:latin typeface="Apple SD Gothic Neo"/>
               </a:rPr>
-              <a:t> 문맥 walk와 리랭킹, 원문 복원은 Qdrant 요청이 0회다.</a:t>
-            </a:r>
-          </a:p>
-        </p:txBody>
-      </p:sp>
-      <p:sp>
-        <p:nvSpPr>
-          <p:cNvPr id="75" name="TextBox 74"/>
+              <a:t> 검색 옵션을 바꿔도 요청은 1회로 고정이다.</a:t>
+            </a:r>
+          </a:p>
+        </p:txBody>
+      </p:sp>
+      <p:sp>
+        <p:nvSpPr>
+          <p:cNvPr id="74" name="TextBox 73"/>
           <p:cNvSpPr txBox="1"/>
           <p:nvPr/>
         </p:nvSpPr>
@@ -23546,7 +23684,7 @@
                 </a:solidFill>
                 <a:latin typeface="Apple SD Gothic Neo"/>
               </a:rPr>
-              <a:t>검색 옵션을 바꿔도 요청은 1회로 고정이다.</a:t>
+              <a:t>신규 등록 17회는 첫 세션만 850ms이고 두 번째 새 세션부터 47ms다.</a:t>
             </a:r>
             <a:r>
               <a:rPr sz="1000" b="0">
@@ -23555,14 +23693,14 @@
                 </a:solidFill>
                 <a:latin typeface="Apple SD Gothic Neo"/>
               </a:rPr>
-              <a:t> top_k와 필터, 문맥 확장, 점수 기준 모두 마찬가지다.</a:t>
-            </a:r>
-          </a:p>
-        </p:txBody>
-      </p:sp>
-      <p:sp>
-        <p:nvSpPr>
-          <p:cNvPr id="76" name="TextBox 75"/>
+              <a:t> 컬렉션과 색인을 실제로 만드는 것이 첫 한 번뿐이기 때문이다.</a:t>
+            </a:r>
+          </a:p>
+        </p:txBody>
+      </p:sp>
+      <p:sp>
+        <p:nvSpPr>
+          <p:cNvPr id="75" name="TextBox 74"/>
           <p:cNvSpPr txBox="1"/>
           <p:nvPr/>
         </p:nvSpPr>
@@ -23606,7 +23744,7 @@
       </p:sp>
       <p:sp>
         <p:nvSpPr>
-          <p:cNvPr id="77" name="TextBox 76"/>
+          <p:cNvPr id="76" name="TextBox 75"/>
           <p:cNvSpPr txBox="1"/>
           <p:nvPr/>
         </p:nvSpPr>
@@ -23939,7 +24077,7 @@
                 </a:solidFill>
                 <a:latin typeface="Apple SD Gothic Neo"/>
               </a:rPr>
-              <a:t>0 · 2 · 17회</a:t>
+              <a:t>0 · 1 · 17회</a:t>
             </a:r>
           </a:p>
         </p:txBody>
@@ -23952,7 +24090,7 @@
         </p:nvSpPr>
         <p:spPr>
           <a:xfrm>
-            <a:off x="576072" y="2157984"/>
+            <a:off x="576072" y="2103120"/>
             <a:ext cx="3337560" cy="182880"/>
           </a:xfrm>
           <a:prstGeom prst="rect">
@@ -23974,7 +24112,7 @@
                 </a:solidFill>
                 <a:latin typeface="Apple SD Gothic Neo"/>
               </a:rPr>
-              <a:t>요청 직전의 준비 단계. 저장과 검색이 같이 쓴다</a:t>
+              <a:t>캐시에 있으면 0회 — 준비 요청 자체가 없다</a:t>
             </a:r>
           </a:p>
         </p:txBody>
@@ -23987,7 +24125,7 @@
         </p:nvSpPr>
         <p:spPr>
           <a:xfrm>
-            <a:off x="576072" y="2377439"/>
+            <a:off x="576072" y="2322576"/>
             <a:ext cx="3337560" cy="182880"/>
           </a:xfrm>
           <a:prstGeom prst="rect">
@@ -24009,20 +24147,55 @@
                 </a:solidFill>
                 <a:latin typeface="Apple SD Gothic Neo"/>
               </a:rPr>
-              <a:t>캐시에 있으면 0회, 빠지면 2회, 처음이면 17회</a:t>
-            </a:r>
-          </a:p>
-        </p:txBody>
-      </p:sp>
-      <p:sp>
-        <p:nvSpPr>
-          <p:cNvPr id="11" name="Rectangle 10"/>
+              <a:t>빠지면 1회 — registry 포인트 1개를 조회한다</a:t>
+            </a:r>
+          </a:p>
+        </p:txBody>
+      </p:sp>
+      <p:sp>
+        <p:nvSpPr>
+          <p:cNvPr id="11" name="TextBox 10"/>
+          <p:cNvSpPr txBox="1"/>
+          <p:nvPr/>
+        </p:nvSpPr>
+        <p:spPr>
+          <a:xfrm>
+            <a:off x="576072" y="2542032"/>
+            <a:ext cx="3337560" cy="182880"/>
+          </a:xfrm>
+          <a:prstGeom prst="rect">
+            <a:avLst/>
+          </a:prstGeom>
+          <a:noFill/>
+        </p:spPr>
+        <p:txBody>
+          <a:bodyPr wrap="square" lIns="0" rIns="0" tIns="0" bIns="0">
+            <a:spAutoFit/>
+          </a:bodyPr>
+          <a:lstStyle/>
+          <a:p>
+            <a:pPr algn="l"/>
+            <a:r>
+              <a:rPr sz="900" b="0">
+                <a:solidFill>
+                  <a:srgbClr val="1A1A1A"/>
+                </a:solidFill>
+                <a:latin typeface="Apple SD Gothic Neo"/>
+              </a:rPr>
+              <a:t>처음이면 17회 — 컬렉션 2개와 색인 11개를 만든다</a:t>
+            </a:r>
+          </a:p>
+        </p:txBody>
+      </p:sp>
+      <p:sp>
+        <p:nvSpPr>
+          <p:cNvPr id="12" name="Rectangle 11"/>
           <p:cNvSpPr/>
           <p:nvPr/>
         </p:nvSpPr>
         <p:spPr>
           <a:xfrm>
-            <a:off x="576072" y="2688336"/>
+            <a:off x="576072" y="2798064"/>
             <a:ext cx="3291840" cy="9144"/>
           </a:xfrm>
           <a:prstGeom prst="rect">
@@ -24060,13 +24233,13 @@
       </p:sp>
       <p:sp>
         <p:nvSpPr>
-          <p:cNvPr id="12" name="TextBox 11"/>
-          <p:cNvSpPr txBox="1"/>
-          <p:nvPr/>
-        </p:nvSpPr>
-        <p:spPr>
-          <a:xfrm>
-            <a:off x="576072" y="2779776"/>
+          <p:cNvPr id="13" name="TextBox 12"/>
+          <p:cNvSpPr txBox="1"/>
+          <p:nvPr/>
+        </p:nvSpPr>
+        <p:spPr>
+          <a:xfrm>
+            <a:off x="576072" y="2871216"/>
             <a:ext cx="3291840" cy="182880"/>
           </a:xfrm>
           <a:prstGeom prst="rect">
@@ -24095,7 +24268,7 @@
       </p:sp>
       <p:sp>
         <p:nvSpPr>
-          <p:cNvPr id="13" name="Rounded Rectangle 12"/>
+          <p:cNvPr id="14" name="Rounded Rectangle 13"/>
           <p:cNvSpPr/>
           <p:nvPr/>
         </p:nvSpPr>
@@ -24143,7 +24316,7 @@
       </p:sp>
       <p:sp>
         <p:nvSpPr>
-          <p:cNvPr id="14" name="Oval 13"/>
+          <p:cNvPr id="15" name="Oval 14"/>
           <p:cNvSpPr/>
           <p:nvPr/>
         </p:nvSpPr>
@@ -24198,7 +24371,7 @@
       </p:sp>
       <p:sp>
         <p:nvSpPr>
-          <p:cNvPr id="15" name="TextBox 14"/>
+          <p:cNvPr id="16" name="TextBox 15"/>
           <p:cNvSpPr txBox="1"/>
           <p:nvPr/>
         </p:nvSpPr>
@@ -24233,7 +24406,7 @@
       </p:sp>
       <p:sp>
         <p:nvSpPr>
-          <p:cNvPr id="16" name="TextBox 15"/>
+          <p:cNvPr id="17" name="TextBox 16"/>
           <p:cNvSpPr txBox="1"/>
           <p:nvPr/>
         </p:nvSpPr>
@@ -24268,13 +24441,13 @@
       </p:sp>
       <p:sp>
         <p:nvSpPr>
-          <p:cNvPr id="17" name="TextBox 16"/>
-          <p:cNvSpPr txBox="1"/>
-          <p:nvPr/>
-        </p:nvSpPr>
-        <p:spPr>
-          <a:xfrm>
-            <a:off x="4453128" y="2157984"/>
+          <p:cNvPr id="18" name="TextBox 17"/>
+          <p:cNvSpPr txBox="1"/>
+          <p:nvPr/>
+        </p:nvSpPr>
+        <p:spPr>
+          <a:xfrm>
+            <a:off x="4453128" y="2103120"/>
             <a:ext cx="3337560" cy="182880"/>
           </a:xfrm>
           <a:prstGeom prst="rect">
@@ -24303,13 +24476,13 @@
       </p:sp>
       <p:sp>
         <p:nvSpPr>
-          <p:cNvPr id="18" name="TextBox 17"/>
-          <p:cNvSpPr txBox="1"/>
-          <p:nvPr/>
-        </p:nvSpPr>
-        <p:spPr>
-          <a:xfrm>
-            <a:off x="4453128" y="2377439"/>
+          <p:cNvPr id="19" name="TextBox 18"/>
+          <p:cNvSpPr txBox="1"/>
+          <p:nvPr/>
+        </p:nvSpPr>
+        <p:spPr>
+          <a:xfrm>
+            <a:off x="4453128" y="2322576"/>
             <a:ext cx="3337560" cy="182880"/>
           </a:xfrm>
           <a:prstGeom prst="rect">
@@ -24338,13 +24511,48 @@
       </p:sp>
       <p:sp>
         <p:nvSpPr>
-          <p:cNvPr id="19" name="Rectangle 18"/>
+          <p:cNvPr id="20" name="TextBox 19"/>
+          <p:cNvSpPr txBox="1"/>
+          <p:nvPr/>
+        </p:nvSpPr>
+        <p:spPr>
+          <a:xfrm>
+            <a:off x="4453128" y="2542032"/>
+            <a:ext cx="3337560" cy="182880"/>
+          </a:xfrm>
+          <a:prstGeom prst="rect">
+            <a:avLst/>
+          </a:prstGeom>
+          <a:noFill/>
+        </p:spPr>
+        <p:txBody>
+          <a:bodyPr wrap="square" lIns="0" rIns="0" tIns="0" bIns="0">
+            <a:spAutoFit/>
+          </a:bodyPr>
+          <a:lstStyle/>
+          <a:p>
+            <a:pPr algn="l"/>
+            <a:r>
+              <a:rPr sz="900" b="0">
+                <a:solidFill>
+                  <a:srgbClr val="1A1A1A"/>
+                </a:solidFill>
+                <a:latin typeface="Apple SD Gothic Neo"/>
+              </a:rPr>
+              <a:t>PUT …/points — 벡터와 payload를 써 넣는다</a:t>
+            </a:r>
+          </a:p>
+        </p:txBody>
+      </p:sp>
+      <p:sp>
+        <p:nvSpPr>
+          <p:cNvPr id="21" name="Rectangle 20"/>
           <p:cNvSpPr/>
           <p:nvPr/>
         </p:nvSpPr>
         <p:spPr>
           <a:xfrm>
-            <a:off x="4453128" y="2688336"/>
+            <a:off x="4453128" y="2798064"/>
             <a:ext cx="3291840" cy="9144"/>
           </a:xfrm>
           <a:prstGeom prst="rect">
@@ -24382,13 +24590,13 @@
       </p:sp>
       <p:sp>
         <p:nvSpPr>
-          <p:cNvPr id="20" name="TextBox 19"/>
-          <p:cNvSpPr txBox="1"/>
-          <p:nvPr/>
-        </p:nvSpPr>
-        <p:spPr>
-          <a:xfrm>
-            <a:off x="4453128" y="2779776"/>
+          <p:cNvPr id="22" name="TextBox 21"/>
+          <p:cNvSpPr txBox="1"/>
+          <p:nvPr/>
+        </p:nvSpPr>
+        <p:spPr>
+          <a:xfrm>
+            <a:off x="4453128" y="2871216"/>
             <a:ext cx="3291840" cy="182880"/>
           </a:xfrm>
           <a:prstGeom prst="rect">
@@ -24417,7 +24625,7 @@
       </p:sp>
       <p:sp>
         <p:nvSpPr>
-          <p:cNvPr id="21" name="Rounded Rectangle 20"/>
+          <p:cNvPr id="23" name="Rounded Rectangle 22"/>
           <p:cNvSpPr/>
           <p:nvPr/>
         </p:nvSpPr>
@@ -24465,7 +24673,7 @@
       </p:sp>
       <p:sp>
         <p:nvSpPr>
-          <p:cNvPr id="22" name="Oval 21"/>
+          <p:cNvPr id="24" name="Oval 23"/>
           <p:cNvSpPr/>
           <p:nvPr/>
         </p:nvSpPr>
@@ -24520,7 +24728,7 @@
       </p:sp>
       <p:sp>
         <p:nvSpPr>
-          <p:cNvPr id="23" name="TextBox 22"/>
+          <p:cNvPr id="25" name="TextBox 24"/>
           <p:cNvSpPr txBox="1"/>
           <p:nvPr/>
         </p:nvSpPr>
@@ -24555,7 +24763,7 @@
       </p:sp>
       <p:sp>
         <p:nvSpPr>
-          <p:cNvPr id="24" name="TextBox 23"/>
+          <p:cNvPr id="26" name="TextBox 25"/>
           <p:cNvSpPr txBox="1"/>
           <p:nvPr/>
         </p:nvSpPr>
@@ -24590,13 +24798,13 @@
       </p:sp>
       <p:sp>
         <p:nvSpPr>
-          <p:cNvPr id="25" name="TextBox 24"/>
-          <p:cNvSpPr txBox="1"/>
-          <p:nvPr/>
-        </p:nvSpPr>
-        <p:spPr>
-          <a:xfrm>
-            <a:off x="8330183" y="2157984"/>
+          <p:cNvPr id="27" name="TextBox 26"/>
+          <p:cNvSpPr txBox="1"/>
+          <p:nvPr/>
+        </p:nvSpPr>
+        <p:spPr>
+          <a:xfrm>
+            <a:off x="8330183" y="2103120"/>
             <a:ext cx="3337560" cy="182880"/>
           </a:xfrm>
           <a:prstGeom prst="rect">
@@ -24625,13 +24833,13 @@
       </p:sp>
       <p:sp>
         <p:nvSpPr>
-          <p:cNvPr id="26" name="TextBox 25"/>
-          <p:cNvSpPr txBox="1"/>
-          <p:nvPr/>
-        </p:nvSpPr>
-        <p:spPr>
-          <a:xfrm>
-            <a:off x="8330183" y="2377439"/>
+          <p:cNvPr id="28" name="TextBox 27"/>
+          <p:cNvSpPr txBox="1"/>
+          <p:nvPr/>
+        </p:nvSpPr>
+        <p:spPr>
+          <a:xfrm>
+            <a:off x="8330183" y="2322576"/>
             <a:ext cx="3337560" cy="182880"/>
           </a:xfrm>
           <a:prstGeom prst="rect">
@@ -24660,13 +24868,48 @@
       </p:sp>
       <p:sp>
         <p:nvSpPr>
-          <p:cNvPr id="27" name="Rectangle 26"/>
+          <p:cNvPr id="29" name="TextBox 28"/>
+          <p:cNvSpPr txBox="1"/>
+          <p:nvPr/>
+        </p:nvSpPr>
+        <p:spPr>
+          <a:xfrm>
+            <a:off x="8330183" y="2542032"/>
+            <a:ext cx="3337560" cy="182880"/>
+          </a:xfrm>
+          <a:prstGeom prst="rect">
+            <a:avLst/>
+          </a:prstGeom>
+          <a:noFill/>
+        </p:spPr>
+        <p:txBody>
+          <a:bodyPr wrap="square" lIns="0" rIns="0" tIns="0" bIns="0">
+            <a:spAutoFit/>
+          </a:bodyPr>
+          <a:lstStyle/>
+          <a:p>
+            <a:pPr algn="l"/>
+            <a:r>
+              <a:rPr sz="900" b="0">
+                <a:solidFill>
+                  <a:srgbClr val="1A1A1A"/>
+                </a:solidFill>
+                <a:latin typeface="Apple SD Gothic Neo"/>
+              </a:rPr>
+              <a:t>POST …/points/query/batch — 유사도 탐색</a:t>
+            </a:r>
+          </a:p>
+        </p:txBody>
+      </p:sp>
+      <p:sp>
+        <p:nvSpPr>
+          <p:cNvPr id="30" name="Rectangle 29"/>
           <p:cNvSpPr/>
           <p:nvPr/>
         </p:nvSpPr>
         <p:spPr>
           <a:xfrm>
-            <a:off x="8330183" y="2688336"/>
+            <a:off x="8330183" y="2798064"/>
             <a:ext cx="3291840" cy="9144"/>
           </a:xfrm>
           <a:prstGeom prst="rect">
@@ -24704,13 +24947,13 @@
       </p:sp>
       <p:sp>
         <p:nvSpPr>
-          <p:cNvPr id="28" name="TextBox 27"/>
-          <p:cNvSpPr txBox="1"/>
-          <p:nvPr/>
-        </p:nvSpPr>
-        <p:spPr>
-          <a:xfrm>
-            <a:off x="8330183" y="2779776"/>
+          <p:cNvPr id="31" name="TextBox 30"/>
+          <p:cNvSpPr txBox="1"/>
+          <p:nvPr/>
+        </p:nvSpPr>
+        <p:spPr>
+          <a:xfrm>
+            <a:off x="8330183" y="2871216"/>
             <a:ext cx="3291840" cy="182880"/>
           </a:xfrm>
           <a:prstGeom prst="rect">
@@ -24739,7 +24982,7 @@
       </p:sp>
       <p:sp>
         <p:nvSpPr>
-          <p:cNvPr id="29" name="TextBox 28"/>
+          <p:cNvPr id="32" name="TextBox 31"/>
           <p:cNvSpPr txBox="1"/>
           <p:nvPr/>
         </p:nvSpPr>
@@ -24774,7 +25017,7 @@
       </p:sp>
       <p:sp>
         <p:nvSpPr>
-          <p:cNvPr id="30" name="Rounded Rectangle 29"/>
+          <p:cNvPr id="33" name="Rounded Rectangle 32"/>
           <p:cNvSpPr/>
           <p:nvPr/>
         </p:nvSpPr>
@@ -24822,7 +25065,7 @@
       </p:sp>
       <p:sp>
         <p:nvSpPr>
-          <p:cNvPr id="31" name="TextBox 30"/>
+          <p:cNvPr id="34" name="TextBox 33"/>
           <p:cNvSpPr txBox="1"/>
           <p:nvPr/>
         </p:nvSpPr>
@@ -24857,7 +25100,7 @@
       </p:sp>
       <p:sp>
         <p:nvSpPr>
-          <p:cNvPr id="32" name="TextBox 31"/>
+          <p:cNvPr id="35" name="TextBox 34"/>
           <p:cNvSpPr txBox="1"/>
           <p:nvPr/>
         </p:nvSpPr>
@@ -24892,7 +25135,7 @@
       </p:sp>
       <p:sp>
         <p:nvSpPr>
-          <p:cNvPr id="33" name="Rectangle 32"/>
+          <p:cNvPr id="36" name="Rectangle 35"/>
           <p:cNvSpPr/>
           <p:nvPr/>
         </p:nvSpPr>
@@ -24936,7 +25179,7 @@
       </p:sp>
       <p:sp>
         <p:nvSpPr>
-          <p:cNvPr id="34" name="Rectangle 33"/>
+          <p:cNvPr id="37" name="Rectangle 36"/>
           <p:cNvSpPr/>
           <p:nvPr/>
         </p:nvSpPr>
@@ -24980,7 +25223,7 @@
       </p:sp>
       <p:sp>
         <p:nvSpPr>
-          <p:cNvPr id="35" name="TextBox 34"/>
+          <p:cNvPr id="38" name="TextBox 37"/>
           <p:cNvSpPr txBox="1"/>
           <p:nvPr/>
         </p:nvSpPr>
@@ -25015,7 +25258,7 @@
       </p:sp>
       <p:sp>
         <p:nvSpPr>
-          <p:cNvPr id="36" name="TextBox 35"/>
+          <p:cNvPr id="39" name="TextBox 38"/>
           <p:cNvSpPr txBox="1"/>
           <p:nvPr/>
         </p:nvSpPr>
@@ -25050,7 +25293,7 @@
       </p:sp>
       <p:sp>
         <p:nvSpPr>
-          <p:cNvPr id="37" name="Rectangle 36"/>
+          <p:cNvPr id="40" name="Rectangle 39"/>
           <p:cNvSpPr/>
           <p:nvPr/>
         </p:nvSpPr>
@@ -25094,7 +25337,7 @@
       </p:sp>
       <p:sp>
         <p:nvSpPr>
-          <p:cNvPr id="38" name="Rectangle 37"/>
+          <p:cNvPr id="41" name="Rectangle 40"/>
           <p:cNvSpPr/>
           <p:nvPr/>
         </p:nvSpPr>
@@ -25138,7 +25381,7 @@
       </p:sp>
       <p:sp>
         <p:nvSpPr>
-          <p:cNvPr id="39" name="TextBox 38"/>
+          <p:cNvPr id="42" name="TextBox 41"/>
           <p:cNvSpPr txBox="1"/>
           <p:nvPr/>
         </p:nvSpPr>
@@ -25173,7 +25416,7 @@
       </p:sp>
       <p:sp>
         <p:nvSpPr>
-          <p:cNvPr id="40" name="TextBox 39"/>
+          <p:cNvPr id="43" name="TextBox 42"/>
           <p:cNvSpPr txBox="1"/>
           <p:nvPr/>
         </p:nvSpPr>
@@ -25201,14 +25444,14 @@
                 </a:solidFill>
                 <a:latin typeface="Apple SD Gothic Neo"/>
               </a:rPr>
-              <a:t>재준비 2회 — 캐시 미스</a:t>
-            </a:r>
-          </a:p>
-        </p:txBody>
-      </p:sp>
-      <p:sp>
-        <p:nvSpPr>
-          <p:cNvPr id="41" name="Rectangle 40"/>
+              <a:t>재준비 1회 — registry 조회</a:t>
+            </a:r>
+          </a:p>
+        </p:txBody>
+      </p:sp>
+      <p:sp>
+        <p:nvSpPr>
+          <p:cNvPr id="44" name="Rectangle 43"/>
           <p:cNvSpPr/>
           <p:nvPr/>
         </p:nvSpPr>
@@ -25252,14 +25495,14 @@
       </p:sp>
       <p:sp>
         <p:nvSpPr>
-          <p:cNvPr id="42" name="Rectangle 41"/>
+          <p:cNvPr id="45" name="Rectangle 44"/>
           <p:cNvSpPr/>
           <p:nvPr/>
         </p:nvSpPr>
         <p:spPr>
           <a:xfrm>
             <a:off x="2331720" y="4498848"/>
-            <a:ext cx="1904238" cy="182880"/>
+            <a:ext cx="840105" cy="182880"/>
           </a:xfrm>
           <a:prstGeom prst="rect">
             <a:avLst/>
@@ -25296,7 +25539,7 @@
       </p:sp>
       <p:sp>
         <p:nvSpPr>
-          <p:cNvPr id="43" name="TextBox 42"/>
+          <p:cNvPr id="46" name="TextBox 45"/>
           <p:cNvSpPr txBox="1"/>
           <p:nvPr/>
         </p:nvSpPr>
@@ -25324,14 +25567,14 @@
                 </a:solidFill>
                 <a:latin typeface="Menlo"/>
               </a:rPr>
-              <a:t>3.4 ms</a:t>
-            </a:r>
-          </a:p>
-        </p:txBody>
-      </p:sp>
-      <p:sp>
-        <p:nvSpPr>
-          <p:cNvPr id="44" name="Rounded Rectangle 43"/>
+              <a:t>1.5 ms</a:t>
+            </a:r>
+          </a:p>
+        </p:txBody>
+      </p:sp>
+      <p:sp>
+        <p:nvSpPr>
+          <p:cNvPr id="47" name="Rounded Rectangle 46"/>
           <p:cNvSpPr/>
           <p:nvPr/>
         </p:nvSpPr>
@@ -25379,7 +25622,7 @@
       </p:sp>
       <p:sp>
         <p:nvSpPr>
-          <p:cNvPr id="45" name="TextBox 44"/>
+          <p:cNvPr id="48" name="TextBox 47"/>
           <p:cNvSpPr txBox="1"/>
           <p:nvPr/>
         </p:nvSpPr>
@@ -25414,7 +25657,7 @@
       </p:sp>
       <p:sp>
         <p:nvSpPr>
-          <p:cNvPr id="46" name="TextBox 45"/>
+          <p:cNvPr id="49" name="TextBox 48"/>
           <p:cNvSpPr txBox="1"/>
           <p:nvPr/>
         </p:nvSpPr>
@@ -25449,7 +25692,7 @@
       </p:sp>
       <p:sp>
         <p:nvSpPr>
-          <p:cNvPr id="47" name="Rectangle 46"/>
+          <p:cNvPr id="50" name="Rectangle 49"/>
           <p:cNvSpPr/>
           <p:nvPr/>
         </p:nvSpPr>
@@ -25493,7 +25736,7 @@
       </p:sp>
       <p:sp>
         <p:nvSpPr>
-          <p:cNvPr id="48" name="Rectangle 47"/>
+          <p:cNvPr id="51" name="Rectangle 50"/>
           <p:cNvSpPr/>
           <p:nvPr/>
         </p:nvSpPr>
@@ -25537,7 +25780,7 @@
       </p:sp>
       <p:sp>
         <p:nvSpPr>
-          <p:cNvPr id="49" name="TextBox 48"/>
+          <p:cNvPr id="52" name="TextBox 51"/>
           <p:cNvSpPr txBox="1"/>
           <p:nvPr/>
         </p:nvSpPr>
@@ -25572,7 +25815,7 @@
       </p:sp>
       <p:sp>
         <p:nvSpPr>
-          <p:cNvPr id="50" name="TextBox 49"/>
+          <p:cNvPr id="53" name="TextBox 52"/>
           <p:cNvSpPr txBox="1"/>
           <p:nvPr/>
         </p:nvSpPr>
@@ -25607,7 +25850,7 @@
       </p:sp>
       <p:sp>
         <p:nvSpPr>
-          <p:cNvPr id="51" name="Rectangle 50"/>
+          <p:cNvPr id="54" name="Rectangle 53"/>
           <p:cNvSpPr/>
           <p:nvPr/>
         </p:nvSpPr>
@@ -25651,7 +25894,7 @@
       </p:sp>
       <p:sp>
         <p:nvSpPr>
-          <p:cNvPr id="52" name="Rectangle 51"/>
+          <p:cNvPr id="55" name="Rectangle 54"/>
           <p:cNvSpPr/>
           <p:nvPr/>
         </p:nvSpPr>
@@ -25695,7 +25938,7 @@
       </p:sp>
       <p:sp>
         <p:nvSpPr>
-          <p:cNvPr id="53" name="TextBox 52"/>
+          <p:cNvPr id="56" name="TextBox 55"/>
           <p:cNvSpPr txBox="1"/>
           <p:nvPr/>
         </p:nvSpPr>
@@ -25730,7 +25973,7 @@
       </p:sp>
       <p:sp>
         <p:nvSpPr>
-          <p:cNvPr id="54" name="TextBox 53"/>
+          <p:cNvPr id="57" name="TextBox 56"/>
           <p:cNvSpPr txBox="1"/>
           <p:nvPr/>
         </p:nvSpPr>
@@ -25765,7 +26008,7 @@
       </p:sp>
       <p:sp>
         <p:nvSpPr>
-          <p:cNvPr id="55" name="Rounded Rectangle 54"/>
+          <p:cNvPr id="58" name="Rounded Rectangle 57"/>
           <p:cNvSpPr/>
           <p:nvPr/>
         </p:nvSpPr>
@@ -25813,7 +26056,7 @@
       </p:sp>
       <p:sp>
         <p:nvSpPr>
-          <p:cNvPr id="56" name="TextBox 55"/>
+          <p:cNvPr id="59" name="TextBox 58"/>
           <p:cNvSpPr txBox="1"/>
           <p:nvPr/>
         </p:nvSpPr>
@@ -25848,7 +26091,7 @@
       </p:sp>
       <p:sp>
         <p:nvSpPr>
-          <p:cNvPr id="57" name="TextBox 56"/>
+          <p:cNvPr id="60" name="TextBox 59"/>
           <p:cNvSpPr txBox="1"/>
           <p:nvPr/>
         </p:nvSpPr>
@@ -25892,7 +26135,7 @@
       </p:sp>
       <p:sp>
         <p:nvSpPr>
-          <p:cNvPr id="58" name="TextBox 57"/>
+          <p:cNvPr id="61" name="TextBox 60"/>
           <p:cNvSpPr txBox="1"/>
           <p:nvPr/>
         </p:nvSpPr>
@@ -25936,7 +26179,7 @@
       </p:sp>
       <p:sp>
         <p:nvSpPr>
-          <p:cNvPr id="59" name="TextBox 58"/>
+          <p:cNvPr id="62" name="TextBox 61"/>
           <p:cNvSpPr txBox="1"/>
           <p:nvPr/>
         </p:nvSpPr>
@@ -25973,14 +26216,14 @@
                 </a:solidFill>
                 <a:latin typeface="Apple SD Gothic Neo"/>
               </a:rPr>
-              <a:t> 캐시 100칸을 넘겨 재준비가 상시화되는 쪽이다.</a:t>
-            </a:r>
-          </a:p>
-        </p:txBody>
-      </p:sp>
-      <p:sp>
-        <p:nvSpPr>
-          <p:cNvPr id="60" name="TextBox 59"/>
+              <a:t> 캐시 100칸이 찬 뒤 유휴 세션이 밀려나 재준비가 상시화되는 쪽이다.</a:t>
+            </a:r>
+          </a:p>
+        </p:txBody>
+      </p:sp>
+      <p:sp>
+        <p:nvSpPr>
+          <p:cNvPr id="63" name="TextBox 62"/>
           <p:cNvSpPr txBox="1"/>
           <p:nvPr/>
         </p:nvSpPr>
@@ -26024,7 +26267,7 @@
       </p:sp>
       <p:sp>
         <p:nvSpPr>
-          <p:cNvPr id="61" name="TextBox 60"/>
+          <p:cNvPr id="64" name="TextBox 63"/>
           <p:cNvSpPr txBox="1"/>
           <p:nvPr/>
         </p:nvSpPr>
